--- a/docs/ppt/Volcano_KubeCon_NA_2026_draft.pptx
+++ b/docs/ppt/Volcano_KubeCon_NA_2026_draft.pptx
@@ -605,7 +605,7 @@
           </a:p>
           <a:p>
             <a:r>
-              <a:t>1:30。隔离测试环境中，其他资源与约束都满足，仅 anti-affinity 无第二个合法域。required 保持 Pending；preferred 可以选择违反偏好的可行放置，并非保证一定放到某节点。若无实测截图，保留 illustrative 标签，不宣称已经运行演示。</a:t>
+              <a:t>2:00。Kthena 已有 gang/topology。KubeRay #5249 已合并，#5369 截至核查仍 open。Grove #516 最终实现包含 SubGroupPolicy，但显式拒绝 topology constraints。Kubeflow / LWS 不是从零集成，后续深化分组与拓扑。各条既有能力不都意味着同等支持两级 gang 或 topology。</a:t>
             </a:r>
           </a:p>
           <a:p/>
@@ -616,7 +616,37 @@
           </a:p>
           <a:p>
             <a:r>
-              <a:t>https://github.com/volcano-sh/volcano/blob/v1.16.0/docs/user-guide/how_to_use_podgroup_anti_affinity.md</a:t>
+              <a:t>https://github.com/volcano-sh/kthena/blob/main/docs/kthena/versioned_docs/version-v1.0.0/user-guide/gang-scheduling.md</a:t>
+            </a:r>
+          </a:p>
+          <a:p>
+            <a:r>
+              <a:t>https://github.com/volcano-sh/kthena/blob/main/docs/kthena/versioned_docs/version-v1.0.0/user-guide/network-topology.md</a:t>
+            </a:r>
+          </a:p>
+          <a:p>
+            <a:r>
+              <a:t>https://github.com/kuberay-project/kuberay/pull/5249</a:t>
+            </a:r>
+          </a:p>
+          <a:p>
+            <a:r>
+              <a:t>https://github.com/kuberay-project/kuberay/pull/5369</a:t>
+            </a:r>
+          </a:p>
+          <a:p>
+            <a:r>
+              <a:t>https://github.com/ai-dynamo/grove/pull/516</a:t>
+            </a:r>
+          </a:p>
+          <a:p>
+            <a:r>
+              <a:t>https://trainer.kubeflow.org/en/latest/operator-guides/job-scheduling/volcano.html</a:t>
+            </a:r>
+          </a:p>
+          <a:p>
+            <a:r>
+              <a:t>https://github.com/kubernetes-sigs/lws/pull/498</a:t>
             </a:r>
           </a:p>
         </p:txBody>
@@ -691,7 +721,7 @@
           </a:p>
           <a:p>
             <a:r>
-              <a:t>2:00。Kthena 已有 gang/topology。KubeRay #5249 已合并，#5369 截至核查仍 open。Grove #516 最终实现包含 SubGroupPolicy，但显式拒绝 topology constraints。Kubeflow / LWS 不是从零集成，后续深化分组与拓扑。各条既有能力不都意味着同等支持两级 gang 或 topology。</a:t>
+              <a:t>1:00。仅讨论一个 worker group，忽略 head 等其他需求。minReplicas=2,numOfHosts=2，需要两套完整 replica identity，每套两个 Pods。三个来自 replica 0、一个来自 replica 1 并不满足。一个 WorkerGroup / subgroup policy 能生成多个实际 SubGroups。</a:t>
             </a:r>
           </a:p>
           <a:p/>
@@ -702,37 +732,12 @@
           </a:p>
           <a:p>
             <a:r>
-              <a:t>https://github.com/volcano-sh/kthena/blob/main/docs/kthena/versioned_docs/version-v1.0.0/user-guide/gang-scheduling.md</a:t>
-            </a:r>
-          </a:p>
-          <a:p>
-            <a:r>
-              <a:t>https://github.com/volcano-sh/kthena/blob/main/docs/kthena/versioned_docs/version-v1.0.0/user-guide/network-topology.md</a:t>
-            </a:r>
-          </a:p>
-          <a:p>
-            <a:r>
               <a:t>https://github.com/kuberay-project/kuberay/pull/5249</a:t>
             </a:r>
           </a:p>
           <a:p>
             <a:r>
               <a:t>https://github.com/kuberay-project/kuberay/pull/5369</a:t>
-            </a:r>
-          </a:p>
-          <a:p>
-            <a:r>
-              <a:t>https://github.com/ai-dynamo/grove/pull/516</a:t>
-            </a:r>
-          </a:p>
-          <a:p>
-            <a:r>
-              <a:t>https://trainer.kubeflow.org/en/latest/operator-guides/job-scheduling/volcano.html</a:t>
-            </a:r>
-          </a:p>
-          <a:p>
-            <a:r>
-              <a:t>https://github.com/kubernetes-sigs/lws/pull/498</a:t>
             </a:r>
           </a:p>
         </p:txBody>
@@ -807,7 +812,7 @@
           </a:p>
           <a:p>
             <a:r>
-              <a:t>1:00。仅讨论一个 worker group，忽略 head 等其他需求。minReplicas=2,numOfHosts=2，需要两套完整 replica identity，每套两个 Pods。三个来自 replica 0、一个来自 replica 1 并不满足。一个 WorkerGroup / subgroup policy 能生成多个实际 SubGroups。</a:t>
+              <a:t>1:30。第三章同时交代已有采用与扩展方向。HyperNode standalone 已发布；API 独立可用不等于所有 scheduler adapter 已交付。未来 SubGroup affinity/anti-affinity 位于同一 PodGroup 内，不与已发布的 PodGroup anti-affinity 混淆。转场：控制器与工作负载不断增加，下一步要用可重复的 benchmark 验证规模、延迟和调度开销。</a:t>
             </a:r>
           </a:p>
           <a:p/>
@@ -818,12 +823,17 @@
           </a:p>
           <a:p>
             <a:r>
-              <a:t>https://github.com/kuberay-project/kuberay/pull/5249</a:t>
-            </a:r>
-          </a:p>
-          <a:p>
-            <a:r>
-              <a:t>https://github.com/kuberay-project/kuberay/pull/5369</a:t>
+              <a:t>https://github.com/volcano-sh/volcano/releases/tag/v1.16.0</a:t>
+            </a:r>
+          </a:p>
+          <a:p>
+            <a:r>
+              <a:t>https://github.com/volcano-sh/volcano/issues/6166</a:t>
+            </a:r>
+          </a:p>
+          <a:p>
+            <a:r>
+              <a:t>https://github.com/volcano-sh/volcano/blob/v1.16.0/docs/design/group-topology-affinity.md</a:t>
             </a:r>
           </a:p>
         </p:txBody>
@@ -898,7 +908,7 @@
           </a:p>
           <a:p>
             <a:r>
-              <a:t>1:00。standalone HyperNode controller 已在 v1.16 交付。外部消费者可使用 API，但 kube-scheduler / coscheduling 等 adapter 仍要单独实现，不能画成全部已经支持。</a:t>
+              <a:t>1:30。已核对 benchmark/README.md、testcases 与 scripts。框架提供部署、负载配置和指标收集，既支持 Kind/KWOK 也支持已有集群。按配置可创建 HyperNode。KWOK 测试不能证明真实训练、推理或网络吞吐。此处是调度 benchmark，不是应用 benchmark。</a:t>
             </a:r>
           </a:p>
           <a:p/>
@@ -909,12 +919,12 @@
           </a:p>
           <a:p>
             <a:r>
-              <a:t>https://github.com/volcano-sh/volcano/releases/tag/v1.16.0</a:t>
-            </a:r>
-          </a:p>
-          <a:p>
-            <a:r>
-              <a:t>https://github.com/volcano-sh/volcano/issues/6166</a:t>
+              <a:t>https://github.com/volcano-sh/volcano/blob/a3d50b503/benchmark/README.md</a:t>
+            </a:r>
+          </a:p>
+          <a:p>
+            <a:r>
+              <a:t>https://github.com/volcano-sh/volcano/blob/a3d50b503/benchmark/scripts/README.md</a:t>
             </a:r>
           </a:p>
         </p:txBody>
@@ -989,7 +999,7 @@
           </a:p>
           <a:p>
             <a:r>
-              <a:t>2:00。回到同一个 PodGroup 内部的关系需求，与前面两个 PodGroups 的 anti-affinity 区分。需明确作用层级、匹配实际副本的方法以及 required/preferred 语义。图是两个独立场景，不表示同一对组同时要求共置与分离。</a:t>
+              <a:t>1:30。用户确认 benchmark 持续推进与测试；具体测试重点仍待选择，右栏为建议。左侧仅描述代码已有能力。collect-report 包含 Pod created→scheduled 延迟直方图分位数与成功 binding 事件吞吐计算；本地 audit 文件不可用时吞吐可能缺失。不同来源和时间窗口的指标不能混用。后续可选一项有证据的优化讲进展，不展开 Unschedulable Job Cache。</a:t>
             </a:r>
           </a:p>
           <a:p/>
@@ -1000,12 +1010,12 @@
           </a:p>
           <a:p>
             <a:r>
-              <a:t>https://github.com/volcano-sh/volcano/blob/v1.16.0/docs/design/group-topology-affinity.md</a:t>
-            </a:r>
-          </a:p>
-          <a:p>
-            <a:r>
-              <a:t>https://github.com/volcano-sh/volcano/issues/5347</a:t>
+              <a:t>https://github.com/volcano-sh/volcano/blob/a3d50b503/benchmark/scripts/collect-report.sh</a:t>
+            </a:r>
+          </a:p>
+          <a:p>
+            <a:r>
+              <a:t>https://github.com/volcano-sh/volcano/blob/a3d50b503/benchmark/manifests/monitoring/grafana-dashboard.json</a:t>
             </a:r>
           </a:p>
           <a:p>
@@ -1085,7 +1095,7 @@
           </a:p>
           <a:p>
             <a:r>
-              <a:t>1:30。近期主线：关系语义、controller 映射、真实场景验证。Kthena 继续作为参考场景；KubeRay / Grove 深化；Kubeflow / LWS 在已有集成上拓展。xPU / DRA / GPU-NIC locality 为中期方向，不把整个路线图照搬到正文。</a:t>
+              <a:t>1:30。等待讲者选定当前测试成果。优先选择一组能说明问题的曲线或对比，不把无上下文日志中的数字直接放上来。注明 scheduler build、Kubernetes、控制面资源、节点/Pod/Job规模、gang/topology规则、测量口径与重复次数。没有稳定数字时换成真实 profiling 发现及复测进展，不制造占位曲线，不把旧 scheduler 的优化结果归因于乐观并行架构。</a:t>
             </a:r>
           </a:p>
           <a:p/>
@@ -1096,7 +1106,12 @@
           </a:p>
           <a:p>
             <a:r>
-              <a:t>https://github.com/volcano-sh/volcano/issues/6166</a:t>
+              <a:t>https://github.com/volcano-sh/volcano/blob/a3d50b503/benchmark/README.md</a:t>
+            </a:r>
+          </a:p>
+          <a:p>
+            <a:r>
+              <a:t>https://github.com/volcano-sh/volcano/blob/a3d50b503/benchmark/scripts/collect-report.sh</a:t>
             </a:r>
           </a:p>
         </p:txBody>
@@ -1171,7 +1186,7 @@
           </a:p>
           <a:p>
             <a:r>
-              <a:t>1:30。总结：框架协调、工作负载结构、生态采用。邀请大家带来角色、副本和互联需求，参与 controller 集成与关系语义讨论。若需呼应摘要，可简述项目仍有 Global / 混部已有覆盖，但不宣称新的推进成果。</a:t>
+              <a:t>1:30。回顾四章：统一调度框架、工作负载语义、生态、benchmark。明确性能工作还在持续测试和优化，邀请用户贡献真实场景、可复现 profile 和对比方法。Global/混部不另开章节。</a:t>
             </a:r>
           </a:p>
           <a:p/>
@@ -1187,7 +1202,7 @@
           </a:p>
           <a:p>
             <a:r>
-              <a:t>https://github.com/volcano-sh/volcano</a:t>
+              <a:t>https://github.com/volcano-sh/volcano/blob/a3d50b503/benchmark/README.md</a:t>
             </a:r>
           </a:p>
         </p:txBody>
@@ -1957,7 +1972,7 @@
           </a:p>
           <a:p>
             <a:r>
-              <a:t>2:00。每个实例是一个 PodGroup，内部约束到同一个 supernode，两个 PodGroups 用 anti-affinity 分散。需要启用 plugin；规则选择 PodGroup labels / namespaces，相互分离时双方都应配置规则。主要通过 allocate 执行，不承诺 backfill 的 BestEffort Pods 同样受约束。拓扑分散本身不等于应用 failover。</a:t>
+              <a:t>2:00。顺带说明 required 无合法域则 Pending、preferred 可退化；不再单独占一页。每个实例是一个 PodGroup，内部约束到同一个 supernode，两个 PodGroups 用 anti-affinity 分散。需要启用 plugin；规则选择 PodGroup labels / namespaces，相互分离时双方都应配置规则。主要通过 allocate 执行，不承诺 backfill 的 BestEffort Pods 同样受约束。拓扑分散本身不等于应用 failover。</a:t>
             </a:r>
           </a:p>
           <a:p/>
@@ -5578,7 +5593,7 @@
               </a:defRPr>
             </a:pPr>
             <a:r>
-              <a:t>02 / COORDINATING WORKLOAD GROUPS</a:t>
+              <a:t>03 / ECOSYSTEM PROGRESS</a:t>
             </a:r>
           </a:p>
         </p:txBody>
@@ -5617,7 +5632,7 @@
               </a:defRPr>
             </a:pPr>
             <a:r>
-              <a:t>When Placement Rules Cannot Be Satisfied</a:t>
+              <a:t>Controllers Bring Workload Structure to Scheduling</a:t>
             </a:r>
           </a:p>
         </p:txBody>
@@ -5700,7 +5715,7 @@
               </a:defRPr>
             </a:pPr>
             <a:r>
-              <a:t>待补：45–60 秒录屏或实际放置截图。当前是预期行为示意，不是测试结果。</a:t>
+              <a:t>状态截至 2026-10-28；已合并不等于下游稳定版已发布。演讲前核对 PR 和版本。</a:t>
             </a:r>
           </a:p>
         </p:txBody>
@@ -5739,7 +5754,7 @@
               </a:defRPr>
             </a:pPr>
             <a:r>
-              <a:t>VOLCANO  /  KUBECON NA 2026  /  WORKING DRAFT  •  1:30</a:t>
+              <a:t>VOLCANO  /  KUBECON NA 2026  /  WORKING DRAFT  •  2:00</a:t>
             </a:r>
           </a:p>
         </p:txBody>
@@ -5785,53 +5800,263 @@
       </p:sp>
       <p:sp>
         <p:nvSpPr>
-          <p:cNvPr id="9" name="TextBox 8"/>
-          <p:cNvSpPr txBox="1"/>
+          <p:cNvPr id="9" name="Rectangle 8"/>
+          <p:cNvSpPr/>
           <p:nvPr/>
         </p:nvSpPr>
         <p:spPr>
           <a:xfrm>
             <a:off x="594360" y="1755648"/>
-            <a:ext cx="10881360" cy="530352"/>
-          </a:xfrm>
-          <a:prstGeom prst="rect">
-            <a:avLst/>
-          </a:prstGeom>
-          <a:noFill/>
-        </p:spPr>
-        <p:txBody>
-          <a:bodyPr wrap="square" lIns="18288" rIns="18288" tIns="18288" bIns="0">
-            <a:spAutoFit/>
-          </a:bodyPr>
-          <a:lstStyle/>
-          <a:p>
-            <a:pPr>
-              <a:spcAft>
-                <a:spcPts val="500"/>
-              </a:spcAft>
-              <a:defRPr sz="2500" b="1">
-                <a:solidFill>
-                  <a:srgbClr val="202D3C"/>
-                </a:solidFill>
-                <a:latin typeface="Liberation Sans"/>
-              </a:defRPr>
-            </a:pPr>
-            <a:r>
-              <a:t>Example: only one domain has enough resources.</a:t>
-            </a:r>
-          </a:p>
-        </p:txBody>
-      </p:sp>
-      <p:sp>
-        <p:nvSpPr>
-          <p:cNvPr id="10" name="Rectangle 9"/>
+            <a:ext cx="1755648" cy="466344"/>
+          </a:xfrm>
+          <a:prstGeom prst="rect">
+            <a:avLst/>
+          </a:prstGeom>
+          <a:solidFill>
+            <a:srgbClr val="202D3C"/>
+          </a:solidFill>
+          <a:ln>
+            <a:noFill/>
+          </a:ln>
+          <a:effectLst/>
+        </p:spPr>
+        <p:style>
+          <a:lnRef idx="1">
+            <a:schemeClr val="accent1"/>
+          </a:lnRef>
+          <a:fillRef idx="3">
+            <a:schemeClr val="accent1"/>
+          </a:fillRef>
+          <a:effectRef idx="0">
+            <a:schemeClr val="accent1"/>
+          </a:effectRef>
+          <a:fontRef idx="minor">
+            <a:schemeClr val="lt1"/>
+          </a:fontRef>
+        </p:style>
+        <p:txBody>
+          <a:bodyPr rtlCol="0" anchor="ctr"/>
+          <a:lstStyle/>
+          <a:p>
+            <a:pPr algn="ctr"/>
+          </a:p>
+        </p:txBody>
+      </p:sp>
+      <p:sp>
+        <p:nvSpPr>
+          <p:cNvPr id="10" name="TextBox 9"/>
+          <p:cNvSpPr txBox="1"/>
+          <p:nvPr/>
+        </p:nvSpPr>
+        <p:spPr>
+          <a:xfrm>
+            <a:off x="704088" y="1865376"/>
+            <a:ext cx="1536192" cy="237744"/>
+          </a:xfrm>
+          <a:prstGeom prst="rect">
+            <a:avLst/>
+          </a:prstGeom>
+          <a:noFill/>
+        </p:spPr>
+        <p:txBody>
+          <a:bodyPr wrap="square" lIns="18288" rIns="18288" tIns="18288" bIns="0">
+            <a:spAutoFit/>
+          </a:bodyPr>
+          <a:lstStyle/>
+          <a:p>
+            <a:pPr>
+              <a:spcAft>
+                <a:spcPts val="500"/>
+              </a:spcAft>
+              <a:defRPr sz="1200" b="1">
+                <a:solidFill>
+                  <a:srgbClr val="FFFFFF"/>
+                </a:solidFill>
+                <a:latin typeface="Liberation Sans"/>
+              </a:defRPr>
+            </a:pPr>
+            <a:r>
+              <a:t>PROJECT</a:t>
+            </a:r>
+          </a:p>
+        </p:txBody>
+      </p:sp>
+      <p:sp>
+        <p:nvSpPr>
+          <p:cNvPr id="11" name="Rectangle 10"/>
           <p:cNvSpPr/>
           <p:nvPr/>
         </p:nvSpPr>
         <p:spPr>
           <a:xfrm>
-            <a:off x="612648" y="2670048"/>
-            <a:ext cx="5294376" cy="2560320"/>
+            <a:off x="2350008" y="1755648"/>
+            <a:ext cx="4279392" cy="466344"/>
+          </a:xfrm>
+          <a:prstGeom prst="rect">
+            <a:avLst/>
+          </a:prstGeom>
+          <a:solidFill>
+            <a:srgbClr val="202D3C"/>
+          </a:solidFill>
+          <a:ln>
+            <a:noFill/>
+          </a:ln>
+          <a:effectLst/>
+        </p:spPr>
+        <p:style>
+          <a:lnRef idx="1">
+            <a:schemeClr val="accent1"/>
+          </a:lnRef>
+          <a:fillRef idx="3">
+            <a:schemeClr val="accent1"/>
+          </a:fillRef>
+          <a:effectRef idx="0">
+            <a:schemeClr val="accent1"/>
+          </a:effectRef>
+          <a:fontRef idx="minor">
+            <a:schemeClr val="lt1"/>
+          </a:fontRef>
+        </p:style>
+        <p:txBody>
+          <a:bodyPr rtlCol="0" anchor="ctr"/>
+          <a:lstStyle/>
+          <a:p>
+            <a:pPr algn="ctr"/>
+          </a:p>
+        </p:txBody>
+      </p:sp>
+      <p:sp>
+        <p:nvSpPr>
+          <p:cNvPr id="12" name="TextBox 11"/>
+          <p:cNvSpPr txBox="1"/>
+          <p:nvPr/>
+        </p:nvSpPr>
+        <p:spPr>
+          <a:xfrm>
+            <a:off x="2459736" y="1865376"/>
+            <a:ext cx="4059935" cy="237744"/>
+          </a:xfrm>
+          <a:prstGeom prst="rect">
+            <a:avLst/>
+          </a:prstGeom>
+          <a:noFill/>
+        </p:spPr>
+        <p:txBody>
+          <a:bodyPr wrap="square" lIns="18288" rIns="18288" tIns="18288" bIns="0">
+            <a:spAutoFit/>
+          </a:bodyPr>
+          <a:lstStyle/>
+          <a:p>
+            <a:pPr>
+              <a:spcAft>
+                <a:spcPts val="500"/>
+              </a:spcAft>
+              <a:defRPr sz="1200" b="1">
+                <a:solidFill>
+                  <a:srgbClr val="FFFFFF"/>
+                </a:solidFill>
+                <a:latin typeface="Liberation Sans"/>
+              </a:defRPr>
+            </a:pPr>
+            <a:r>
+              <a:t>EXISTING / MERGED</a:t>
+            </a:r>
+          </a:p>
+        </p:txBody>
+      </p:sp>
+      <p:sp>
+        <p:nvSpPr>
+          <p:cNvPr id="13" name="Rectangle 12"/>
+          <p:cNvSpPr/>
+          <p:nvPr/>
+        </p:nvSpPr>
+        <p:spPr>
+          <a:xfrm>
+            <a:off x="6629400" y="1755648"/>
+            <a:ext cx="4389120" cy="466344"/>
+          </a:xfrm>
+          <a:prstGeom prst="rect">
+            <a:avLst/>
+          </a:prstGeom>
+          <a:solidFill>
+            <a:srgbClr val="202D3C"/>
+          </a:solidFill>
+          <a:ln>
+            <a:noFill/>
+          </a:ln>
+          <a:effectLst/>
+        </p:spPr>
+        <p:style>
+          <a:lnRef idx="1">
+            <a:schemeClr val="accent1"/>
+          </a:lnRef>
+          <a:fillRef idx="3">
+            <a:schemeClr val="accent1"/>
+          </a:fillRef>
+          <a:effectRef idx="0">
+            <a:schemeClr val="accent1"/>
+          </a:effectRef>
+          <a:fontRef idx="minor">
+            <a:schemeClr val="lt1"/>
+          </a:fontRef>
+        </p:style>
+        <p:txBody>
+          <a:bodyPr rtlCol="0" anchor="ctr"/>
+          <a:lstStyle/>
+          <a:p>
+            <a:pPr algn="ctr"/>
+          </a:p>
+        </p:txBody>
+      </p:sp>
+      <p:sp>
+        <p:nvSpPr>
+          <p:cNvPr id="14" name="TextBox 13"/>
+          <p:cNvSpPr txBox="1"/>
+          <p:nvPr/>
+        </p:nvSpPr>
+        <p:spPr>
+          <a:xfrm>
+            <a:off x="6739128" y="1865376"/>
+            <a:ext cx="4169663" cy="237744"/>
+          </a:xfrm>
+          <a:prstGeom prst="rect">
+            <a:avLst/>
+          </a:prstGeom>
+          <a:noFill/>
+        </p:spPr>
+        <p:txBody>
+          <a:bodyPr wrap="square" lIns="18288" rIns="18288" tIns="18288" bIns="0">
+            <a:spAutoFit/>
+          </a:bodyPr>
+          <a:lstStyle/>
+          <a:p>
+            <a:pPr>
+              <a:spcAft>
+                <a:spcPts val="500"/>
+              </a:spcAft>
+              <a:defRPr sz="1200" b="1">
+                <a:solidFill>
+                  <a:srgbClr val="FFFFFF"/>
+                </a:solidFill>
+                <a:latin typeface="Liberation Sans"/>
+              </a:defRPr>
+            </a:pPr>
+            <a:r>
+              <a:t>NEXT / IN PROGRESS</a:t>
+            </a:r>
+          </a:p>
+        </p:txBody>
+      </p:sp>
+      <p:sp>
+        <p:nvSpPr>
+          <p:cNvPr id="15" name="Rectangle 14"/>
+          <p:cNvSpPr/>
+          <p:nvPr/>
+        </p:nvSpPr>
+        <p:spPr>
+          <a:xfrm>
+            <a:off x="594360" y="2231136"/>
+            <a:ext cx="1755648" cy="557784"/>
           </a:xfrm>
           <a:prstGeom prst="rect">
             <a:avLst/>
@@ -5868,70 +6093,31 @@
       </p:sp>
       <p:sp>
         <p:nvSpPr>
-          <p:cNvPr id="11" name="TextBox 10"/>
-          <p:cNvSpPr txBox="1"/>
-          <p:nvPr/>
-        </p:nvSpPr>
-        <p:spPr>
-          <a:xfrm>
-            <a:off x="822960" y="2889504"/>
-            <a:ext cx="4846320" cy="301752"/>
-          </a:xfrm>
-          <a:prstGeom prst="rect">
-            <a:avLst/>
-          </a:prstGeom>
-          <a:noFill/>
-        </p:spPr>
-        <p:txBody>
-          <a:bodyPr wrap="square" lIns="18288" rIns="18288" tIns="18288" bIns="0">
-            <a:spAutoFit/>
-          </a:bodyPr>
-          <a:lstStyle/>
-          <a:p>
-            <a:pPr>
-              <a:spcAft>
-                <a:spcPts val="500"/>
-              </a:spcAft>
-              <a:defRPr sz="1300" b="1">
-                <a:solidFill>
-                  <a:srgbClr val="356696"/>
-                </a:solidFill>
-                <a:latin typeface="Liberation Mono"/>
-              </a:defRPr>
-            </a:pPr>
-            <a:r>
-              <a:t>REQUIRED</a:t>
-            </a:r>
-          </a:p>
-        </p:txBody>
-      </p:sp>
-      <p:sp>
-        <p:nvSpPr>
-          <p:cNvPr id="12" name="TextBox 11"/>
-          <p:cNvSpPr txBox="1"/>
-          <p:nvPr/>
-        </p:nvSpPr>
-        <p:spPr>
-          <a:xfrm>
-            <a:off x="822960" y="3602736"/>
-            <a:ext cx="4800600" cy="777240"/>
-          </a:xfrm>
-          <a:prstGeom prst="rect">
-            <a:avLst/>
-          </a:prstGeom>
-          <a:noFill/>
-        </p:spPr>
-        <p:txBody>
-          <a:bodyPr wrap="square" lIns="18288" rIns="18288" tIns="18288" bIns="0">
-            <a:spAutoFit/>
-          </a:bodyPr>
-          <a:lstStyle/>
-          <a:p>
-            <a:pPr>
-              <a:spcAft>
-                <a:spcPts val="500"/>
-              </a:spcAft>
-              <a:defRPr sz="2400" b="1">
+          <p:cNvPr id="16" name="TextBox 15"/>
+          <p:cNvSpPr txBox="1"/>
+          <p:nvPr/>
+        </p:nvSpPr>
+        <p:spPr>
+          <a:xfrm>
+            <a:off x="704088" y="2377440"/>
+            <a:ext cx="1536192" cy="356616"/>
+          </a:xfrm>
+          <a:prstGeom prst="rect">
+            <a:avLst/>
+          </a:prstGeom>
+          <a:noFill/>
+        </p:spPr>
+        <p:txBody>
+          <a:bodyPr wrap="square" lIns="18288" rIns="18288" tIns="18288" bIns="0">
+            <a:spAutoFit/>
+          </a:bodyPr>
+          <a:lstStyle/>
+          <a:p>
+            <a:pPr>
+              <a:spcAft>
+                <a:spcPts val="500"/>
+              </a:spcAft>
+              <a:defRPr sz="1600" b="1">
                 <a:solidFill>
                   <a:srgbClr val="202D3C"/>
                 </a:solidFill>
@@ -5939,66 +6125,27 @@
               </a:defRPr>
             </a:pPr>
             <a:r>
-              <a:t>Keep the second group Pending</a:t>
-            </a:r>
-          </a:p>
-        </p:txBody>
-      </p:sp>
-      <p:sp>
-        <p:nvSpPr>
-          <p:cNvPr id="13" name="TextBox 12"/>
-          <p:cNvSpPr txBox="1"/>
-          <p:nvPr/>
-        </p:nvSpPr>
-        <p:spPr>
-          <a:xfrm>
-            <a:off x="822960" y="4590288"/>
-            <a:ext cx="4800600" cy="402336"/>
-          </a:xfrm>
-          <a:prstGeom prst="rect">
-            <a:avLst/>
-          </a:prstGeom>
-          <a:noFill/>
-        </p:spPr>
-        <p:txBody>
-          <a:bodyPr wrap="square" lIns="18288" rIns="18288" tIns="18288" bIns="0">
-            <a:spAutoFit/>
-          </a:bodyPr>
-          <a:lstStyle/>
-          <a:p>
-            <a:pPr>
-              <a:spcAft>
-                <a:spcPts val="500"/>
-              </a:spcAft>
-              <a:defRPr sz="1800" b="0">
-                <a:solidFill>
-                  <a:srgbClr val="647282"/>
-                </a:solidFill>
-                <a:latin typeface="Liberation Sans"/>
-              </a:defRPr>
-            </a:pPr>
-            <a:r>
-              <a:t>Do not violate the separation rule.</a:t>
-            </a:r>
-          </a:p>
-        </p:txBody>
-      </p:sp>
-      <p:sp>
-        <p:nvSpPr>
-          <p:cNvPr id="14" name="Rectangle 13"/>
+              <a:t>Kthena</a:t>
+            </a:r>
+          </a:p>
+        </p:txBody>
+      </p:sp>
+      <p:sp>
+        <p:nvSpPr>
+          <p:cNvPr id="17" name="Rectangle 16"/>
           <p:cNvSpPr/>
           <p:nvPr/>
         </p:nvSpPr>
         <p:spPr>
           <a:xfrm>
-            <a:off x="6281928" y="2670048"/>
-            <a:ext cx="5294376" cy="2560320"/>
+            <a:off x="2350008" y="2231136"/>
+            <a:ext cx="4279392" cy="557784"/>
           </a:xfrm>
           <a:prstGeom prst="rect">
             <a:avLst/>
           </a:prstGeom>
           <a:solidFill>
-            <a:srgbClr val="E8EDF3"/>
+            <a:srgbClr val="F0F5FB"/>
           </a:solidFill>
           <a:ln>
             <a:noFill/>
@@ -6029,117 +6176,1157 @@
       </p:sp>
       <p:sp>
         <p:nvSpPr>
-          <p:cNvPr id="15" name="TextBox 14"/>
-          <p:cNvSpPr txBox="1"/>
-          <p:nvPr/>
-        </p:nvSpPr>
-        <p:spPr>
-          <a:xfrm>
-            <a:off x="6492240" y="2889504"/>
-            <a:ext cx="4846320" cy="301752"/>
-          </a:xfrm>
-          <a:prstGeom prst="rect">
-            <a:avLst/>
-          </a:prstGeom>
-          <a:noFill/>
-        </p:spPr>
-        <p:txBody>
-          <a:bodyPr wrap="square" lIns="18288" rIns="18288" tIns="18288" bIns="0">
-            <a:spAutoFit/>
-          </a:bodyPr>
-          <a:lstStyle/>
-          <a:p>
-            <a:pPr>
-              <a:spcAft>
-                <a:spcPts val="500"/>
-              </a:spcAft>
-              <a:defRPr sz="1300" b="1">
+          <p:cNvPr id="18" name="TextBox 17"/>
+          <p:cNvSpPr txBox="1"/>
+          <p:nvPr/>
+        </p:nvSpPr>
+        <p:spPr>
+          <a:xfrm>
+            <a:off x="2459736" y="2377440"/>
+            <a:ext cx="4059935" cy="356616"/>
+          </a:xfrm>
+          <a:prstGeom prst="rect">
+            <a:avLst/>
+          </a:prstGeom>
+          <a:noFill/>
+        </p:spPr>
+        <p:txBody>
+          <a:bodyPr wrap="square" lIns="18288" rIns="18288" tIns="18288" bIns="0">
+            <a:spAutoFit/>
+          </a:bodyPr>
+          <a:lstStyle/>
+          <a:p>
+            <a:pPr>
+              <a:spcAft>
+                <a:spcPts val="500"/>
+              </a:spcAft>
+              <a:defRPr sz="1400" b="0">
+                <a:solidFill>
+                  <a:srgbClr val="202D3C"/>
+                </a:solidFill>
+                <a:latin typeface="Liberation Sans"/>
+              </a:defRPr>
+            </a:pPr>
+            <a:r>
+              <a:t>Role / replica gang + topology</a:t>
+            </a:r>
+          </a:p>
+        </p:txBody>
+      </p:sp>
+      <p:sp>
+        <p:nvSpPr>
+          <p:cNvPr id="19" name="Rectangle 18"/>
+          <p:cNvSpPr/>
+          <p:nvPr/>
+        </p:nvSpPr>
+        <p:spPr>
+          <a:xfrm>
+            <a:off x="6629400" y="2231136"/>
+            <a:ext cx="4389120" cy="557784"/>
+          </a:xfrm>
+          <a:prstGeom prst="rect">
+            <a:avLst/>
+          </a:prstGeom>
+          <a:solidFill>
+            <a:srgbClr val="F0F5FB"/>
+          </a:solidFill>
+          <a:ln>
+            <a:noFill/>
+          </a:ln>
+          <a:effectLst/>
+        </p:spPr>
+        <p:style>
+          <a:lnRef idx="1">
+            <a:schemeClr val="accent1"/>
+          </a:lnRef>
+          <a:fillRef idx="3">
+            <a:schemeClr val="accent1"/>
+          </a:fillRef>
+          <a:effectRef idx="0">
+            <a:schemeClr val="accent1"/>
+          </a:effectRef>
+          <a:fontRef idx="minor">
+            <a:schemeClr val="lt1"/>
+          </a:fontRef>
+        </p:style>
+        <p:txBody>
+          <a:bodyPr rtlCol="0" anchor="ctr"/>
+          <a:lstStyle/>
+          <a:p>
+            <a:pPr algn="ctr"/>
+          </a:p>
+        </p:txBody>
+      </p:sp>
+      <p:sp>
+        <p:nvSpPr>
+          <p:cNvPr id="20" name="TextBox 19"/>
+          <p:cNvSpPr txBox="1"/>
+          <p:nvPr/>
+        </p:nvSpPr>
+        <p:spPr>
+          <a:xfrm>
+            <a:off x="6739128" y="2377440"/>
+            <a:ext cx="4169663" cy="356616"/>
+          </a:xfrm>
+          <a:prstGeom prst="rect">
+            <a:avLst/>
+          </a:prstGeom>
+          <a:noFill/>
+        </p:spPr>
+        <p:txBody>
+          <a:bodyPr wrap="square" lIns="18288" rIns="18288" tIns="18288" bIns="0">
+            <a:spAutoFit/>
+          </a:bodyPr>
+          <a:lstStyle/>
+          <a:p>
+            <a:pPr>
+              <a:spcAft>
+                <a:spcPts val="500"/>
+              </a:spcAft>
+              <a:defRPr sz="1400" b="0">
+                <a:solidFill>
+                  <a:srgbClr val="647282"/>
+                </a:solidFill>
+                <a:latin typeface="Liberation Sans"/>
+              </a:defRPr>
+            </a:pPr>
+            <a:r>
+              <a:t>Reference use cases for group relationships</a:t>
+            </a:r>
+          </a:p>
+        </p:txBody>
+      </p:sp>
+      <p:sp>
+        <p:nvSpPr>
+          <p:cNvPr id="21" name="Rectangle 20"/>
+          <p:cNvSpPr/>
+          <p:nvPr/>
+        </p:nvSpPr>
+        <p:spPr>
+          <a:xfrm>
+            <a:off x="594360" y="2798064"/>
+            <a:ext cx="1755648" cy="557784"/>
+          </a:xfrm>
+          <a:prstGeom prst="rect">
+            <a:avLst/>
+          </a:prstGeom>
+          <a:solidFill>
+            <a:srgbClr val="FFFFFF"/>
+          </a:solidFill>
+          <a:ln>
+            <a:noFill/>
+          </a:ln>
+          <a:effectLst/>
+        </p:spPr>
+        <p:style>
+          <a:lnRef idx="1">
+            <a:schemeClr val="accent1"/>
+          </a:lnRef>
+          <a:fillRef idx="3">
+            <a:schemeClr val="accent1"/>
+          </a:fillRef>
+          <a:effectRef idx="0">
+            <a:schemeClr val="accent1"/>
+          </a:effectRef>
+          <a:fontRef idx="minor">
+            <a:schemeClr val="lt1"/>
+          </a:fontRef>
+        </p:style>
+        <p:txBody>
+          <a:bodyPr rtlCol="0" anchor="ctr"/>
+          <a:lstStyle/>
+          <a:p>
+            <a:pPr algn="ctr"/>
+          </a:p>
+        </p:txBody>
+      </p:sp>
+      <p:sp>
+        <p:nvSpPr>
+          <p:cNvPr id="22" name="TextBox 21"/>
+          <p:cNvSpPr txBox="1"/>
+          <p:nvPr/>
+        </p:nvSpPr>
+        <p:spPr>
+          <a:xfrm>
+            <a:off x="704088" y="2944368"/>
+            <a:ext cx="1536192" cy="356616"/>
+          </a:xfrm>
+          <a:prstGeom prst="rect">
+            <a:avLst/>
+          </a:prstGeom>
+          <a:noFill/>
+        </p:spPr>
+        <p:txBody>
+          <a:bodyPr wrap="square" lIns="18288" rIns="18288" tIns="18288" bIns="0">
+            <a:spAutoFit/>
+          </a:bodyPr>
+          <a:lstStyle/>
+          <a:p>
+            <a:pPr>
+              <a:spcAft>
+                <a:spcPts val="500"/>
+              </a:spcAft>
+              <a:defRPr sz="1600" b="1">
+                <a:solidFill>
+                  <a:srgbClr val="202D3C"/>
+                </a:solidFill>
+                <a:latin typeface="Liberation Sans"/>
+              </a:defRPr>
+            </a:pPr>
+            <a:r>
+              <a:t>KubeRay</a:t>
+            </a:r>
+          </a:p>
+        </p:txBody>
+      </p:sp>
+      <p:sp>
+        <p:nvSpPr>
+          <p:cNvPr id="23" name="Rectangle 22"/>
+          <p:cNvSpPr/>
+          <p:nvPr/>
+        </p:nvSpPr>
+        <p:spPr>
+          <a:xfrm>
+            <a:off x="2350008" y="2798064"/>
+            <a:ext cx="4279392" cy="557784"/>
+          </a:xfrm>
+          <a:prstGeom prst="rect">
+            <a:avLst/>
+          </a:prstGeom>
+          <a:solidFill>
+            <a:srgbClr val="FFFFFF"/>
+          </a:solidFill>
+          <a:ln>
+            <a:noFill/>
+          </a:ln>
+          <a:effectLst/>
+        </p:spPr>
+        <p:style>
+          <a:lnRef idx="1">
+            <a:schemeClr val="accent1"/>
+          </a:lnRef>
+          <a:fillRef idx="3">
+            <a:schemeClr val="accent1"/>
+          </a:fillRef>
+          <a:effectRef idx="0">
+            <a:schemeClr val="accent1"/>
+          </a:effectRef>
+          <a:fontRef idx="minor">
+            <a:schemeClr val="lt1"/>
+          </a:fontRef>
+        </p:style>
+        <p:txBody>
+          <a:bodyPr rtlCol="0" anchor="ctr"/>
+          <a:lstStyle/>
+          <a:p>
+            <a:pPr algn="ctr"/>
+          </a:p>
+        </p:txBody>
+      </p:sp>
+      <p:sp>
+        <p:nvSpPr>
+          <p:cNvPr id="24" name="TextBox 23"/>
+          <p:cNvSpPr txBox="1"/>
+          <p:nvPr/>
+        </p:nvSpPr>
+        <p:spPr>
+          <a:xfrm>
+            <a:off x="2459736" y="2944368"/>
+            <a:ext cx="4059935" cy="356616"/>
+          </a:xfrm>
+          <a:prstGeom prst="rect">
+            <a:avLst/>
+          </a:prstGeom>
+          <a:noFill/>
+        </p:spPr>
+        <p:txBody>
+          <a:bodyPr wrap="square" lIns="18288" rIns="18288" tIns="18288" bIns="0">
+            <a:spAutoFit/>
+          </a:bodyPr>
+          <a:lstStyle/>
+          <a:p>
+            <a:pPr>
+              <a:spcAft>
+                <a:spcPts val="500"/>
+              </a:spcAft>
+              <a:defRPr sz="1400" b="0">
+                <a:solidFill>
+                  <a:srgbClr val="202D3C"/>
+                </a:solidFill>
+                <a:latin typeface="Liberation Sans"/>
+              </a:defRPr>
+            </a:pPr>
+            <a:r>
+              <a:t>SubGroup support · #5249 merged</a:t>
+            </a:r>
+          </a:p>
+        </p:txBody>
+      </p:sp>
+      <p:sp>
+        <p:nvSpPr>
+          <p:cNvPr id="25" name="Rectangle 24"/>
+          <p:cNvSpPr/>
+          <p:nvPr/>
+        </p:nvSpPr>
+        <p:spPr>
+          <a:xfrm>
+            <a:off x="6629400" y="2798064"/>
+            <a:ext cx="4389120" cy="557784"/>
+          </a:xfrm>
+          <a:prstGeom prst="rect">
+            <a:avLst/>
+          </a:prstGeom>
+          <a:solidFill>
+            <a:srgbClr val="FFFFFF"/>
+          </a:solidFill>
+          <a:ln>
+            <a:noFill/>
+          </a:ln>
+          <a:effectLst/>
+        </p:spPr>
+        <p:style>
+          <a:lnRef idx="1">
+            <a:schemeClr val="accent1"/>
+          </a:lnRef>
+          <a:fillRef idx="3">
+            <a:schemeClr val="accent1"/>
+          </a:fillRef>
+          <a:effectRef idx="0">
+            <a:schemeClr val="accent1"/>
+          </a:effectRef>
+          <a:fontRef idx="minor">
+            <a:schemeClr val="lt1"/>
+          </a:fontRef>
+        </p:style>
+        <p:txBody>
+          <a:bodyPr rtlCol="0" anchor="ctr"/>
+          <a:lstStyle/>
+          <a:p>
+            <a:pPr algn="ctr"/>
+          </a:p>
+        </p:txBody>
+      </p:sp>
+      <p:sp>
+        <p:nvSpPr>
+          <p:cNvPr id="26" name="TextBox 25"/>
+          <p:cNvSpPr txBox="1"/>
+          <p:nvPr/>
+        </p:nvSpPr>
+        <p:spPr>
+          <a:xfrm>
+            <a:off x="6739128" y="2944368"/>
+            <a:ext cx="4169663" cy="356616"/>
+          </a:xfrm>
+          <a:prstGeom prst="rect">
+            <a:avLst/>
+          </a:prstGeom>
+          <a:noFill/>
+        </p:spPr>
+        <p:txBody>
+          <a:bodyPr wrap="square" lIns="18288" rIns="18288" tIns="18288" bIns="0">
+            <a:spAutoFit/>
+          </a:bodyPr>
+          <a:lstStyle/>
+          <a:p>
+            <a:pPr>
+              <a:spcAft>
+                <a:spcPts val="500"/>
+              </a:spcAft>
+              <a:defRPr sz="1400" b="0">
+                <a:solidFill>
+                  <a:srgbClr val="647282"/>
+                </a:solidFill>
+                <a:latin typeface="Liberation Sans"/>
+              </a:defRPr>
+            </a:pPr>
+            <a:r>
+              <a:t>Replica topology · #5369 open</a:t>
+            </a:r>
+          </a:p>
+        </p:txBody>
+      </p:sp>
+      <p:sp>
+        <p:nvSpPr>
+          <p:cNvPr id="27" name="Rectangle 26"/>
+          <p:cNvSpPr/>
+          <p:nvPr/>
+        </p:nvSpPr>
+        <p:spPr>
+          <a:xfrm>
+            <a:off x="594360" y="3364991"/>
+            <a:ext cx="1755648" cy="557784"/>
+          </a:xfrm>
+          <a:prstGeom prst="rect">
+            <a:avLst/>
+          </a:prstGeom>
+          <a:solidFill>
+            <a:srgbClr val="F0F5FB"/>
+          </a:solidFill>
+          <a:ln>
+            <a:noFill/>
+          </a:ln>
+          <a:effectLst/>
+        </p:spPr>
+        <p:style>
+          <a:lnRef idx="1">
+            <a:schemeClr val="accent1"/>
+          </a:lnRef>
+          <a:fillRef idx="3">
+            <a:schemeClr val="accent1"/>
+          </a:fillRef>
+          <a:effectRef idx="0">
+            <a:schemeClr val="accent1"/>
+          </a:effectRef>
+          <a:fontRef idx="minor">
+            <a:schemeClr val="lt1"/>
+          </a:fontRef>
+        </p:style>
+        <p:txBody>
+          <a:bodyPr rtlCol="0" anchor="ctr"/>
+          <a:lstStyle/>
+          <a:p>
+            <a:pPr algn="ctr"/>
+          </a:p>
+        </p:txBody>
+      </p:sp>
+      <p:sp>
+        <p:nvSpPr>
+          <p:cNvPr id="28" name="TextBox 27"/>
+          <p:cNvSpPr txBox="1"/>
+          <p:nvPr/>
+        </p:nvSpPr>
+        <p:spPr>
+          <a:xfrm>
+            <a:off x="704088" y="3511296"/>
+            <a:ext cx="1536192" cy="356616"/>
+          </a:xfrm>
+          <a:prstGeom prst="rect">
+            <a:avLst/>
+          </a:prstGeom>
+          <a:noFill/>
+        </p:spPr>
+        <p:txBody>
+          <a:bodyPr wrap="square" lIns="18288" rIns="18288" tIns="18288" bIns="0">
+            <a:spAutoFit/>
+          </a:bodyPr>
+          <a:lstStyle/>
+          <a:p>
+            <a:pPr>
+              <a:spcAft>
+                <a:spcPts val="500"/>
+              </a:spcAft>
+              <a:defRPr sz="1600" b="1">
+                <a:solidFill>
+                  <a:srgbClr val="202D3C"/>
+                </a:solidFill>
+                <a:latin typeface="Liberation Sans"/>
+              </a:defRPr>
+            </a:pPr>
+            <a:r>
+              <a:t>Grove</a:t>
+            </a:r>
+          </a:p>
+        </p:txBody>
+      </p:sp>
+      <p:sp>
+        <p:nvSpPr>
+          <p:cNvPr id="29" name="Rectangle 28"/>
+          <p:cNvSpPr/>
+          <p:nvPr/>
+        </p:nvSpPr>
+        <p:spPr>
+          <a:xfrm>
+            <a:off x="2350008" y="3364991"/>
+            <a:ext cx="4279392" cy="557784"/>
+          </a:xfrm>
+          <a:prstGeom prst="rect">
+            <a:avLst/>
+          </a:prstGeom>
+          <a:solidFill>
+            <a:srgbClr val="F0F5FB"/>
+          </a:solidFill>
+          <a:ln>
+            <a:noFill/>
+          </a:ln>
+          <a:effectLst/>
+        </p:spPr>
+        <p:style>
+          <a:lnRef idx="1">
+            <a:schemeClr val="accent1"/>
+          </a:lnRef>
+          <a:fillRef idx="3">
+            <a:schemeClr val="accent1"/>
+          </a:fillRef>
+          <a:effectRef idx="0">
+            <a:schemeClr val="accent1"/>
+          </a:effectRef>
+          <a:fontRef idx="minor">
+            <a:schemeClr val="lt1"/>
+          </a:fontRef>
+        </p:style>
+        <p:txBody>
+          <a:bodyPr rtlCol="0" anchor="ctr"/>
+          <a:lstStyle/>
+          <a:p>
+            <a:pPr algn="ctr"/>
+          </a:p>
+        </p:txBody>
+      </p:sp>
+      <p:sp>
+        <p:nvSpPr>
+          <p:cNvPr id="30" name="TextBox 29"/>
+          <p:cNvSpPr txBox="1"/>
+          <p:nvPr/>
+        </p:nvSpPr>
+        <p:spPr>
+          <a:xfrm>
+            <a:off x="2459736" y="3511296"/>
+            <a:ext cx="4059935" cy="356616"/>
+          </a:xfrm>
+          <a:prstGeom prst="rect">
+            <a:avLst/>
+          </a:prstGeom>
+          <a:noFill/>
+        </p:spPr>
+        <p:txBody>
+          <a:bodyPr wrap="square" lIns="18288" rIns="18288" tIns="18288" bIns="0">
+            <a:spAutoFit/>
+          </a:bodyPr>
+          <a:lstStyle/>
+          <a:p>
+            <a:pPr>
+              <a:spcAft>
+                <a:spcPts val="500"/>
+              </a:spcAft>
+              <a:defRPr sz="1400" b="0">
+                <a:solidFill>
+                  <a:srgbClr val="202D3C"/>
+                </a:solidFill>
+                <a:latin typeface="Liberation Sans"/>
+              </a:defRPr>
+            </a:pPr>
+            <a:r>
+              <a:t>Gang / SubGroup backend merged</a:t>
+            </a:r>
+          </a:p>
+        </p:txBody>
+      </p:sp>
+      <p:sp>
+        <p:nvSpPr>
+          <p:cNvPr id="31" name="Rectangle 30"/>
+          <p:cNvSpPr/>
+          <p:nvPr/>
+        </p:nvSpPr>
+        <p:spPr>
+          <a:xfrm>
+            <a:off x="6629400" y="3364991"/>
+            <a:ext cx="4389120" cy="557784"/>
+          </a:xfrm>
+          <a:prstGeom prst="rect">
+            <a:avLst/>
+          </a:prstGeom>
+          <a:solidFill>
+            <a:srgbClr val="F0F5FB"/>
+          </a:solidFill>
+          <a:ln>
+            <a:noFill/>
+          </a:ln>
+          <a:effectLst/>
+        </p:spPr>
+        <p:style>
+          <a:lnRef idx="1">
+            <a:schemeClr val="accent1"/>
+          </a:lnRef>
+          <a:fillRef idx="3">
+            <a:schemeClr val="accent1"/>
+          </a:fillRef>
+          <a:effectRef idx="0">
+            <a:schemeClr val="accent1"/>
+          </a:effectRef>
+          <a:fontRef idx="minor">
+            <a:schemeClr val="lt1"/>
+          </a:fontRef>
+        </p:style>
+        <p:txBody>
+          <a:bodyPr rtlCol="0" anchor="ctr"/>
+          <a:lstStyle/>
+          <a:p>
+            <a:pPr algn="ctr"/>
+          </a:p>
+        </p:txBody>
+      </p:sp>
+      <p:sp>
+        <p:nvSpPr>
+          <p:cNvPr id="32" name="TextBox 31"/>
+          <p:cNvSpPr txBox="1"/>
+          <p:nvPr/>
+        </p:nvSpPr>
+        <p:spPr>
+          <a:xfrm>
+            <a:off x="6739128" y="3511296"/>
+            <a:ext cx="4169663" cy="356616"/>
+          </a:xfrm>
+          <a:prstGeom prst="rect">
+            <a:avLst/>
+          </a:prstGeom>
+          <a:noFill/>
+        </p:spPr>
+        <p:txBody>
+          <a:bodyPr wrap="square" lIns="18288" rIns="18288" tIns="18288" bIns="0">
+            <a:spAutoFit/>
+          </a:bodyPr>
+          <a:lstStyle/>
+          <a:p>
+            <a:pPr>
+              <a:spcAft>
+                <a:spcPts val="500"/>
+              </a:spcAft>
+              <a:defRPr sz="1400" b="0">
+                <a:solidFill>
+                  <a:srgbClr val="647282"/>
+                </a:solidFill>
+                <a:latin typeface="Liberation Sans"/>
+              </a:defRPr>
+            </a:pPr>
+            <a:r>
+              <a:t>Topology mapping not yet supported</a:t>
+            </a:r>
+          </a:p>
+        </p:txBody>
+      </p:sp>
+      <p:sp>
+        <p:nvSpPr>
+          <p:cNvPr id="33" name="Rectangle 32"/>
+          <p:cNvSpPr/>
+          <p:nvPr/>
+        </p:nvSpPr>
+        <p:spPr>
+          <a:xfrm>
+            <a:off x="594360" y="3931920"/>
+            <a:ext cx="1755648" cy="557784"/>
+          </a:xfrm>
+          <a:prstGeom prst="rect">
+            <a:avLst/>
+          </a:prstGeom>
+          <a:solidFill>
+            <a:srgbClr val="FFFFFF"/>
+          </a:solidFill>
+          <a:ln>
+            <a:noFill/>
+          </a:ln>
+          <a:effectLst/>
+        </p:spPr>
+        <p:style>
+          <a:lnRef idx="1">
+            <a:schemeClr val="accent1"/>
+          </a:lnRef>
+          <a:fillRef idx="3">
+            <a:schemeClr val="accent1"/>
+          </a:fillRef>
+          <a:effectRef idx="0">
+            <a:schemeClr val="accent1"/>
+          </a:effectRef>
+          <a:fontRef idx="minor">
+            <a:schemeClr val="lt1"/>
+          </a:fontRef>
+        </p:style>
+        <p:txBody>
+          <a:bodyPr rtlCol="0" anchor="ctr"/>
+          <a:lstStyle/>
+          <a:p>
+            <a:pPr algn="ctr"/>
+          </a:p>
+        </p:txBody>
+      </p:sp>
+      <p:sp>
+        <p:nvSpPr>
+          <p:cNvPr id="34" name="TextBox 33"/>
+          <p:cNvSpPr txBox="1"/>
+          <p:nvPr/>
+        </p:nvSpPr>
+        <p:spPr>
+          <a:xfrm>
+            <a:off x="704088" y="4078224"/>
+            <a:ext cx="1536192" cy="356616"/>
+          </a:xfrm>
+          <a:prstGeom prst="rect">
+            <a:avLst/>
+          </a:prstGeom>
+          <a:noFill/>
+        </p:spPr>
+        <p:txBody>
+          <a:bodyPr wrap="square" lIns="18288" rIns="18288" tIns="18288" bIns="0">
+            <a:spAutoFit/>
+          </a:bodyPr>
+          <a:lstStyle/>
+          <a:p>
+            <a:pPr>
+              <a:spcAft>
+                <a:spcPts val="500"/>
+              </a:spcAft>
+              <a:defRPr sz="1600" b="1">
+                <a:solidFill>
+                  <a:srgbClr val="202D3C"/>
+                </a:solidFill>
+                <a:latin typeface="Liberation Sans"/>
+              </a:defRPr>
+            </a:pPr>
+            <a:r>
+              <a:t>Kubeflow</a:t>
+            </a:r>
+          </a:p>
+        </p:txBody>
+      </p:sp>
+      <p:sp>
+        <p:nvSpPr>
+          <p:cNvPr id="35" name="Rectangle 34"/>
+          <p:cNvSpPr/>
+          <p:nvPr/>
+        </p:nvSpPr>
+        <p:spPr>
+          <a:xfrm>
+            <a:off x="2350008" y="3931920"/>
+            <a:ext cx="4279392" cy="557784"/>
+          </a:xfrm>
+          <a:prstGeom prst="rect">
+            <a:avLst/>
+          </a:prstGeom>
+          <a:solidFill>
+            <a:srgbClr val="FFFFFF"/>
+          </a:solidFill>
+          <a:ln>
+            <a:noFill/>
+          </a:ln>
+          <a:effectLst/>
+        </p:spPr>
+        <p:style>
+          <a:lnRef idx="1">
+            <a:schemeClr val="accent1"/>
+          </a:lnRef>
+          <a:fillRef idx="3">
+            <a:schemeClr val="accent1"/>
+          </a:fillRef>
+          <a:effectRef idx="0">
+            <a:schemeClr val="accent1"/>
+          </a:effectRef>
+          <a:fontRef idx="minor">
+            <a:schemeClr val="lt1"/>
+          </a:fontRef>
+        </p:style>
+        <p:txBody>
+          <a:bodyPr rtlCol="0" anchor="ctr"/>
+          <a:lstStyle/>
+          <a:p>
+            <a:pPr algn="ctr"/>
+          </a:p>
+        </p:txBody>
+      </p:sp>
+      <p:sp>
+        <p:nvSpPr>
+          <p:cNvPr id="36" name="TextBox 35"/>
+          <p:cNvSpPr txBox="1"/>
+          <p:nvPr/>
+        </p:nvSpPr>
+        <p:spPr>
+          <a:xfrm>
+            <a:off x="2459736" y="4078224"/>
+            <a:ext cx="4059935" cy="356616"/>
+          </a:xfrm>
+          <a:prstGeom prst="rect">
+            <a:avLst/>
+          </a:prstGeom>
+          <a:noFill/>
+        </p:spPr>
+        <p:txBody>
+          <a:bodyPr wrap="square" lIns="18288" rIns="18288" tIns="18288" bIns="0">
+            <a:spAutoFit/>
+          </a:bodyPr>
+          <a:lstStyle/>
+          <a:p>
+            <a:pPr>
+              <a:spcAft>
+                <a:spcPts val="500"/>
+              </a:spcAft>
+              <a:defRPr sz="1400" b="0">
+                <a:solidFill>
+                  <a:srgbClr val="202D3C"/>
+                </a:solidFill>
+                <a:latin typeface="Liberation Sans"/>
+              </a:defRPr>
+            </a:pPr>
+            <a:r>
+              <a:t>Existing Volcano integration</a:t>
+            </a:r>
+          </a:p>
+        </p:txBody>
+      </p:sp>
+      <p:sp>
+        <p:nvSpPr>
+          <p:cNvPr id="37" name="Rectangle 36"/>
+          <p:cNvSpPr/>
+          <p:nvPr/>
+        </p:nvSpPr>
+        <p:spPr>
+          <a:xfrm>
+            <a:off x="6629400" y="3931920"/>
+            <a:ext cx="4389120" cy="557784"/>
+          </a:xfrm>
+          <a:prstGeom prst="rect">
+            <a:avLst/>
+          </a:prstGeom>
+          <a:solidFill>
+            <a:srgbClr val="FFFFFF"/>
+          </a:solidFill>
+          <a:ln>
+            <a:noFill/>
+          </a:ln>
+          <a:effectLst/>
+        </p:spPr>
+        <p:style>
+          <a:lnRef idx="1">
+            <a:schemeClr val="accent1"/>
+          </a:lnRef>
+          <a:fillRef idx="3">
+            <a:schemeClr val="accent1"/>
+          </a:fillRef>
+          <a:effectRef idx="0">
+            <a:schemeClr val="accent1"/>
+          </a:effectRef>
+          <a:fontRef idx="minor">
+            <a:schemeClr val="lt1"/>
+          </a:fontRef>
+        </p:style>
+        <p:txBody>
+          <a:bodyPr rtlCol="0" anchor="ctr"/>
+          <a:lstStyle/>
+          <a:p>
+            <a:pPr algn="ctr"/>
+          </a:p>
+        </p:txBody>
+      </p:sp>
+      <p:sp>
+        <p:nvSpPr>
+          <p:cNvPr id="38" name="TextBox 37"/>
+          <p:cNvSpPr txBox="1"/>
+          <p:nvPr/>
+        </p:nvSpPr>
+        <p:spPr>
+          <a:xfrm>
+            <a:off x="6739128" y="4078224"/>
+            <a:ext cx="4169663" cy="356616"/>
+          </a:xfrm>
+          <a:prstGeom prst="rect">
+            <a:avLst/>
+          </a:prstGeom>
+          <a:noFill/>
+        </p:spPr>
+        <p:txBody>
+          <a:bodyPr wrap="square" lIns="18288" rIns="18288" tIns="18288" bIns="0">
+            <a:spAutoFit/>
+          </a:bodyPr>
+          <a:lstStyle/>
+          <a:p>
+            <a:pPr>
+              <a:spcAft>
+                <a:spcPts val="500"/>
+              </a:spcAft>
+              <a:defRPr sz="1400" b="0">
+                <a:solidFill>
+                  <a:srgbClr val="647282"/>
+                </a:solidFill>
+                <a:latin typeface="Liberation Sans"/>
+              </a:defRPr>
+            </a:pPr>
+            <a:r>
+              <a:t>Finer TrainJob groups + topology</a:t>
+            </a:r>
+          </a:p>
+        </p:txBody>
+      </p:sp>
+      <p:sp>
+        <p:nvSpPr>
+          <p:cNvPr id="39" name="Rectangle 38"/>
+          <p:cNvSpPr/>
+          <p:nvPr/>
+        </p:nvSpPr>
+        <p:spPr>
+          <a:xfrm>
+            <a:off x="594360" y="4498848"/>
+            <a:ext cx="1755648" cy="557784"/>
+          </a:xfrm>
+          <a:prstGeom prst="rect">
+            <a:avLst/>
+          </a:prstGeom>
+          <a:solidFill>
+            <a:srgbClr val="F0F5FB"/>
+          </a:solidFill>
+          <a:ln>
+            <a:noFill/>
+          </a:ln>
+          <a:effectLst/>
+        </p:spPr>
+        <p:style>
+          <a:lnRef idx="1">
+            <a:schemeClr val="accent1"/>
+          </a:lnRef>
+          <a:fillRef idx="3">
+            <a:schemeClr val="accent1"/>
+          </a:fillRef>
+          <a:effectRef idx="0">
+            <a:schemeClr val="accent1"/>
+          </a:effectRef>
+          <a:fontRef idx="minor">
+            <a:schemeClr val="lt1"/>
+          </a:fontRef>
+        </p:style>
+        <p:txBody>
+          <a:bodyPr rtlCol="0" anchor="ctr"/>
+          <a:lstStyle/>
+          <a:p>
+            <a:pPr algn="ctr"/>
+          </a:p>
+        </p:txBody>
+      </p:sp>
+      <p:sp>
+        <p:nvSpPr>
+          <p:cNvPr id="40" name="TextBox 39"/>
+          <p:cNvSpPr txBox="1"/>
+          <p:nvPr/>
+        </p:nvSpPr>
+        <p:spPr>
+          <a:xfrm>
+            <a:off x="704088" y="4645152"/>
+            <a:ext cx="1536192" cy="356616"/>
+          </a:xfrm>
+          <a:prstGeom prst="rect">
+            <a:avLst/>
+          </a:prstGeom>
+          <a:noFill/>
+        </p:spPr>
+        <p:txBody>
+          <a:bodyPr wrap="square" lIns="18288" rIns="18288" tIns="18288" bIns="0">
+            <a:spAutoFit/>
+          </a:bodyPr>
+          <a:lstStyle/>
+          <a:p>
+            <a:pPr>
+              <a:spcAft>
+                <a:spcPts val="500"/>
+              </a:spcAft>
+              <a:defRPr sz="1600" b="1">
+                <a:solidFill>
+                  <a:srgbClr val="202D3C"/>
+                </a:solidFill>
+                <a:latin typeface="Liberation Sans"/>
+              </a:defRPr>
+            </a:pPr>
+            <a:r>
+              <a:t>LWS</a:t>
+            </a:r>
+          </a:p>
+        </p:txBody>
+      </p:sp>
+      <p:sp>
+        <p:nvSpPr>
+          <p:cNvPr id="41" name="Rectangle 40"/>
+          <p:cNvSpPr/>
+          <p:nvPr/>
+        </p:nvSpPr>
+        <p:spPr>
+          <a:xfrm>
+            <a:off x="2350008" y="4498848"/>
+            <a:ext cx="4279392" cy="557784"/>
+          </a:xfrm>
+          <a:prstGeom prst="rect">
+            <a:avLst/>
+          </a:prstGeom>
+          <a:solidFill>
+            <a:srgbClr val="F0F5FB"/>
+          </a:solidFill>
+          <a:ln>
+            <a:noFill/>
+          </a:ln>
+          <a:effectLst/>
+        </p:spPr>
+        <p:style>
+          <a:lnRef idx="1">
+            <a:schemeClr val="accent1"/>
+          </a:lnRef>
+          <a:fillRef idx="3">
+            <a:schemeClr val="accent1"/>
+          </a:fillRef>
+          <a:effectRef idx="0">
+            <a:schemeClr val="accent1"/>
+          </a:effectRef>
+          <a:fontRef idx="minor">
+            <a:schemeClr val="lt1"/>
+          </a:fontRef>
+        </p:style>
+        <p:txBody>
+          <a:bodyPr rtlCol="0" anchor="ctr"/>
+          <a:lstStyle/>
+          <a:p>
+            <a:pPr algn="ctr"/>
+          </a:p>
+        </p:txBody>
+      </p:sp>
+      <p:sp>
+        <p:nvSpPr>
+          <p:cNvPr id="42" name="TextBox 41"/>
+          <p:cNvSpPr txBox="1"/>
+          <p:nvPr/>
+        </p:nvSpPr>
+        <p:spPr>
+          <a:xfrm>
+            <a:off x="2459736" y="4645152"/>
+            <a:ext cx="4059935" cy="356616"/>
+          </a:xfrm>
+          <a:prstGeom prst="rect">
+            <a:avLst/>
+          </a:prstGeom>
+          <a:noFill/>
+        </p:spPr>
+        <p:txBody>
+          <a:bodyPr wrap="square" lIns="18288" rIns="18288" tIns="18288" bIns="0">
+            <a:spAutoFit/>
+          </a:bodyPr>
+          <a:lstStyle/>
+          <a:p>
+            <a:pPr>
+              <a:spcAft>
+                <a:spcPts val="500"/>
+              </a:spcAft>
+              <a:defRPr sz="1400" b="0">
+                <a:solidFill>
+                  <a:srgbClr val="202D3C"/>
+                </a:solidFill>
+                <a:latin typeface="Liberation Sans"/>
+              </a:defRPr>
+            </a:pPr>
+            <a:r>
+              <a:t>Existing gang / Volcano integration</a:t>
+            </a:r>
+          </a:p>
+        </p:txBody>
+      </p:sp>
+      <p:sp>
+        <p:nvSpPr>
+          <p:cNvPr id="43" name="Rectangle 42"/>
+          <p:cNvSpPr/>
+          <p:nvPr/>
+        </p:nvSpPr>
+        <p:spPr>
+          <a:xfrm>
+            <a:off x="6629400" y="4498848"/>
+            <a:ext cx="4389120" cy="557784"/>
+          </a:xfrm>
+          <a:prstGeom prst="rect">
+            <a:avLst/>
+          </a:prstGeom>
+          <a:solidFill>
+            <a:srgbClr val="F0F5FB"/>
+          </a:solidFill>
+          <a:ln>
+            <a:noFill/>
+          </a:ln>
+          <a:effectLst/>
+        </p:spPr>
+        <p:style>
+          <a:lnRef idx="1">
+            <a:schemeClr val="accent1"/>
+          </a:lnRef>
+          <a:fillRef idx="3">
+            <a:schemeClr val="accent1"/>
+          </a:fillRef>
+          <a:effectRef idx="0">
+            <a:schemeClr val="accent1"/>
+          </a:effectRef>
+          <a:fontRef idx="minor">
+            <a:schemeClr val="lt1"/>
+          </a:fontRef>
+        </p:style>
+        <p:txBody>
+          <a:bodyPr rtlCol="0" anchor="ctr"/>
+          <a:lstStyle/>
+          <a:p>
+            <a:pPr algn="ctr"/>
+          </a:p>
+        </p:txBody>
+      </p:sp>
+      <p:sp>
+        <p:nvSpPr>
+          <p:cNvPr id="44" name="TextBox 43"/>
+          <p:cNvSpPr txBox="1"/>
+          <p:nvPr/>
+        </p:nvSpPr>
+        <p:spPr>
+          <a:xfrm>
+            <a:off x="6739128" y="4645152"/>
+            <a:ext cx="4169663" cy="356616"/>
+          </a:xfrm>
+          <a:prstGeom prst="rect">
+            <a:avLst/>
+          </a:prstGeom>
+          <a:noFill/>
+        </p:spPr>
+        <p:txBody>
+          <a:bodyPr wrap="square" lIns="18288" rIns="18288" tIns="18288" bIns="0">
+            <a:spAutoFit/>
+          </a:bodyPr>
+          <a:lstStyle/>
+          <a:p>
+            <a:pPr>
+              <a:spcAft>
+                <a:spcPts val="500"/>
+              </a:spcAft>
+              <a:defRPr sz="1400" b="0">
+                <a:solidFill>
+                  <a:srgbClr val="647282"/>
+                </a:solidFill>
+                <a:latin typeface="Liberation Sans"/>
+              </a:defRPr>
+            </a:pPr>
+            <a:r>
+              <a:t>Explore roles / slices + group relationships</a:t>
+            </a:r>
+          </a:p>
+        </p:txBody>
+      </p:sp>
+      <p:sp>
+        <p:nvSpPr>
+          <p:cNvPr id="45" name="TextBox 44"/>
+          <p:cNvSpPr txBox="1"/>
+          <p:nvPr/>
+        </p:nvSpPr>
+        <p:spPr>
+          <a:xfrm>
+            <a:off x="658368" y="5358384"/>
+            <a:ext cx="10789920" cy="256032"/>
+          </a:xfrm>
+          <a:prstGeom prst="rect">
+            <a:avLst/>
+          </a:prstGeom>
+          <a:noFill/>
+        </p:spPr>
+        <p:txBody>
+          <a:bodyPr wrap="square" lIns="18288" rIns="18288" tIns="18288" bIns="0">
+            <a:spAutoFit/>
+          </a:bodyPr>
+          <a:lstStyle/>
+          <a:p>
+            <a:pPr>
+              <a:spcAft>
+                <a:spcPts val="500"/>
+              </a:spcAft>
+              <a:defRPr sz="1800" b="1">
                 <a:solidFill>
                   <a:srgbClr val="356696"/>
                 </a:solidFill>
-                <a:latin typeface="Liberation Mono"/>
-              </a:defRPr>
-            </a:pPr>
-            <a:r>
-              <a:t>PREFERRED</a:t>
-            </a:r>
-          </a:p>
-        </p:txBody>
-      </p:sp>
-      <p:sp>
-        <p:nvSpPr>
-          <p:cNvPr id="16" name="TextBox 15"/>
-          <p:cNvSpPr txBox="1"/>
-          <p:nvPr/>
-        </p:nvSpPr>
-        <p:spPr>
-          <a:xfrm>
-            <a:off x="6492240" y="3602736"/>
-            <a:ext cx="4800600" cy="777240"/>
-          </a:xfrm>
-          <a:prstGeom prst="rect">
-            <a:avLst/>
-          </a:prstGeom>
-          <a:noFill/>
-        </p:spPr>
-        <p:txBody>
-          <a:bodyPr wrap="square" lIns="18288" rIns="18288" tIns="18288" bIns="0">
-            <a:spAutoFit/>
-          </a:bodyPr>
-          <a:lstStyle/>
-          <a:p>
-            <a:pPr>
-              <a:spcAft>
-                <a:spcPts val="500"/>
-              </a:spcAft>
-              <a:defRPr sz="2400" b="1">
-                <a:solidFill>
-                  <a:srgbClr val="202D3C"/>
-                </a:solidFill>
-                <a:latin typeface="Liberation Sans"/>
-              </a:defRPr>
-            </a:pPr>
-            <a:r>
-              <a:t>Allow a feasible fallback</a:t>
-            </a:r>
-          </a:p>
-        </p:txBody>
-      </p:sp>
-      <p:sp>
-        <p:nvSpPr>
-          <p:cNvPr id="17" name="TextBox 16"/>
-          <p:cNvSpPr txBox="1"/>
-          <p:nvPr/>
-        </p:nvSpPr>
-        <p:spPr>
-          <a:xfrm>
-            <a:off x="6492240" y="4590288"/>
-            <a:ext cx="4800600" cy="402336"/>
-          </a:xfrm>
-          <a:prstGeom prst="rect">
-            <a:avLst/>
-          </a:prstGeom>
-          <a:noFill/>
-        </p:spPr>
-        <p:txBody>
-          <a:bodyPr wrap="square" lIns="18288" rIns="18288" tIns="18288" bIns="0">
-            <a:spAutoFit/>
-          </a:bodyPr>
-          <a:lstStyle/>
-          <a:p>
-            <a:pPr>
-              <a:spcAft>
-                <a:spcPts val="500"/>
-              </a:spcAft>
-              <a:defRPr sz="1800" b="0">
-                <a:solidFill>
-                  <a:srgbClr val="647282"/>
-                </a:solidFill>
-                <a:latin typeface="Liberation Sans"/>
-              </a:defRPr>
-            </a:pPr>
-            <a:r>
-              <a:t>The preference may be relaxed.</a:t>
+                <a:latin typeface="Liberation Sans"/>
+              </a:defRPr>
+            </a:pPr>
+            <a:r>
+              <a:t>Controllers supply identity; the scheduler applies group and placement constraints.</a:t>
             </a:r>
           </a:p>
         </p:txBody>
@@ -6287,7 +7474,7 @@
               </a:defRPr>
             </a:pPr>
             <a:r>
-              <a:t>Controllers Bring Workload Structure to Scheduling</a:t>
+              <a:t>KubeRay: A Replica Can Span Multiple Pods</a:t>
             </a:r>
           </a:p>
         </p:txBody>
@@ -6370,7 +7557,7 @@
               </a:defRPr>
             </a:pPr>
             <a:r>
-              <a:t>状态截至 2026-10-28；已合并不等于下游稳定版已发布。演讲前核对 PR 和版本。</a:t>
+              <a:t>新增案例：WorkerGroup / policy / 实际 replica 不混为一谈；省略 head，仅聚焦一个 worker group。</a:t>
             </a:r>
           </a:p>
         </p:txBody>
@@ -6409,7 +7596,7 @@
               </a:defRPr>
             </a:pPr>
             <a:r>
-              <a:t>VOLCANO  /  KUBECON NA 2026  /  WORKING DRAFT  •  2:00</a:t>
+              <a:t>VOLCANO  /  KUBECON NA 2026  /  WORKING DRAFT  •  1:00</a:t>
             </a:r>
           </a:p>
         </p:txBody>
@@ -6455,263 +7642,147 @@
       </p:sp>
       <p:sp>
         <p:nvSpPr>
-          <p:cNvPr id="9" name="Rectangle 8"/>
+          <p:cNvPr id="9" name="TextBox 8"/>
+          <p:cNvSpPr txBox="1"/>
+          <p:nvPr/>
+        </p:nvSpPr>
+        <p:spPr>
+          <a:xfrm>
+            <a:off x="594360" y="1773936"/>
+            <a:ext cx="3840480" cy="548640"/>
+          </a:xfrm>
+          <a:prstGeom prst="rect">
+            <a:avLst/>
+          </a:prstGeom>
+          <a:noFill/>
+        </p:spPr>
+        <p:txBody>
+          <a:bodyPr wrap="square" lIns="18288" rIns="18288" tIns="18288" bIns="0">
+            <a:spAutoFit/>
+          </a:bodyPr>
+          <a:lstStyle/>
+          <a:p>
+            <a:pPr>
+              <a:spcAft>
+                <a:spcPts val="500"/>
+              </a:spcAft>
+              <a:defRPr sz="2200" b="1">
+                <a:solidFill>
+                  <a:srgbClr val="356696"/>
+                </a:solidFill>
+                <a:latin typeface="Liberation Mono"/>
+              </a:defRPr>
+            </a:pPr>
+            <a:r>
+              <a:t>minReplicas = 2</a:t>
+            </a:r>
+          </a:p>
+          <a:p>
+            <a:pPr>
+              <a:spcAft>
+                <a:spcPts val="500"/>
+              </a:spcAft>
+              <a:defRPr sz="2200" b="1">
+                <a:solidFill>
+                  <a:srgbClr val="356696"/>
+                </a:solidFill>
+                <a:latin typeface="Liberation Mono"/>
+              </a:defRPr>
+            </a:pPr>
+            <a:r>
+              <a:t>numOfHosts = 2</a:t>
+            </a:r>
+          </a:p>
+        </p:txBody>
+      </p:sp>
+      <p:sp>
+        <p:nvSpPr>
+          <p:cNvPr id="10" name="TextBox 9"/>
+          <p:cNvSpPr txBox="1"/>
+          <p:nvPr/>
+        </p:nvSpPr>
+        <p:spPr>
+          <a:xfrm>
+            <a:off x="594360" y="2999232"/>
+            <a:ext cx="3840480" cy="1280160"/>
+          </a:xfrm>
+          <a:prstGeom prst="rect">
+            <a:avLst/>
+          </a:prstGeom>
+          <a:noFill/>
+        </p:spPr>
+        <p:txBody>
+          <a:bodyPr wrap="square" lIns="18288" rIns="18288" tIns="18288" bIns="0">
+            <a:spAutoFit/>
+          </a:bodyPr>
+          <a:lstStyle/>
+          <a:p>
+            <a:pPr>
+              <a:spcAft>
+                <a:spcPts val="500"/>
+              </a:spcAft>
+              <a:defRPr sz="2400" b="1">
+                <a:solidFill>
+                  <a:srgbClr val="202D3C"/>
+                </a:solidFill>
+                <a:latin typeface="Liberation Sans"/>
+              </a:defRPr>
+            </a:pPr>
+            <a:r>
+              <a:t>The requirement is two complete replicas, each spanning two Pods.</a:t>
+            </a:r>
+          </a:p>
+        </p:txBody>
+      </p:sp>
+      <p:sp>
+        <p:nvSpPr>
+          <p:cNvPr id="11" name="TextBox 10"/>
+          <p:cNvSpPr txBox="1"/>
+          <p:nvPr/>
+        </p:nvSpPr>
+        <p:spPr>
+          <a:xfrm>
+            <a:off x="594360" y="4617720"/>
+            <a:ext cx="3840480" cy="594360"/>
+          </a:xfrm>
+          <a:prstGeom prst="rect">
+            <a:avLst/>
+          </a:prstGeom>
+          <a:noFill/>
+        </p:spPr>
+        <p:txBody>
+          <a:bodyPr wrap="square" lIns="18288" rIns="18288" tIns="18288" bIns="0">
+            <a:spAutoFit/>
+          </a:bodyPr>
+          <a:lstStyle/>
+          <a:p>
+            <a:pPr>
+              <a:spcAft>
+                <a:spcPts val="500"/>
+              </a:spcAft>
+              <a:defRPr sz="1900" b="0">
+                <a:solidFill>
+                  <a:srgbClr val="647282"/>
+                </a:solidFill>
+                <a:latin typeface="Liberation Sans"/>
+              </a:defRPr>
+            </a:pPr>
+            <a:r>
+              <a:t>Any four Pods are not enough.</a:t>
+            </a:r>
+          </a:p>
+        </p:txBody>
+      </p:sp>
+      <p:sp>
+        <p:nvSpPr>
+          <p:cNvPr id="12" name="Rectangle 11"/>
           <p:cNvSpPr/>
           <p:nvPr/>
         </p:nvSpPr>
         <p:spPr>
           <a:xfrm>
-            <a:off x="594360" y="1755648"/>
-            <a:ext cx="1755648" cy="466344"/>
-          </a:xfrm>
-          <a:prstGeom prst="rect">
-            <a:avLst/>
-          </a:prstGeom>
-          <a:solidFill>
-            <a:srgbClr val="202D3C"/>
-          </a:solidFill>
-          <a:ln>
-            <a:noFill/>
-          </a:ln>
-          <a:effectLst/>
-        </p:spPr>
-        <p:style>
-          <a:lnRef idx="1">
-            <a:schemeClr val="accent1"/>
-          </a:lnRef>
-          <a:fillRef idx="3">
-            <a:schemeClr val="accent1"/>
-          </a:fillRef>
-          <a:effectRef idx="0">
-            <a:schemeClr val="accent1"/>
-          </a:effectRef>
-          <a:fontRef idx="minor">
-            <a:schemeClr val="lt1"/>
-          </a:fontRef>
-        </p:style>
-        <p:txBody>
-          <a:bodyPr rtlCol="0" anchor="ctr"/>
-          <a:lstStyle/>
-          <a:p>
-            <a:pPr algn="ctr"/>
-          </a:p>
-        </p:txBody>
-      </p:sp>
-      <p:sp>
-        <p:nvSpPr>
-          <p:cNvPr id="10" name="TextBox 9"/>
-          <p:cNvSpPr txBox="1"/>
-          <p:nvPr/>
-        </p:nvSpPr>
-        <p:spPr>
-          <a:xfrm>
-            <a:off x="704088" y="1865376"/>
-            <a:ext cx="1536192" cy="237744"/>
-          </a:xfrm>
-          <a:prstGeom prst="rect">
-            <a:avLst/>
-          </a:prstGeom>
-          <a:noFill/>
-        </p:spPr>
-        <p:txBody>
-          <a:bodyPr wrap="square" lIns="18288" rIns="18288" tIns="18288" bIns="0">
-            <a:spAutoFit/>
-          </a:bodyPr>
-          <a:lstStyle/>
-          <a:p>
-            <a:pPr>
-              <a:spcAft>
-                <a:spcPts val="500"/>
-              </a:spcAft>
-              <a:defRPr sz="1200" b="1">
-                <a:solidFill>
-                  <a:srgbClr val="FFFFFF"/>
-                </a:solidFill>
-                <a:latin typeface="Liberation Sans"/>
-              </a:defRPr>
-            </a:pPr>
-            <a:r>
-              <a:t>PROJECT</a:t>
-            </a:r>
-          </a:p>
-        </p:txBody>
-      </p:sp>
-      <p:sp>
-        <p:nvSpPr>
-          <p:cNvPr id="11" name="Rectangle 10"/>
-          <p:cNvSpPr/>
-          <p:nvPr/>
-        </p:nvSpPr>
-        <p:spPr>
-          <a:xfrm>
-            <a:off x="2350008" y="1755648"/>
-            <a:ext cx="4279392" cy="466344"/>
-          </a:xfrm>
-          <a:prstGeom prst="rect">
-            <a:avLst/>
-          </a:prstGeom>
-          <a:solidFill>
-            <a:srgbClr val="202D3C"/>
-          </a:solidFill>
-          <a:ln>
-            <a:noFill/>
-          </a:ln>
-          <a:effectLst/>
-        </p:spPr>
-        <p:style>
-          <a:lnRef idx="1">
-            <a:schemeClr val="accent1"/>
-          </a:lnRef>
-          <a:fillRef idx="3">
-            <a:schemeClr val="accent1"/>
-          </a:fillRef>
-          <a:effectRef idx="0">
-            <a:schemeClr val="accent1"/>
-          </a:effectRef>
-          <a:fontRef idx="minor">
-            <a:schemeClr val="lt1"/>
-          </a:fontRef>
-        </p:style>
-        <p:txBody>
-          <a:bodyPr rtlCol="0" anchor="ctr"/>
-          <a:lstStyle/>
-          <a:p>
-            <a:pPr algn="ctr"/>
-          </a:p>
-        </p:txBody>
-      </p:sp>
-      <p:sp>
-        <p:nvSpPr>
-          <p:cNvPr id="12" name="TextBox 11"/>
-          <p:cNvSpPr txBox="1"/>
-          <p:nvPr/>
-        </p:nvSpPr>
-        <p:spPr>
-          <a:xfrm>
-            <a:off x="2459736" y="1865376"/>
-            <a:ext cx="4059935" cy="237744"/>
-          </a:xfrm>
-          <a:prstGeom prst="rect">
-            <a:avLst/>
-          </a:prstGeom>
-          <a:noFill/>
-        </p:spPr>
-        <p:txBody>
-          <a:bodyPr wrap="square" lIns="18288" rIns="18288" tIns="18288" bIns="0">
-            <a:spAutoFit/>
-          </a:bodyPr>
-          <a:lstStyle/>
-          <a:p>
-            <a:pPr>
-              <a:spcAft>
-                <a:spcPts val="500"/>
-              </a:spcAft>
-              <a:defRPr sz="1200" b="1">
-                <a:solidFill>
-                  <a:srgbClr val="FFFFFF"/>
-                </a:solidFill>
-                <a:latin typeface="Liberation Sans"/>
-              </a:defRPr>
-            </a:pPr>
-            <a:r>
-              <a:t>EXISTING / MERGED</a:t>
-            </a:r>
-          </a:p>
-        </p:txBody>
-      </p:sp>
-      <p:sp>
-        <p:nvSpPr>
-          <p:cNvPr id="13" name="Rectangle 12"/>
-          <p:cNvSpPr/>
-          <p:nvPr/>
-        </p:nvSpPr>
-        <p:spPr>
-          <a:xfrm>
-            <a:off x="6629400" y="1755648"/>
-            <a:ext cx="4389120" cy="466344"/>
-          </a:xfrm>
-          <a:prstGeom prst="rect">
-            <a:avLst/>
-          </a:prstGeom>
-          <a:solidFill>
-            <a:srgbClr val="202D3C"/>
-          </a:solidFill>
-          <a:ln>
-            <a:noFill/>
-          </a:ln>
-          <a:effectLst/>
-        </p:spPr>
-        <p:style>
-          <a:lnRef idx="1">
-            <a:schemeClr val="accent1"/>
-          </a:lnRef>
-          <a:fillRef idx="3">
-            <a:schemeClr val="accent1"/>
-          </a:fillRef>
-          <a:effectRef idx="0">
-            <a:schemeClr val="accent1"/>
-          </a:effectRef>
-          <a:fontRef idx="minor">
-            <a:schemeClr val="lt1"/>
-          </a:fontRef>
-        </p:style>
-        <p:txBody>
-          <a:bodyPr rtlCol="0" anchor="ctr"/>
-          <a:lstStyle/>
-          <a:p>
-            <a:pPr algn="ctr"/>
-          </a:p>
-        </p:txBody>
-      </p:sp>
-      <p:sp>
-        <p:nvSpPr>
-          <p:cNvPr id="14" name="TextBox 13"/>
-          <p:cNvSpPr txBox="1"/>
-          <p:nvPr/>
-        </p:nvSpPr>
-        <p:spPr>
-          <a:xfrm>
-            <a:off x="6739128" y="1865376"/>
-            <a:ext cx="4169663" cy="237744"/>
-          </a:xfrm>
-          <a:prstGeom prst="rect">
-            <a:avLst/>
-          </a:prstGeom>
-          <a:noFill/>
-        </p:spPr>
-        <p:txBody>
-          <a:bodyPr wrap="square" lIns="18288" rIns="18288" tIns="18288" bIns="0">
-            <a:spAutoFit/>
-          </a:bodyPr>
-          <a:lstStyle/>
-          <a:p>
-            <a:pPr>
-              <a:spcAft>
-                <a:spcPts val="500"/>
-              </a:spcAft>
-              <a:defRPr sz="1200" b="1">
-                <a:solidFill>
-                  <a:srgbClr val="FFFFFF"/>
-                </a:solidFill>
-                <a:latin typeface="Liberation Sans"/>
-              </a:defRPr>
-            </a:pPr>
-            <a:r>
-              <a:t>NEXT / IN PROGRESS</a:t>
-            </a:r>
-          </a:p>
-        </p:txBody>
-      </p:sp>
-      <p:sp>
-        <p:nvSpPr>
-          <p:cNvPr id="15" name="Rectangle 14"/>
-          <p:cNvSpPr/>
-          <p:nvPr/>
-        </p:nvSpPr>
-        <p:spPr>
-          <a:xfrm>
-            <a:off x="594360" y="2231136"/>
-            <a:ext cx="1755648" cy="557784"/>
+            <a:off x="4846320" y="1691640"/>
+            <a:ext cx="6812280" cy="3858768"/>
           </a:xfrm>
           <a:prstGeom prst="rect">
             <a:avLst/>
@@ -6748,31 +7819,118 @@
       </p:sp>
       <p:sp>
         <p:nvSpPr>
-          <p:cNvPr id="16" name="TextBox 15"/>
-          <p:cNvSpPr txBox="1"/>
-          <p:nvPr/>
-        </p:nvSpPr>
-        <p:spPr>
-          <a:xfrm>
-            <a:off x="704088" y="2377440"/>
-            <a:ext cx="1536192" cy="356616"/>
-          </a:xfrm>
-          <a:prstGeom prst="rect">
-            <a:avLst/>
-          </a:prstGeom>
-          <a:noFill/>
-        </p:spPr>
-        <p:txBody>
-          <a:bodyPr wrap="square" lIns="18288" rIns="18288" tIns="18288" bIns="0">
-            <a:spAutoFit/>
-          </a:bodyPr>
-          <a:lstStyle/>
-          <a:p>
-            <a:pPr>
-              <a:spcAft>
-                <a:spcPts val="500"/>
-              </a:spcAft>
-              <a:defRPr sz="1600" b="1">
+          <p:cNvPr id="13" name="TextBox 12"/>
+          <p:cNvSpPr txBox="1"/>
+          <p:nvPr/>
+        </p:nvSpPr>
+        <p:spPr>
+          <a:xfrm>
+            <a:off x="5010912" y="1819656"/>
+            <a:ext cx="6483096" cy="246888"/>
+          </a:xfrm>
+          <a:prstGeom prst="rect">
+            <a:avLst/>
+          </a:prstGeom>
+          <a:noFill/>
+        </p:spPr>
+        <p:txBody>
+          <a:bodyPr wrap="square" lIns="18288" rIns="18288" tIns="18288" bIns="0">
+            <a:spAutoFit/>
+          </a:bodyPr>
+          <a:lstStyle/>
+          <a:p>
+            <a:pPr>
+              <a:spcAft>
+                <a:spcPts val="500"/>
+              </a:spcAft>
+              <a:defRPr sz="1000" b="0">
+                <a:solidFill>
+                  <a:srgbClr val="647282"/>
+                </a:solidFill>
+                <a:latin typeface="Liberation Mono"/>
+              </a:defRPr>
+            </a:pPr>
+            <a:r>
+              <a:t>EDITABLE DIAGRAM DRAFT</a:t>
+            </a:r>
+          </a:p>
+        </p:txBody>
+      </p:sp>
+      <p:sp>
+        <p:nvSpPr>
+          <p:cNvPr id="14" name="Rounded Rectangle 13"/>
+          <p:cNvSpPr/>
+          <p:nvPr/>
+        </p:nvSpPr>
+        <p:spPr>
+          <a:xfrm>
+            <a:off x="5394960" y="2606040"/>
+            <a:ext cx="2011680" cy="1005840"/>
+          </a:xfrm>
+          <a:prstGeom prst="roundRect">
+            <a:avLst>
+              <a:gd name="adj" fmla="val 8000"/>
+            </a:avLst>
+          </a:prstGeom>
+          <a:solidFill>
+            <a:srgbClr val="FFFFFF"/>
+          </a:solidFill>
+          <a:ln w="12700">
+            <a:solidFill>
+              <a:srgbClr val="8EA8CB"/>
+            </a:solidFill>
+          </a:ln>
+          <a:effectLst/>
+        </p:spPr>
+        <p:style>
+          <a:lnRef idx="1">
+            <a:schemeClr val="accent1"/>
+          </a:lnRef>
+          <a:fillRef idx="3">
+            <a:schemeClr val="accent1"/>
+          </a:fillRef>
+          <a:effectRef idx="0">
+            <a:schemeClr val="accent1"/>
+          </a:effectRef>
+          <a:fontRef idx="minor">
+            <a:schemeClr val="lt1"/>
+          </a:fontRef>
+        </p:style>
+        <p:txBody>
+          <a:bodyPr rtlCol="0" anchor="ctr"/>
+          <a:lstStyle/>
+          <a:p>
+            <a:pPr algn="ctr"/>
+          </a:p>
+        </p:txBody>
+      </p:sp>
+      <p:sp>
+        <p:nvSpPr>
+          <p:cNvPr id="15" name="TextBox 14"/>
+          <p:cNvSpPr txBox="1"/>
+          <p:nvPr/>
+        </p:nvSpPr>
+        <p:spPr>
+          <a:xfrm>
+            <a:off x="5486400" y="2679192"/>
+            <a:ext cx="1828800" cy="246888"/>
+          </a:xfrm>
+          <a:prstGeom prst="rect">
+            <a:avLst/>
+          </a:prstGeom>
+          <a:noFill/>
+        </p:spPr>
+        <p:txBody>
+          <a:bodyPr wrap="square" lIns="18288" rIns="18288" tIns="18288" bIns="0">
+            <a:spAutoFit/>
+          </a:bodyPr>
+          <a:lstStyle/>
+          <a:p>
+            <a:pPr>
+              <a:spcAft>
+                <a:spcPts val="500"/>
+              </a:spcAft>
+              <a:defRPr sz="1200" b="1">
                 <a:solidFill>
                   <a:srgbClr val="202D3C"/>
                 </a:solidFill>
@@ -6780,27 +7938,404 @@
               </a:defRPr>
             </a:pPr>
             <a:r>
-              <a:t>Kthena</a:t>
-            </a:r>
-          </a:p>
-        </p:txBody>
-      </p:sp>
-      <p:sp>
-        <p:nvSpPr>
-          <p:cNvPr id="17" name="Rectangle 16"/>
+              <a:t>Replica 0 → SubGroup</a:t>
+            </a:r>
+          </a:p>
+        </p:txBody>
+      </p:sp>
+      <p:sp>
+        <p:nvSpPr>
+          <p:cNvPr id="16" name="Rounded Rectangle 15"/>
           <p:cNvSpPr/>
           <p:nvPr/>
         </p:nvSpPr>
         <p:spPr>
           <a:xfrm>
-            <a:off x="2350008" y="2231136"/>
-            <a:ext cx="4279392" cy="557784"/>
-          </a:xfrm>
-          <a:prstGeom prst="rect">
-            <a:avLst/>
+            <a:off x="5522976" y="3044952"/>
+            <a:ext cx="777240" cy="393192"/>
+          </a:xfrm>
+          <a:prstGeom prst="roundRect">
+            <a:avLst>
+              <a:gd name="adj" fmla="val 8000"/>
+            </a:avLst>
           </a:prstGeom>
           <a:solidFill>
             <a:srgbClr val="F0F5FB"/>
+          </a:solidFill>
+          <a:ln w="12700">
+            <a:solidFill>
+              <a:srgbClr val="8EA8CB"/>
+            </a:solidFill>
+          </a:ln>
+          <a:effectLst/>
+        </p:spPr>
+        <p:style>
+          <a:lnRef idx="1">
+            <a:schemeClr val="accent1"/>
+          </a:lnRef>
+          <a:fillRef idx="3">
+            <a:schemeClr val="accent1"/>
+          </a:fillRef>
+          <a:effectRef idx="0">
+            <a:schemeClr val="accent1"/>
+          </a:effectRef>
+          <a:fontRef idx="minor">
+            <a:schemeClr val="lt1"/>
+          </a:fontRef>
+        </p:style>
+        <p:txBody>
+          <a:bodyPr rtlCol="0" anchor="ctr" wrap="square" lIns="109728" rIns="109728"/>
+          <a:lstStyle/>
+          <a:p>
+            <a:pPr algn="ctr">
+              <a:defRPr sz="1200">
+                <a:solidFill>
+                  <a:srgbClr val="202D3C"/>
+                </a:solidFill>
+                <a:latin typeface="Liberation Sans"/>
+              </a:defRPr>
+            </a:pPr>
+            <a:r>
+              <a:t>Pod 1</a:t>
+            </a:r>
+          </a:p>
+        </p:txBody>
+      </p:sp>
+      <p:sp>
+        <p:nvSpPr>
+          <p:cNvPr id="17" name="Rounded Rectangle 16"/>
+          <p:cNvSpPr/>
+          <p:nvPr/>
+        </p:nvSpPr>
+        <p:spPr>
+          <a:xfrm>
+            <a:off x="6428232" y="3044952"/>
+            <a:ext cx="777240" cy="393192"/>
+          </a:xfrm>
+          <a:prstGeom prst="roundRect">
+            <a:avLst>
+              <a:gd name="adj" fmla="val 8000"/>
+            </a:avLst>
+          </a:prstGeom>
+          <a:solidFill>
+            <a:srgbClr val="F0F5FB"/>
+          </a:solidFill>
+          <a:ln w="12700">
+            <a:solidFill>
+              <a:srgbClr val="8EA8CB"/>
+            </a:solidFill>
+          </a:ln>
+          <a:effectLst/>
+        </p:spPr>
+        <p:style>
+          <a:lnRef idx="1">
+            <a:schemeClr val="accent1"/>
+          </a:lnRef>
+          <a:fillRef idx="3">
+            <a:schemeClr val="accent1"/>
+          </a:fillRef>
+          <a:effectRef idx="0">
+            <a:schemeClr val="accent1"/>
+          </a:effectRef>
+          <a:fontRef idx="minor">
+            <a:schemeClr val="lt1"/>
+          </a:fontRef>
+        </p:style>
+        <p:txBody>
+          <a:bodyPr rtlCol="0" anchor="ctr" wrap="square" lIns="109728" rIns="109728"/>
+          <a:lstStyle/>
+          <a:p>
+            <a:pPr algn="ctr">
+              <a:defRPr sz="1200">
+                <a:solidFill>
+                  <a:srgbClr val="202D3C"/>
+                </a:solidFill>
+                <a:latin typeface="Liberation Sans"/>
+              </a:defRPr>
+            </a:pPr>
+            <a:r>
+              <a:t>Pod 2</a:t>
+            </a:r>
+          </a:p>
+        </p:txBody>
+      </p:sp>
+      <p:sp>
+        <p:nvSpPr>
+          <p:cNvPr id="18" name="Rounded Rectangle 17"/>
+          <p:cNvSpPr/>
+          <p:nvPr/>
+        </p:nvSpPr>
+        <p:spPr>
+          <a:xfrm>
+            <a:off x="8805672" y="2606040"/>
+            <a:ext cx="2011680" cy="1005840"/>
+          </a:xfrm>
+          <a:prstGeom prst="roundRect">
+            <a:avLst>
+              <a:gd name="adj" fmla="val 8000"/>
+            </a:avLst>
+          </a:prstGeom>
+          <a:solidFill>
+            <a:srgbClr val="FFFFFF"/>
+          </a:solidFill>
+          <a:ln w="12700">
+            <a:solidFill>
+              <a:srgbClr val="8EA8CB"/>
+            </a:solidFill>
+          </a:ln>
+          <a:effectLst/>
+        </p:spPr>
+        <p:style>
+          <a:lnRef idx="1">
+            <a:schemeClr val="accent1"/>
+          </a:lnRef>
+          <a:fillRef idx="3">
+            <a:schemeClr val="accent1"/>
+          </a:fillRef>
+          <a:effectRef idx="0">
+            <a:schemeClr val="accent1"/>
+          </a:effectRef>
+          <a:fontRef idx="minor">
+            <a:schemeClr val="lt1"/>
+          </a:fontRef>
+        </p:style>
+        <p:txBody>
+          <a:bodyPr rtlCol="0" anchor="ctr"/>
+          <a:lstStyle/>
+          <a:p>
+            <a:pPr algn="ctr"/>
+          </a:p>
+        </p:txBody>
+      </p:sp>
+      <p:sp>
+        <p:nvSpPr>
+          <p:cNvPr id="19" name="TextBox 18"/>
+          <p:cNvSpPr txBox="1"/>
+          <p:nvPr/>
+        </p:nvSpPr>
+        <p:spPr>
+          <a:xfrm>
+            <a:off x="8897112" y="2679192"/>
+            <a:ext cx="1828800" cy="246888"/>
+          </a:xfrm>
+          <a:prstGeom prst="rect">
+            <a:avLst/>
+          </a:prstGeom>
+          <a:noFill/>
+        </p:spPr>
+        <p:txBody>
+          <a:bodyPr wrap="square" lIns="18288" rIns="18288" tIns="18288" bIns="0">
+            <a:spAutoFit/>
+          </a:bodyPr>
+          <a:lstStyle/>
+          <a:p>
+            <a:pPr>
+              <a:spcAft>
+                <a:spcPts val="500"/>
+              </a:spcAft>
+              <a:defRPr sz="1200" b="1">
+                <a:solidFill>
+                  <a:srgbClr val="202D3C"/>
+                </a:solidFill>
+                <a:latin typeface="Liberation Sans"/>
+              </a:defRPr>
+            </a:pPr>
+            <a:r>
+              <a:t>Replica 1 → SubGroup</a:t>
+            </a:r>
+          </a:p>
+        </p:txBody>
+      </p:sp>
+      <p:sp>
+        <p:nvSpPr>
+          <p:cNvPr id="20" name="Rounded Rectangle 19"/>
+          <p:cNvSpPr/>
+          <p:nvPr/>
+        </p:nvSpPr>
+        <p:spPr>
+          <a:xfrm>
+            <a:off x="8933688" y="3044952"/>
+            <a:ext cx="777240" cy="393192"/>
+          </a:xfrm>
+          <a:prstGeom prst="roundRect">
+            <a:avLst>
+              <a:gd name="adj" fmla="val 8000"/>
+            </a:avLst>
+          </a:prstGeom>
+          <a:solidFill>
+            <a:srgbClr val="F0F5FB"/>
+          </a:solidFill>
+          <a:ln w="12700">
+            <a:solidFill>
+              <a:srgbClr val="8EA8CB"/>
+            </a:solidFill>
+          </a:ln>
+          <a:effectLst/>
+        </p:spPr>
+        <p:style>
+          <a:lnRef idx="1">
+            <a:schemeClr val="accent1"/>
+          </a:lnRef>
+          <a:fillRef idx="3">
+            <a:schemeClr val="accent1"/>
+          </a:fillRef>
+          <a:effectRef idx="0">
+            <a:schemeClr val="accent1"/>
+          </a:effectRef>
+          <a:fontRef idx="minor">
+            <a:schemeClr val="lt1"/>
+          </a:fontRef>
+        </p:style>
+        <p:txBody>
+          <a:bodyPr rtlCol="0" anchor="ctr" wrap="square" lIns="109728" rIns="109728"/>
+          <a:lstStyle/>
+          <a:p>
+            <a:pPr algn="ctr">
+              <a:defRPr sz="1200">
+                <a:solidFill>
+                  <a:srgbClr val="202D3C"/>
+                </a:solidFill>
+                <a:latin typeface="Liberation Sans"/>
+              </a:defRPr>
+            </a:pPr>
+            <a:r>
+              <a:t>Pod 1</a:t>
+            </a:r>
+          </a:p>
+        </p:txBody>
+      </p:sp>
+      <p:sp>
+        <p:nvSpPr>
+          <p:cNvPr id="21" name="Rounded Rectangle 20"/>
+          <p:cNvSpPr/>
+          <p:nvPr/>
+        </p:nvSpPr>
+        <p:spPr>
+          <a:xfrm>
+            <a:off x="9838944" y="3044952"/>
+            <a:ext cx="777240" cy="393192"/>
+          </a:xfrm>
+          <a:prstGeom prst="roundRect">
+            <a:avLst>
+              <a:gd name="adj" fmla="val 8000"/>
+            </a:avLst>
+          </a:prstGeom>
+          <a:solidFill>
+            <a:srgbClr val="F0F5FB"/>
+          </a:solidFill>
+          <a:ln w="12700">
+            <a:solidFill>
+              <a:srgbClr val="8EA8CB"/>
+            </a:solidFill>
+          </a:ln>
+          <a:effectLst/>
+        </p:spPr>
+        <p:style>
+          <a:lnRef idx="1">
+            <a:schemeClr val="accent1"/>
+          </a:lnRef>
+          <a:fillRef idx="3">
+            <a:schemeClr val="accent1"/>
+          </a:fillRef>
+          <a:effectRef idx="0">
+            <a:schemeClr val="accent1"/>
+          </a:effectRef>
+          <a:fontRef idx="minor">
+            <a:schemeClr val="lt1"/>
+          </a:fontRef>
+        </p:style>
+        <p:txBody>
+          <a:bodyPr rtlCol="0" anchor="ctr" wrap="square" lIns="109728" rIns="109728"/>
+          <a:lstStyle/>
+          <a:p>
+            <a:pPr algn="ctr">
+              <a:defRPr sz="1200">
+                <a:solidFill>
+                  <a:srgbClr val="202D3C"/>
+                </a:solidFill>
+                <a:latin typeface="Liberation Sans"/>
+              </a:defRPr>
+            </a:pPr>
+            <a:r>
+              <a:t>Pod 2</a:t>
+            </a:r>
+          </a:p>
+        </p:txBody>
+      </p:sp>
+      <p:sp>
+        <p:nvSpPr>
+          <p:cNvPr id="22" name="Rounded Rectangle 21"/>
+          <p:cNvSpPr/>
+          <p:nvPr/>
+        </p:nvSpPr>
+        <p:spPr>
+          <a:xfrm>
+            <a:off x="5394960" y="4050791"/>
+            <a:ext cx="5422392" cy="640080"/>
+          </a:xfrm>
+          <a:prstGeom prst="roundRect">
+            <a:avLst>
+              <a:gd name="adj" fmla="val 8000"/>
+            </a:avLst>
+          </a:prstGeom>
+          <a:solidFill>
+            <a:srgbClr val="FFFFFF"/>
+          </a:solidFill>
+          <a:ln w="12700">
+            <a:solidFill>
+              <a:srgbClr val="8EA8CB"/>
+            </a:solidFill>
+          </a:ln>
+          <a:effectLst/>
+        </p:spPr>
+        <p:style>
+          <a:lnRef idx="1">
+            <a:schemeClr val="accent1"/>
+          </a:lnRef>
+          <a:fillRef idx="3">
+            <a:schemeClr val="accent1"/>
+          </a:fillRef>
+          <a:effectRef idx="0">
+            <a:schemeClr val="accent1"/>
+          </a:effectRef>
+          <a:fontRef idx="minor">
+            <a:schemeClr val="lt1"/>
+          </a:fontRef>
+        </p:style>
+        <p:txBody>
+          <a:bodyPr rtlCol="0" anchor="ctr" wrap="square" lIns="109728" rIns="109728"/>
+          <a:lstStyle/>
+          <a:p>
+            <a:pPr algn="ctr">
+              <a:defRPr sz="2200">
+                <a:solidFill>
+                  <a:srgbClr val="202D3C"/>
+                </a:solidFill>
+                <a:latin typeface="Liberation Sans"/>
+              </a:defRPr>
+            </a:pPr>
+            <a:r>
+              <a:t>2 complete replicas × 2 hosts</a:t>
+            </a:r>
+          </a:p>
+        </p:txBody>
+      </p:sp>
+      <p:sp>
+        <p:nvSpPr>
+          <p:cNvPr id="23" name="Rectangle 22"/>
+          <p:cNvSpPr/>
+          <p:nvPr/>
+        </p:nvSpPr>
+        <p:spPr>
+          <a:xfrm>
+            <a:off x="5394960" y="5001768"/>
+            <a:ext cx="2212848" cy="292608"/>
+          </a:xfrm>
+          <a:prstGeom prst="rect">
+            <a:avLst/>
+          </a:prstGeom>
+          <a:solidFill>
+            <a:srgbClr val="EDF5F1"/>
           </a:solidFill>
           <a:ln>
             <a:noFill/>
@@ -6831,59 +8366,59 @@
       </p:sp>
       <p:sp>
         <p:nvSpPr>
-          <p:cNvPr id="18" name="TextBox 17"/>
-          <p:cNvSpPr txBox="1"/>
-          <p:nvPr/>
-        </p:nvSpPr>
-        <p:spPr>
-          <a:xfrm>
-            <a:off x="2459736" y="2377440"/>
-            <a:ext cx="4059935" cy="356616"/>
-          </a:xfrm>
-          <a:prstGeom prst="rect">
-            <a:avLst/>
-          </a:prstGeom>
-          <a:noFill/>
-        </p:spPr>
-        <p:txBody>
-          <a:bodyPr wrap="square" lIns="18288" rIns="18288" tIns="18288" bIns="0">
-            <a:spAutoFit/>
-          </a:bodyPr>
-          <a:lstStyle/>
-          <a:p>
-            <a:pPr>
-              <a:spcAft>
-                <a:spcPts val="500"/>
-              </a:spcAft>
-              <a:defRPr sz="1400" b="0">
-                <a:solidFill>
-                  <a:srgbClr val="202D3C"/>
-                </a:solidFill>
-                <a:latin typeface="Liberation Sans"/>
-              </a:defRPr>
-            </a:pPr>
-            <a:r>
-              <a:t>Role / replica gang + topology</a:t>
-            </a:r>
-          </a:p>
-        </p:txBody>
-      </p:sp>
-      <p:sp>
-        <p:nvSpPr>
-          <p:cNvPr id="19" name="Rectangle 18"/>
+          <p:cNvPr id="24" name="TextBox 23"/>
+          <p:cNvSpPr txBox="1"/>
+          <p:nvPr/>
+        </p:nvSpPr>
+        <p:spPr>
+          <a:xfrm>
+            <a:off x="5458968" y="5029200"/>
+            <a:ext cx="2121408" cy="219456"/>
+          </a:xfrm>
+          <a:prstGeom prst="rect">
+            <a:avLst/>
+          </a:prstGeom>
+          <a:noFill/>
+        </p:spPr>
+        <p:txBody>
+          <a:bodyPr wrap="square" lIns="18288" rIns="18288" tIns="18288" bIns="0">
+            <a:spAutoFit/>
+          </a:bodyPr>
+          <a:lstStyle/>
+          <a:p>
+            <a:pPr>
+              <a:spcAft>
+                <a:spcPts val="500"/>
+              </a:spcAft>
+              <a:defRPr sz="1000" b="1">
+                <a:solidFill>
+                  <a:srgbClr val="386C5A"/>
+                </a:solidFill>
+                <a:latin typeface="Liberation Sans"/>
+              </a:defRPr>
+            </a:pPr>
+            <a:r>
+              <a:t>GANG: MERGED</a:t>
+            </a:r>
+          </a:p>
+        </p:txBody>
+      </p:sp>
+      <p:sp>
+        <p:nvSpPr>
+          <p:cNvPr id="25" name="Rectangle 24"/>
           <p:cNvSpPr/>
           <p:nvPr/>
         </p:nvSpPr>
         <p:spPr>
           <a:xfrm>
-            <a:off x="6629400" y="2231136"/>
-            <a:ext cx="4389120" cy="557784"/>
+            <a:off x="7790688" y="5001768"/>
+            <a:ext cx="2916936" cy="292608"/>
           </a:xfrm>
           <a:prstGeom prst="rect">
             <a:avLst/>
           </a:prstGeom>
           <a:solidFill>
-            <a:srgbClr val="F0F5FB"/>
+            <a:srgbClr val="FFF4D8"/>
           </a:solidFill>
           <a:ln>
             <a:noFill/>
@@ -6914,1074 +8449,39 @@
       </p:sp>
       <p:sp>
         <p:nvSpPr>
-          <p:cNvPr id="20" name="TextBox 19"/>
-          <p:cNvSpPr txBox="1"/>
-          <p:nvPr/>
-        </p:nvSpPr>
-        <p:spPr>
-          <a:xfrm>
-            <a:off x="6739128" y="2377440"/>
-            <a:ext cx="4169663" cy="356616"/>
-          </a:xfrm>
-          <a:prstGeom prst="rect">
-            <a:avLst/>
-          </a:prstGeom>
-          <a:noFill/>
-        </p:spPr>
-        <p:txBody>
-          <a:bodyPr wrap="square" lIns="18288" rIns="18288" tIns="18288" bIns="0">
-            <a:spAutoFit/>
-          </a:bodyPr>
-          <a:lstStyle/>
-          <a:p>
-            <a:pPr>
-              <a:spcAft>
-                <a:spcPts val="500"/>
-              </a:spcAft>
-              <a:defRPr sz="1400" b="0">
-                <a:solidFill>
-                  <a:srgbClr val="647282"/>
-                </a:solidFill>
-                <a:latin typeface="Liberation Sans"/>
-              </a:defRPr>
-            </a:pPr>
-            <a:r>
-              <a:t>Reference use cases for group relationships</a:t>
-            </a:r>
-          </a:p>
-        </p:txBody>
-      </p:sp>
-      <p:sp>
-        <p:nvSpPr>
-          <p:cNvPr id="21" name="Rectangle 20"/>
-          <p:cNvSpPr/>
-          <p:nvPr/>
-        </p:nvSpPr>
-        <p:spPr>
-          <a:xfrm>
-            <a:off x="594360" y="2798064"/>
-            <a:ext cx="1755648" cy="557784"/>
-          </a:xfrm>
-          <a:prstGeom prst="rect">
-            <a:avLst/>
-          </a:prstGeom>
-          <a:solidFill>
-            <a:srgbClr val="FFFFFF"/>
-          </a:solidFill>
-          <a:ln>
-            <a:noFill/>
-          </a:ln>
-          <a:effectLst/>
-        </p:spPr>
-        <p:style>
-          <a:lnRef idx="1">
-            <a:schemeClr val="accent1"/>
-          </a:lnRef>
-          <a:fillRef idx="3">
-            <a:schemeClr val="accent1"/>
-          </a:fillRef>
-          <a:effectRef idx="0">
-            <a:schemeClr val="accent1"/>
-          </a:effectRef>
-          <a:fontRef idx="minor">
-            <a:schemeClr val="lt1"/>
-          </a:fontRef>
-        </p:style>
-        <p:txBody>
-          <a:bodyPr rtlCol="0" anchor="ctr"/>
-          <a:lstStyle/>
-          <a:p>
-            <a:pPr algn="ctr"/>
-          </a:p>
-        </p:txBody>
-      </p:sp>
-      <p:sp>
-        <p:nvSpPr>
-          <p:cNvPr id="22" name="TextBox 21"/>
-          <p:cNvSpPr txBox="1"/>
-          <p:nvPr/>
-        </p:nvSpPr>
-        <p:spPr>
-          <a:xfrm>
-            <a:off x="704088" y="2944368"/>
-            <a:ext cx="1536192" cy="356616"/>
-          </a:xfrm>
-          <a:prstGeom prst="rect">
-            <a:avLst/>
-          </a:prstGeom>
-          <a:noFill/>
-        </p:spPr>
-        <p:txBody>
-          <a:bodyPr wrap="square" lIns="18288" rIns="18288" tIns="18288" bIns="0">
-            <a:spAutoFit/>
-          </a:bodyPr>
-          <a:lstStyle/>
-          <a:p>
-            <a:pPr>
-              <a:spcAft>
-                <a:spcPts val="500"/>
-              </a:spcAft>
-              <a:defRPr sz="1600" b="1">
-                <a:solidFill>
-                  <a:srgbClr val="202D3C"/>
-                </a:solidFill>
-                <a:latin typeface="Liberation Sans"/>
-              </a:defRPr>
-            </a:pPr>
-            <a:r>
-              <a:t>KubeRay</a:t>
-            </a:r>
-          </a:p>
-        </p:txBody>
-      </p:sp>
-      <p:sp>
-        <p:nvSpPr>
-          <p:cNvPr id="23" name="Rectangle 22"/>
-          <p:cNvSpPr/>
-          <p:nvPr/>
-        </p:nvSpPr>
-        <p:spPr>
-          <a:xfrm>
-            <a:off x="2350008" y="2798064"/>
-            <a:ext cx="4279392" cy="557784"/>
-          </a:xfrm>
-          <a:prstGeom prst="rect">
-            <a:avLst/>
-          </a:prstGeom>
-          <a:solidFill>
-            <a:srgbClr val="FFFFFF"/>
-          </a:solidFill>
-          <a:ln>
-            <a:noFill/>
-          </a:ln>
-          <a:effectLst/>
-        </p:spPr>
-        <p:style>
-          <a:lnRef idx="1">
-            <a:schemeClr val="accent1"/>
-          </a:lnRef>
-          <a:fillRef idx="3">
-            <a:schemeClr val="accent1"/>
-          </a:fillRef>
-          <a:effectRef idx="0">
-            <a:schemeClr val="accent1"/>
-          </a:effectRef>
-          <a:fontRef idx="minor">
-            <a:schemeClr val="lt1"/>
-          </a:fontRef>
-        </p:style>
-        <p:txBody>
-          <a:bodyPr rtlCol="0" anchor="ctr"/>
-          <a:lstStyle/>
-          <a:p>
-            <a:pPr algn="ctr"/>
-          </a:p>
-        </p:txBody>
-      </p:sp>
-      <p:sp>
-        <p:nvSpPr>
-          <p:cNvPr id="24" name="TextBox 23"/>
-          <p:cNvSpPr txBox="1"/>
-          <p:nvPr/>
-        </p:nvSpPr>
-        <p:spPr>
-          <a:xfrm>
-            <a:off x="2459736" y="2944368"/>
-            <a:ext cx="4059935" cy="356616"/>
-          </a:xfrm>
-          <a:prstGeom prst="rect">
-            <a:avLst/>
-          </a:prstGeom>
-          <a:noFill/>
-        </p:spPr>
-        <p:txBody>
-          <a:bodyPr wrap="square" lIns="18288" rIns="18288" tIns="18288" bIns="0">
-            <a:spAutoFit/>
-          </a:bodyPr>
-          <a:lstStyle/>
-          <a:p>
-            <a:pPr>
-              <a:spcAft>
-                <a:spcPts val="500"/>
-              </a:spcAft>
-              <a:defRPr sz="1400" b="0">
-                <a:solidFill>
-                  <a:srgbClr val="202D3C"/>
-                </a:solidFill>
-                <a:latin typeface="Liberation Sans"/>
-              </a:defRPr>
-            </a:pPr>
-            <a:r>
-              <a:t>SubGroup support · #5249 merged</a:t>
-            </a:r>
-          </a:p>
-        </p:txBody>
-      </p:sp>
-      <p:sp>
-        <p:nvSpPr>
-          <p:cNvPr id="25" name="Rectangle 24"/>
-          <p:cNvSpPr/>
-          <p:nvPr/>
-        </p:nvSpPr>
-        <p:spPr>
-          <a:xfrm>
-            <a:off x="6629400" y="2798064"/>
-            <a:ext cx="4389120" cy="557784"/>
-          </a:xfrm>
-          <a:prstGeom prst="rect">
-            <a:avLst/>
-          </a:prstGeom>
-          <a:solidFill>
-            <a:srgbClr val="FFFFFF"/>
-          </a:solidFill>
-          <a:ln>
-            <a:noFill/>
-          </a:ln>
-          <a:effectLst/>
-        </p:spPr>
-        <p:style>
-          <a:lnRef idx="1">
-            <a:schemeClr val="accent1"/>
-          </a:lnRef>
-          <a:fillRef idx="3">
-            <a:schemeClr val="accent1"/>
-          </a:fillRef>
-          <a:effectRef idx="0">
-            <a:schemeClr val="accent1"/>
-          </a:effectRef>
-          <a:fontRef idx="minor">
-            <a:schemeClr val="lt1"/>
-          </a:fontRef>
-        </p:style>
-        <p:txBody>
-          <a:bodyPr rtlCol="0" anchor="ctr"/>
-          <a:lstStyle/>
-          <a:p>
-            <a:pPr algn="ctr"/>
-          </a:p>
-        </p:txBody>
-      </p:sp>
-      <p:sp>
-        <p:nvSpPr>
           <p:cNvPr id="26" name="TextBox 25"/>
           <p:cNvSpPr txBox="1"/>
           <p:nvPr/>
         </p:nvSpPr>
         <p:spPr>
           <a:xfrm>
-            <a:off x="6739128" y="2944368"/>
-            <a:ext cx="4169663" cy="356616"/>
-          </a:xfrm>
-          <a:prstGeom prst="rect">
-            <a:avLst/>
-          </a:prstGeom>
-          <a:noFill/>
-        </p:spPr>
-        <p:txBody>
-          <a:bodyPr wrap="square" lIns="18288" rIns="18288" tIns="18288" bIns="0">
-            <a:spAutoFit/>
-          </a:bodyPr>
-          <a:lstStyle/>
-          <a:p>
-            <a:pPr>
-              <a:spcAft>
-                <a:spcPts val="500"/>
-              </a:spcAft>
-              <a:defRPr sz="1400" b="0">
-                <a:solidFill>
-                  <a:srgbClr val="647282"/>
-                </a:solidFill>
-                <a:latin typeface="Liberation Sans"/>
-              </a:defRPr>
-            </a:pPr>
-            <a:r>
-              <a:t>Replica topology · #5369 open</a:t>
-            </a:r>
-          </a:p>
-        </p:txBody>
-      </p:sp>
-      <p:sp>
-        <p:nvSpPr>
-          <p:cNvPr id="27" name="Rectangle 26"/>
-          <p:cNvSpPr/>
-          <p:nvPr/>
-        </p:nvSpPr>
-        <p:spPr>
-          <a:xfrm>
-            <a:off x="594360" y="3364991"/>
-            <a:ext cx="1755648" cy="557784"/>
-          </a:xfrm>
-          <a:prstGeom prst="rect">
-            <a:avLst/>
-          </a:prstGeom>
-          <a:solidFill>
-            <a:srgbClr val="F0F5FB"/>
-          </a:solidFill>
-          <a:ln>
-            <a:noFill/>
-          </a:ln>
-          <a:effectLst/>
-        </p:spPr>
-        <p:style>
-          <a:lnRef idx="1">
-            <a:schemeClr val="accent1"/>
-          </a:lnRef>
-          <a:fillRef idx="3">
-            <a:schemeClr val="accent1"/>
-          </a:fillRef>
-          <a:effectRef idx="0">
-            <a:schemeClr val="accent1"/>
-          </a:effectRef>
-          <a:fontRef idx="minor">
-            <a:schemeClr val="lt1"/>
-          </a:fontRef>
-        </p:style>
-        <p:txBody>
-          <a:bodyPr rtlCol="0" anchor="ctr"/>
-          <a:lstStyle/>
-          <a:p>
-            <a:pPr algn="ctr"/>
-          </a:p>
-        </p:txBody>
-      </p:sp>
-      <p:sp>
-        <p:nvSpPr>
-          <p:cNvPr id="28" name="TextBox 27"/>
-          <p:cNvSpPr txBox="1"/>
-          <p:nvPr/>
-        </p:nvSpPr>
-        <p:spPr>
-          <a:xfrm>
-            <a:off x="704088" y="3511296"/>
-            <a:ext cx="1536192" cy="356616"/>
-          </a:xfrm>
-          <a:prstGeom prst="rect">
-            <a:avLst/>
-          </a:prstGeom>
-          <a:noFill/>
-        </p:spPr>
-        <p:txBody>
-          <a:bodyPr wrap="square" lIns="18288" rIns="18288" tIns="18288" bIns="0">
-            <a:spAutoFit/>
-          </a:bodyPr>
-          <a:lstStyle/>
-          <a:p>
-            <a:pPr>
-              <a:spcAft>
-                <a:spcPts val="500"/>
-              </a:spcAft>
-              <a:defRPr sz="1600" b="1">
-                <a:solidFill>
-                  <a:srgbClr val="202D3C"/>
-                </a:solidFill>
-                <a:latin typeface="Liberation Sans"/>
-              </a:defRPr>
-            </a:pPr>
-            <a:r>
-              <a:t>Grove</a:t>
-            </a:r>
-          </a:p>
-        </p:txBody>
-      </p:sp>
-      <p:sp>
-        <p:nvSpPr>
-          <p:cNvPr id="29" name="Rectangle 28"/>
-          <p:cNvSpPr/>
-          <p:nvPr/>
-        </p:nvSpPr>
-        <p:spPr>
-          <a:xfrm>
-            <a:off x="2350008" y="3364991"/>
-            <a:ext cx="4279392" cy="557784"/>
-          </a:xfrm>
-          <a:prstGeom prst="rect">
-            <a:avLst/>
-          </a:prstGeom>
-          <a:solidFill>
-            <a:srgbClr val="F0F5FB"/>
-          </a:solidFill>
-          <a:ln>
-            <a:noFill/>
-          </a:ln>
-          <a:effectLst/>
-        </p:spPr>
-        <p:style>
-          <a:lnRef idx="1">
-            <a:schemeClr val="accent1"/>
-          </a:lnRef>
-          <a:fillRef idx="3">
-            <a:schemeClr val="accent1"/>
-          </a:fillRef>
-          <a:effectRef idx="0">
-            <a:schemeClr val="accent1"/>
-          </a:effectRef>
-          <a:fontRef idx="minor">
-            <a:schemeClr val="lt1"/>
-          </a:fontRef>
-        </p:style>
-        <p:txBody>
-          <a:bodyPr rtlCol="0" anchor="ctr"/>
-          <a:lstStyle/>
-          <a:p>
-            <a:pPr algn="ctr"/>
-          </a:p>
-        </p:txBody>
-      </p:sp>
-      <p:sp>
-        <p:nvSpPr>
-          <p:cNvPr id="30" name="TextBox 29"/>
-          <p:cNvSpPr txBox="1"/>
-          <p:nvPr/>
-        </p:nvSpPr>
-        <p:spPr>
-          <a:xfrm>
-            <a:off x="2459736" y="3511296"/>
-            <a:ext cx="4059935" cy="356616"/>
-          </a:xfrm>
-          <a:prstGeom prst="rect">
-            <a:avLst/>
-          </a:prstGeom>
-          <a:noFill/>
-        </p:spPr>
-        <p:txBody>
-          <a:bodyPr wrap="square" lIns="18288" rIns="18288" tIns="18288" bIns="0">
-            <a:spAutoFit/>
-          </a:bodyPr>
-          <a:lstStyle/>
-          <a:p>
-            <a:pPr>
-              <a:spcAft>
-                <a:spcPts val="500"/>
-              </a:spcAft>
-              <a:defRPr sz="1400" b="0">
-                <a:solidFill>
-                  <a:srgbClr val="202D3C"/>
-                </a:solidFill>
-                <a:latin typeface="Liberation Sans"/>
-              </a:defRPr>
-            </a:pPr>
-            <a:r>
-              <a:t>Gang / SubGroup backend merged</a:t>
-            </a:r>
-          </a:p>
-        </p:txBody>
-      </p:sp>
-      <p:sp>
-        <p:nvSpPr>
-          <p:cNvPr id="31" name="Rectangle 30"/>
-          <p:cNvSpPr/>
-          <p:nvPr/>
-        </p:nvSpPr>
-        <p:spPr>
-          <a:xfrm>
-            <a:off x="6629400" y="3364991"/>
-            <a:ext cx="4389120" cy="557784"/>
-          </a:xfrm>
-          <a:prstGeom prst="rect">
-            <a:avLst/>
-          </a:prstGeom>
-          <a:solidFill>
-            <a:srgbClr val="F0F5FB"/>
-          </a:solidFill>
-          <a:ln>
-            <a:noFill/>
-          </a:ln>
-          <a:effectLst/>
-        </p:spPr>
-        <p:style>
-          <a:lnRef idx="1">
-            <a:schemeClr val="accent1"/>
-          </a:lnRef>
-          <a:fillRef idx="3">
-            <a:schemeClr val="accent1"/>
-          </a:fillRef>
-          <a:effectRef idx="0">
-            <a:schemeClr val="accent1"/>
-          </a:effectRef>
-          <a:fontRef idx="minor">
-            <a:schemeClr val="lt1"/>
-          </a:fontRef>
-        </p:style>
-        <p:txBody>
-          <a:bodyPr rtlCol="0" anchor="ctr"/>
-          <a:lstStyle/>
-          <a:p>
-            <a:pPr algn="ctr"/>
-          </a:p>
-        </p:txBody>
-      </p:sp>
-      <p:sp>
-        <p:nvSpPr>
-          <p:cNvPr id="32" name="TextBox 31"/>
-          <p:cNvSpPr txBox="1"/>
-          <p:nvPr/>
-        </p:nvSpPr>
-        <p:spPr>
-          <a:xfrm>
-            <a:off x="6739128" y="3511296"/>
-            <a:ext cx="4169663" cy="356616"/>
-          </a:xfrm>
-          <a:prstGeom prst="rect">
-            <a:avLst/>
-          </a:prstGeom>
-          <a:noFill/>
-        </p:spPr>
-        <p:txBody>
-          <a:bodyPr wrap="square" lIns="18288" rIns="18288" tIns="18288" bIns="0">
-            <a:spAutoFit/>
-          </a:bodyPr>
-          <a:lstStyle/>
-          <a:p>
-            <a:pPr>
-              <a:spcAft>
-                <a:spcPts val="500"/>
-              </a:spcAft>
-              <a:defRPr sz="1400" b="0">
-                <a:solidFill>
-                  <a:srgbClr val="647282"/>
-                </a:solidFill>
-                <a:latin typeface="Liberation Sans"/>
-              </a:defRPr>
-            </a:pPr>
-            <a:r>
-              <a:t>Topology mapping not yet supported</a:t>
-            </a:r>
-          </a:p>
-        </p:txBody>
-      </p:sp>
-      <p:sp>
-        <p:nvSpPr>
-          <p:cNvPr id="33" name="Rectangle 32"/>
-          <p:cNvSpPr/>
-          <p:nvPr/>
-        </p:nvSpPr>
-        <p:spPr>
-          <a:xfrm>
-            <a:off x="594360" y="3931920"/>
-            <a:ext cx="1755648" cy="557784"/>
-          </a:xfrm>
-          <a:prstGeom prst="rect">
-            <a:avLst/>
-          </a:prstGeom>
-          <a:solidFill>
-            <a:srgbClr val="FFFFFF"/>
-          </a:solidFill>
-          <a:ln>
-            <a:noFill/>
-          </a:ln>
-          <a:effectLst/>
-        </p:spPr>
-        <p:style>
-          <a:lnRef idx="1">
-            <a:schemeClr val="accent1"/>
-          </a:lnRef>
-          <a:fillRef idx="3">
-            <a:schemeClr val="accent1"/>
-          </a:fillRef>
-          <a:effectRef idx="0">
-            <a:schemeClr val="accent1"/>
-          </a:effectRef>
-          <a:fontRef idx="minor">
-            <a:schemeClr val="lt1"/>
-          </a:fontRef>
-        </p:style>
-        <p:txBody>
-          <a:bodyPr rtlCol="0" anchor="ctr"/>
-          <a:lstStyle/>
-          <a:p>
-            <a:pPr algn="ctr"/>
-          </a:p>
-        </p:txBody>
-      </p:sp>
-      <p:sp>
-        <p:nvSpPr>
-          <p:cNvPr id="34" name="TextBox 33"/>
-          <p:cNvSpPr txBox="1"/>
-          <p:nvPr/>
-        </p:nvSpPr>
-        <p:spPr>
-          <a:xfrm>
-            <a:off x="704088" y="4078224"/>
-            <a:ext cx="1536192" cy="356616"/>
-          </a:xfrm>
-          <a:prstGeom prst="rect">
-            <a:avLst/>
-          </a:prstGeom>
-          <a:noFill/>
-        </p:spPr>
-        <p:txBody>
-          <a:bodyPr wrap="square" lIns="18288" rIns="18288" tIns="18288" bIns="0">
-            <a:spAutoFit/>
-          </a:bodyPr>
-          <a:lstStyle/>
-          <a:p>
-            <a:pPr>
-              <a:spcAft>
-                <a:spcPts val="500"/>
-              </a:spcAft>
-              <a:defRPr sz="1600" b="1">
-                <a:solidFill>
-                  <a:srgbClr val="202D3C"/>
-                </a:solidFill>
-                <a:latin typeface="Liberation Sans"/>
-              </a:defRPr>
-            </a:pPr>
-            <a:r>
-              <a:t>Kubeflow</a:t>
-            </a:r>
-          </a:p>
-        </p:txBody>
-      </p:sp>
-      <p:sp>
-        <p:nvSpPr>
-          <p:cNvPr id="35" name="Rectangle 34"/>
-          <p:cNvSpPr/>
-          <p:nvPr/>
-        </p:nvSpPr>
-        <p:spPr>
-          <a:xfrm>
-            <a:off x="2350008" y="3931920"/>
-            <a:ext cx="4279392" cy="557784"/>
-          </a:xfrm>
-          <a:prstGeom prst="rect">
-            <a:avLst/>
-          </a:prstGeom>
-          <a:solidFill>
-            <a:srgbClr val="FFFFFF"/>
-          </a:solidFill>
-          <a:ln>
-            <a:noFill/>
-          </a:ln>
-          <a:effectLst/>
-        </p:spPr>
-        <p:style>
-          <a:lnRef idx="1">
-            <a:schemeClr val="accent1"/>
-          </a:lnRef>
-          <a:fillRef idx="3">
-            <a:schemeClr val="accent1"/>
-          </a:fillRef>
-          <a:effectRef idx="0">
-            <a:schemeClr val="accent1"/>
-          </a:effectRef>
-          <a:fontRef idx="minor">
-            <a:schemeClr val="lt1"/>
-          </a:fontRef>
-        </p:style>
-        <p:txBody>
-          <a:bodyPr rtlCol="0" anchor="ctr"/>
-          <a:lstStyle/>
-          <a:p>
-            <a:pPr algn="ctr"/>
-          </a:p>
-        </p:txBody>
-      </p:sp>
-      <p:sp>
-        <p:nvSpPr>
-          <p:cNvPr id="36" name="TextBox 35"/>
-          <p:cNvSpPr txBox="1"/>
-          <p:nvPr/>
-        </p:nvSpPr>
-        <p:spPr>
-          <a:xfrm>
-            <a:off x="2459736" y="4078224"/>
-            <a:ext cx="4059935" cy="356616"/>
-          </a:xfrm>
-          <a:prstGeom prst="rect">
-            <a:avLst/>
-          </a:prstGeom>
-          <a:noFill/>
-        </p:spPr>
-        <p:txBody>
-          <a:bodyPr wrap="square" lIns="18288" rIns="18288" tIns="18288" bIns="0">
-            <a:spAutoFit/>
-          </a:bodyPr>
-          <a:lstStyle/>
-          <a:p>
-            <a:pPr>
-              <a:spcAft>
-                <a:spcPts val="500"/>
-              </a:spcAft>
-              <a:defRPr sz="1400" b="0">
-                <a:solidFill>
-                  <a:srgbClr val="202D3C"/>
-                </a:solidFill>
-                <a:latin typeface="Liberation Sans"/>
-              </a:defRPr>
-            </a:pPr>
-            <a:r>
-              <a:t>Existing Volcano integration</a:t>
-            </a:r>
-          </a:p>
-        </p:txBody>
-      </p:sp>
-      <p:sp>
-        <p:nvSpPr>
-          <p:cNvPr id="37" name="Rectangle 36"/>
-          <p:cNvSpPr/>
-          <p:nvPr/>
-        </p:nvSpPr>
-        <p:spPr>
-          <a:xfrm>
-            <a:off x="6629400" y="3931920"/>
-            <a:ext cx="4389120" cy="557784"/>
-          </a:xfrm>
-          <a:prstGeom prst="rect">
-            <a:avLst/>
-          </a:prstGeom>
-          <a:solidFill>
-            <a:srgbClr val="FFFFFF"/>
-          </a:solidFill>
-          <a:ln>
-            <a:noFill/>
-          </a:ln>
-          <a:effectLst/>
-        </p:spPr>
-        <p:style>
-          <a:lnRef idx="1">
-            <a:schemeClr val="accent1"/>
-          </a:lnRef>
-          <a:fillRef idx="3">
-            <a:schemeClr val="accent1"/>
-          </a:fillRef>
-          <a:effectRef idx="0">
-            <a:schemeClr val="accent1"/>
-          </a:effectRef>
-          <a:fontRef idx="minor">
-            <a:schemeClr val="lt1"/>
-          </a:fontRef>
-        </p:style>
-        <p:txBody>
-          <a:bodyPr rtlCol="0" anchor="ctr"/>
-          <a:lstStyle/>
-          <a:p>
-            <a:pPr algn="ctr"/>
-          </a:p>
-        </p:txBody>
-      </p:sp>
-      <p:sp>
-        <p:nvSpPr>
-          <p:cNvPr id="38" name="TextBox 37"/>
-          <p:cNvSpPr txBox="1"/>
-          <p:nvPr/>
-        </p:nvSpPr>
-        <p:spPr>
-          <a:xfrm>
-            <a:off x="6739128" y="4078224"/>
-            <a:ext cx="4169663" cy="356616"/>
-          </a:xfrm>
-          <a:prstGeom prst="rect">
-            <a:avLst/>
-          </a:prstGeom>
-          <a:noFill/>
-        </p:spPr>
-        <p:txBody>
-          <a:bodyPr wrap="square" lIns="18288" rIns="18288" tIns="18288" bIns="0">
-            <a:spAutoFit/>
-          </a:bodyPr>
-          <a:lstStyle/>
-          <a:p>
-            <a:pPr>
-              <a:spcAft>
-                <a:spcPts val="500"/>
-              </a:spcAft>
-              <a:defRPr sz="1400" b="0">
-                <a:solidFill>
-                  <a:srgbClr val="647282"/>
-                </a:solidFill>
-                <a:latin typeface="Liberation Sans"/>
-              </a:defRPr>
-            </a:pPr>
-            <a:r>
-              <a:t>Finer TrainJob groups + topology</a:t>
-            </a:r>
-          </a:p>
-        </p:txBody>
-      </p:sp>
-      <p:sp>
-        <p:nvSpPr>
-          <p:cNvPr id="39" name="Rectangle 38"/>
-          <p:cNvSpPr/>
-          <p:nvPr/>
-        </p:nvSpPr>
-        <p:spPr>
-          <a:xfrm>
-            <a:off x="594360" y="4498848"/>
-            <a:ext cx="1755648" cy="557784"/>
-          </a:xfrm>
-          <a:prstGeom prst="rect">
-            <a:avLst/>
-          </a:prstGeom>
-          <a:solidFill>
-            <a:srgbClr val="F0F5FB"/>
-          </a:solidFill>
-          <a:ln>
-            <a:noFill/>
-          </a:ln>
-          <a:effectLst/>
-        </p:spPr>
-        <p:style>
-          <a:lnRef idx="1">
-            <a:schemeClr val="accent1"/>
-          </a:lnRef>
-          <a:fillRef idx="3">
-            <a:schemeClr val="accent1"/>
-          </a:fillRef>
-          <a:effectRef idx="0">
-            <a:schemeClr val="accent1"/>
-          </a:effectRef>
-          <a:fontRef idx="minor">
-            <a:schemeClr val="lt1"/>
-          </a:fontRef>
-        </p:style>
-        <p:txBody>
-          <a:bodyPr rtlCol="0" anchor="ctr"/>
-          <a:lstStyle/>
-          <a:p>
-            <a:pPr algn="ctr"/>
-          </a:p>
-        </p:txBody>
-      </p:sp>
-      <p:sp>
-        <p:nvSpPr>
-          <p:cNvPr id="40" name="TextBox 39"/>
-          <p:cNvSpPr txBox="1"/>
-          <p:nvPr/>
-        </p:nvSpPr>
-        <p:spPr>
-          <a:xfrm>
-            <a:off x="704088" y="4645152"/>
-            <a:ext cx="1536192" cy="356616"/>
-          </a:xfrm>
-          <a:prstGeom prst="rect">
-            <a:avLst/>
-          </a:prstGeom>
-          <a:noFill/>
-        </p:spPr>
-        <p:txBody>
-          <a:bodyPr wrap="square" lIns="18288" rIns="18288" tIns="18288" bIns="0">
-            <a:spAutoFit/>
-          </a:bodyPr>
-          <a:lstStyle/>
-          <a:p>
-            <a:pPr>
-              <a:spcAft>
-                <a:spcPts val="500"/>
-              </a:spcAft>
-              <a:defRPr sz="1600" b="1">
-                <a:solidFill>
-                  <a:srgbClr val="202D3C"/>
-                </a:solidFill>
-                <a:latin typeface="Liberation Sans"/>
-              </a:defRPr>
-            </a:pPr>
-            <a:r>
-              <a:t>LWS</a:t>
-            </a:r>
-          </a:p>
-        </p:txBody>
-      </p:sp>
-      <p:sp>
-        <p:nvSpPr>
-          <p:cNvPr id="41" name="Rectangle 40"/>
-          <p:cNvSpPr/>
-          <p:nvPr/>
-        </p:nvSpPr>
-        <p:spPr>
-          <a:xfrm>
-            <a:off x="2350008" y="4498848"/>
-            <a:ext cx="4279392" cy="557784"/>
-          </a:xfrm>
-          <a:prstGeom prst="rect">
-            <a:avLst/>
-          </a:prstGeom>
-          <a:solidFill>
-            <a:srgbClr val="F0F5FB"/>
-          </a:solidFill>
-          <a:ln>
-            <a:noFill/>
-          </a:ln>
-          <a:effectLst/>
-        </p:spPr>
-        <p:style>
-          <a:lnRef idx="1">
-            <a:schemeClr val="accent1"/>
-          </a:lnRef>
-          <a:fillRef idx="3">
-            <a:schemeClr val="accent1"/>
-          </a:fillRef>
-          <a:effectRef idx="0">
-            <a:schemeClr val="accent1"/>
-          </a:effectRef>
-          <a:fontRef idx="minor">
-            <a:schemeClr val="lt1"/>
-          </a:fontRef>
-        </p:style>
-        <p:txBody>
-          <a:bodyPr rtlCol="0" anchor="ctr"/>
-          <a:lstStyle/>
-          <a:p>
-            <a:pPr algn="ctr"/>
-          </a:p>
-        </p:txBody>
-      </p:sp>
-      <p:sp>
-        <p:nvSpPr>
-          <p:cNvPr id="42" name="TextBox 41"/>
-          <p:cNvSpPr txBox="1"/>
-          <p:nvPr/>
-        </p:nvSpPr>
-        <p:spPr>
-          <a:xfrm>
-            <a:off x="2459736" y="4645152"/>
-            <a:ext cx="4059935" cy="356616"/>
-          </a:xfrm>
-          <a:prstGeom prst="rect">
-            <a:avLst/>
-          </a:prstGeom>
-          <a:noFill/>
-        </p:spPr>
-        <p:txBody>
-          <a:bodyPr wrap="square" lIns="18288" rIns="18288" tIns="18288" bIns="0">
-            <a:spAutoFit/>
-          </a:bodyPr>
-          <a:lstStyle/>
-          <a:p>
-            <a:pPr>
-              <a:spcAft>
-                <a:spcPts val="500"/>
-              </a:spcAft>
-              <a:defRPr sz="1400" b="0">
-                <a:solidFill>
-                  <a:srgbClr val="202D3C"/>
-                </a:solidFill>
-                <a:latin typeface="Liberation Sans"/>
-              </a:defRPr>
-            </a:pPr>
-            <a:r>
-              <a:t>Existing gang / Volcano integration</a:t>
-            </a:r>
-          </a:p>
-        </p:txBody>
-      </p:sp>
-      <p:sp>
-        <p:nvSpPr>
-          <p:cNvPr id="43" name="Rectangle 42"/>
-          <p:cNvSpPr/>
-          <p:nvPr/>
-        </p:nvSpPr>
-        <p:spPr>
-          <a:xfrm>
-            <a:off x="6629400" y="4498848"/>
-            <a:ext cx="4389120" cy="557784"/>
-          </a:xfrm>
-          <a:prstGeom prst="rect">
-            <a:avLst/>
-          </a:prstGeom>
-          <a:solidFill>
-            <a:srgbClr val="F0F5FB"/>
-          </a:solidFill>
-          <a:ln>
-            <a:noFill/>
-          </a:ln>
-          <a:effectLst/>
-        </p:spPr>
-        <p:style>
-          <a:lnRef idx="1">
-            <a:schemeClr val="accent1"/>
-          </a:lnRef>
-          <a:fillRef idx="3">
-            <a:schemeClr val="accent1"/>
-          </a:fillRef>
-          <a:effectRef idx="0">
-            <a:schemeClr val="accent1"/>
-          </a:effectRef>
-          <a:fontRef idx="minor">
-            <a:schemeClr val="lt1"/>
-          </a:fontRef>
-        </p:style>
-        <p:txBody>
-          <a:bodyPr rtlCol="0" anchor="ctr"/>
-          <a:lstStyle/>
-          <a:p>
-            <a:pPr algn="ctr"/>
-          </a:p>
-        </p:txBody>
-      </p:sp>
-      <p:sp>
-        <p:nvSpPr>
-          <p:cNvPr id="44" name="TextBox 43"/>
-          <p:cNvSpPr txBox="1"/>
-          <p:nvPr/>
-        </p:nvSpPr>
-        <p:spPr>
-          <a:xfrm>
-            <a:off x="6739128" y="4645152"/>
-            <a:ext cx="4169663" cy="356616"/>
-          </a:xfrm>
-          <a:prstGeom prst="rect">
-            <a:avLst/>
-          </a:prstGeom>
-          <a:noFill/>
-        </p:spPr>
-        <p:txBody>
-          <a:bodyPr wrap="square" lIns="18288" rIns="18288" tIns="18288" bIns="0">
-            <a:spAutoFit/>
-          </a:bodyPr>
-          <a:lstStyle/>
-          <a:p>
-            <a:pPr>
-              <a:spcAft>
-                <a:spcPts val="500"/>
-              </a:spcAft>
-              <a:defRPr sz="1400" b="0">
-                <a:solidFill>
-                  <a:srgbClr val="647282"/>
-                </a:solidFill>
-                <a:latin typeface="Liberation Sans"/>
-              </a:defRPr>
-            </a:pPr>
-            <a:r>
-              <a:t>Explore roles / slices + group relationships</a:t>
-            </a:r>
-          </a:p>
-        </p:txBody>
-      </p:sp>
-      <p:sp>
-        <p:nvSpPr>
-          <p:cNvPr id="45" name="TextBox 44"/>
-          <p:cNvSpPr txBox="1"/>
-          <p:nvPr/>
-        </p:nvSpPr>
-        <p:spPr>
-          <a:xfrm>
-            <a:off x="658368" y="5358384"/>
-            <a:ext cx="10789920" cy="256032"/>
-          </a:xfrm>
-          <a:prstGeom prst="rect">
-            <a:avLst/>
-          </a:prstGeom>
-          <a:noFill/>
-        </p:spPr>
-        <p:txBody>
-          <a:bodyPr wrap="square" lIns="18288" rIns="18288" tIns="18288" bIns="0">
-            <a:spAutoFit/>
-          </a:bodyPr>
-          <a:lstStyle/>
-          <a:p>
-            <a:pPr>
-              <a:spcAft>
-                <a:spcPts val="500"/>
-              </a:spcAft>
-              <a:defRPr sz="1800" b="1">
-                <a:solidFill>
-                  <a:srgbClr val="356696"/>
-                </a:solidFill>
-                <a:latin typeface="Liberation Sans"/>
-              </a:defRPr>
-            </a:pPr>
-            <a:r>
-              <a:t>Controllers supply identity; the scheduler applies group and placement constraints.</a:t>
+            <a:off x="7854696" y="5029200"/>
+            <a:ext cx="2825496" cy="219456"/>
+          </a:xfrm>
+          <a:prstGeom prst="rect">
+            <a:avLst/>
+          </a:prstGeom>
+          <a:noFill/>
+        </p:spPr>
+        <p:txBody>
+          <a:bodyPr wrap="square" lIns="18288" rIns="18288" tIns="18288" bIns="0">
+            <a:spAutoFit/>
+          </a:bodyPr>
+          <a:lstStyle/>
+          <a:p>
+            <a:pPr>
+              <a:spcAft>
+                <a:spcPts val="500"/>
+              </a:spcAft>
+              <a:defRPr sz="1000" b="1">
+                <a:solidFill>
+                  <a:srgbClr val="8B621C"/>
+                </a:solidFill>
+                <a:latin typeface="Liberation Sans"/>
+              </a:defRPr>
+            </a:pPr>
+            <a:r>
+              <a:t>TOPOLOGY: IN PROGRESS</a:t>
             </a:r>
           </a:p>
         </p:txBody>
@@ -8129,7 +8629,7 @@
               </a:defRPr>
             </a:pPr>
             <a:r>
-              <a:t>KubeRay: A Replica Can Span Multiple Pods</a:t>
+              <a:t>Extending the Ecosystem and Placement Model</a:t>
             </a:r>
           </a:p>
         </p:txBody>
@@ -8212,7 +8712,7 @@
               </a:defRPr>
             </a:pPr>
             <a:r>
-              <a:t>新增案例：WorkerGroup / policy / 实际 replica 不混为一谈；省略 head，仅聚焦一个 worker group。</a:t>
+              <a:t>Standalone HyperNode 已交付；SubGroup 关系与进一步的 controller / adapter 接入分别标状态。</a:t>
             </a:r>
           </a:p>
         </p:txBody>
@@ -8251,7 +8751,7 @@
               </a:defRPr>
             </a:pPr>
             <a:r>
-              <a:t>VOLCANO  /  KUBECON NA 2026  /  WORKING DRAFT  •  1:00</a:t>
+              <a:t>VOLCANO  /  KUBECON NA 2026  /  WORKING DRAFT  •  1:30</a:t>
             </a:r>
           </a:p>
         </p:txBody>
@@ -8297,147 +8797,14 @@
       </p:sp>
       <p:sp>
         <p:nvSpPr>
-          <p:cNvPr id="9" name="TextBox 8"/>
-          <p:cNvSpPr txBox="1"/>
-          <p:nvPr/>
-        </p:nvSpPr>
-        <p:spPr>
-          <a:xfrm>
-            <a:off x="594360" y="1773936"/>
-            <a:ext cx="3840480" cy="548640"/>
-          </a:xfrm>
-          <a:prstGeom prst="rect">
-            <a:avLst/>
-          </a:prstGeom>
-          <a:noFill/>
-        </p:spPr>
-        <p:txBody>
-          <a:bodyPr wrap="square" lIns="18288" rIns="18288" tIns="18288" bIns="0">
-            <a:spAutoFit/>
-          </a:bodyPr>
-          <a:lstStyle/>
-          <a:p>
-            <a:pPr>
-              <a:spcAft>
-                <a:spcPts val="500"/>
-              </a:spcAft>
-              <a:defRPr sz="2200" b="1">
-                <a:solidFill>
-                  <a:srgbClr val="356696"/>
-                </a:solidFill>
-                <a:latin typeface="Liberation Mono"/>
-              </a:defRPr>
-            </a:pPr>
-            <a:r>
-              <a:t>minReplicas = 2</a:t>
-            </a:r>
-          </a:p>
-          <a:p>
-            <a:pPr>
-              <a:spcAft>
-                <a:spcPts val="500"/>
-              </a:spcAft>
-              <a:defRPr sz="2200" b="1">
-                <a:solidFill>
-                  <a:srgbClr val="356696"/>
-                </a:solidFill>
-                <a:latin typeface="Liberation Mono"/>
-              </a:defRPr>
-            </a:pPr>
-            <a:r>
-              <a:t>numOfHosts = 2</a:t>
-            </a:r>
-          </a:p>
-        </p:txBody>
-      </p:sp>
-      <p:sp>
-        <p:nvSpPr>
-          <p:cNvPr id="10" name="TextBox 9"/>
-          <p:cNvSpPr txBox="1"/>
-          <p:nvPr/>
-        </p:nvSpPr>
-        <p:spPr>
-          <a:xfrm>
-            <a:off x="594360" y="2999232"/>
-            <a:ext cx="3840480" cy="1280160"/>
-          </a:xfrm>
-          <a:prstGeom prst="rect">
-            <a:avLst/>
-          </a:prstGeom>
-          <a:noFill/>
-        </p:spPr>
-        <p:txBody>
-          <a:bodyPr wrap="square" lIns="18288" rIns="18288" tIns="18288" bIns="0">
-            <a:spAutoFit/>
-          </a:bodyPr>
-          <a:lstStyle/>
-          <a:p>
-            <a:pPr>
-              <a:spcAft>
-                <a:spcPts val="500"/>
-              </a:spcAft>
-              <a:defRPr sz="2400" b="1">
-                <a:solidFill>
-                  <a:srgbClr val="202D3C"/>
-                </a:solidFill>
-                <a:latin typeface="Liberation Sans"/>
-              </a:defRPr>
-            </a:pPr>
-            <a:r>
-              <a:t>The requirement is two complete replicas, each spanning two Pods.</a:t>
-            </a:r>
-          </a:p>
-        </p:txBody>
-      </p:sp>
-      <p:sp>
-        <p:nvSpPr>
-          <p:cNvPr id="11" name="TextBox 10"/>
-          <p:cNvSpPr txBox="1"/>
-          <p:nvPr/>
-        </p:nvSpPr>
-        <p:spPr>
-          <a:xfrm>
-            <a:off x="594360" y="4617720"/>
-            <a:ext cx="3840480" cy="594360"/>
-          </a:xfrm>
-          <a:prstGeom prst="rect">
-            <a:avLst/>
-          </a:prstGeom>
-          <a:noFill/>
-        </p:spPr>
-        <p:txBody>
-          <a:bodyPr wrap="square" lIns="18288" rIns="18288" tIns="18288" bIns="0">
-            <a:spAutoFit/>
-          </a:bodyPr>
-          <a:lstStyle/>
-          <a:p>
-            <a:pPr>
-              <a:spcAft>
-                <a:spcPts val="500"/>
-              </a:spcAft>
-              <a:defRPr sz="1900" b="0">
-                <a:solidFill>
-                  <a:srgbClr val="647282"/>
-                </a:solidFill>
-                <a:latin typeface="Liberation Sans"/>
-              </a:defRPr>
-            </a:pPr>
-            <a:r>
-              <a:t>Any four Pods are not enough.</a:t>
-            </a:r>
-          </a:p>
-        </p:txBody>
-      </p:sp>
-      <p:sp>
-        <p:nvSpPr>
-          <p:cNvPr id="12" name="Rectangle 11"/>
+          <p:cNvPr id="9" name="Rectangle 8"/>
           <p:cNvSpPr/>
           <p:nvPr/>
         </p:nvSpPr>
         <p:spPr>
           <a:xfrm>
-            <a:off x="4846320" y="1691640"/>
-            <a:ext cx="6812280" cy="3858768"/>
+            <a:off x="594360" y="1874519"/>
+            <a:ext cx="3337560" cy="3200400"/>
           </a:xfrm>
           <a:prstGeom prst="rect">
             <a:avLst/>
@@ -8474,66 +8841,117 @@
       </p:sp>
       <p:sp>
         <p:nvSpPr>
-          <p:cNvPr id="13" name="TextBox 12"/>
-          <p:cNvSpPr txBox="1"/>
-          <p:nvPr/>
-        </p:nvSpPr>
-        <p:spPr>
-          <a:xfrm>
-            <a:off x="5010912" y="1819656"/>
-            <a:ext cx="6483096" cy="246888"/>
-          </a:xfrm>
-          <a:prstGeom prst="rect">
-            <a:avLst/>
-          </a:prstGeom>
-          <a:noFill/>
-        </p:spPr>
-        <p:txBody>
-          <a:bodyPr wrap="square" lIns="18288" rIns="18288" tIns="18288" bIns="0">
-            <a:spAutoFit/>
-          </a:bodyPr>
-          <a:lstStyle/>
-          <a:p>
-            <a:pPr>
-              <a:spcAft>
-                <a:spcPts val="500"/>
-              </a:spcAft>
-              <a:defRPr sz="1000" b="0">
+          <p:cNvPr id="10" name="TextBox 9"/>
+          <p:cNvSpPr txBox="1"/>
+          <p:nvPr/>
+        </p:nvSpPr>
+        <p:spPr>
+          <a:xfrm>
+            <a:off x="758952" y="2148840"/>
+            <a:ext cx="2971800" cy="804672"/>
+          </a:xfrm>
+          <a:prstGeom prst="rect">
+            <a:avLst/>
+          </a:prstGeom>
+          <a:noFill/>
+        </p:spPr>
+        <p:txBody>
+          <a:bodyPr wrap="square" lIns="18288" rIns="18288" tIns="18288" bIns="0">
+            <a:spAutoFit/>
+          </a:bodyPr>
+          <a:lstStyle/>
+          <a:p>
+            <a:pPr>
+              <a:spcAft>
+                <a:spcPts val="500"/>
+              </a:spcAft>
+              <a:defRPr sz="2300" b="1">
+                <a:solidFill>
+                  <a:srgbClr val="202D3C"/>
+                </a:solidFill>
+                <a:latin typeface="Liberation Sans"/>
+              </a:defRPr>
+            </a:pPr>
+            <a:r>
+              <a:t>Available foundation</a:t>
+            </a:r>
+          </a:p>
+        </p:txBody>
+      </p:sp>
+      <p:sp>
+        <p:nvSpPr>
+          <p:cNvPr id="11" name="TextBox 10"/>
+          <p:cNvSpPr txBox="1"/>
+          <p:nvPr/>
+        </p:nvSpPr>
+        <p:spPr>
+          <a:xfrm>
+            <a:off x="758952" y="3383280"/>
+            <a:ext cx="2971800" cy="1280160"/>
+          </a:xfrm>
+          <a:prstGeom prst="rect">
+            <a:avLst/>
+          </a:prstGeom>
+          <a:noFill/>
+        </p:spPr>
+        <p:txBody>
+          <a:bodyPr wrap="square" lIns="18288" rIns="18288" tIns="18288" bIns="0">
+            <a:spAutoFit/>
+          </a:bodyPr>
+          <a:lstStyle/>
+          <a:p>
+            <a:pPr>
+              <a:spcAft>
+                <a:spcPts val="500"/>
+              </a:spcAft>
+              <a:defRPr sz="1900" b="0">
                 <a:solidFill>
                   <a:srgbClr val="647282"/>
                 </a:solidFill>
-                <a:latin typeface="Liberation Mono"/>
-              </a:defRPr>
-            </a:pPr>
-            <a:r>
-              <a:t>EDITABLE DIAGRAM DRAFT</a:t>
-            </a:r>
-          </a:p>
-        </p:txBody>
-      </p:sp>
-      <p:sp>
-        <p:nvSpPr>
-          <p:cNvPr id="14" name="Rounded Rectangle 13"/>
+                <a:latin typeface="Liberation Sans"/>
+              </a:defRPr>
+            </a:pPr>
+            <a:r>
+              <a:t>Standalone HyperNode controller</a:t>
+            </a:r>
+          </a:p>
+          <a:p>
+            <a:pPr>
+              <a:spcAft>
+                <a:spcPts val="500"/>
+              </a:spcAft>
+              <a:defRPr sz="1900" b="0">
+                <a:solidFill>
+                  <a:srgbClr val="647282"/>
+                </a:solidFill>
+                <a:latin typeface="Liberation Sans"/>
+              </a:defRPr>
+            </a:pPr>
+            <a:r>
+              <a:t>A reusable topology API</a:t>
+            </a:r>
+          </a:p>
+        </p:txBody>
+      </p:sp>
+      <p:sp>
+        <p:nvSpPr>
+          <p:cNvPr id="12" name="Rectangle 11"/>
           <p:cNvSpPr/>
           <p:nvPr/>
         </p:nvSpPr>
         <p:spPr>
           <a:xfrm>
-            <a:off x="5394960" y="2606040"/>
-            <a:ext cx="2011680" cy="1005840"/>
-          </a:xfrm>
-          <a:prstGeom prst="roundRect">
-            <a:avLst>
-              <a:gd name="adj" fmla="val 8000"/>
-            </a:avLst>
+            <a:off x="4416552" y="1874519"/>
+            <a:ext cx="3337560" cy="3200400"/>
+          </a:xfrm>
+          <a:prstGeom prst="rect">
+            <a:avLst/>
           </a:prstGeom>
           <a:solidFill>
-            <a:srgbClr val="FFFFFF"/>
+            <a:srgbClr val="F0F5FB"/>
           </a:solidFill>
-          <a:ln w="12700">
-            <a:solidFill>
-              <a:srgbClr val="8EA8CB"/>
-            </a:solidFill>
+          <a:ln>
+            <a:noFill/>
           </a:ln>
           <a:effectLst/>
         </p:spPr>
@@ -8561,31 +8979,31 @@
       </p:sp>
       <p:sp>
         <p:nvSpPr>
-          <p:cNvPr id="15" name="TextBox 14"/>
-          <p:cNvSpPr txBox="1"/>
-          <p:nvPr/>
-        </p:nvSpPr>
-        <p:spPr>
-          <a:xfrm>
-            <a:off x="5486400" y="2679192"/>
-            <a:ext cx="1828800" cy="246888"/>
-          </a:xfrm>
-          <a:prstGeom prst="rect">
-            <a:avLst/>
-          </a:prstGeom>
-          <a:noFill/>
-        </p:spPr>
-        <p:txBody>
-          <a:bodyPr wrap="square" lIns="18288" rIns="18288" tIns="18288" bIns="0">
-            <a:spAutoFit/>
-          </a:bodyPr>
-          <a:lstStyle/>
-          <a:p>
-            <a:pPr>
-              <a:spcAft>
-                <a:spcPts val="500"/>
-              </a:spcAft>
-              <a:defRPr sz="1200" b="1">
+          <p:cNvPr id="13" name="TextBox 12"/>
+          <p:cNvSpPr txBox="1"/>
+          <p:nvPr/>
+        </p:nvSpPr>
+        <p:spPr>
+          <a:xfrm>
+            <a:off x="4581144" y="2148840"/>
+            <a:ext cx="2971800" cy="804672"/>
+          </a:xfrm>
+          <a:prstGeom prst="rect">
+            <a:avLst/>
+          </a:prstGeom>
+          <a:noFill/>
+        </p:spPr>
+        <p:txBody>
+          <a:bodyPr wrap="square" lIns="18288" rIns="18288" tIns="18288" bIns="0">
+            <a:spAutoFit/>
+          </a:bodyPr>
+          <a:lstStyle/>
+          <a:p>
+            <a:pPr>
+              <a:spcAft>
+                <a:spcPts val="500"/>
+              </a:spcAft>
+              <a:defRPr sz="2300" b="1">
                 <a:solidFill>
                   <a:srgbClr val="202D3C"/>
                 </a:solidFill>
@@ -8593,34 +9011,85 @@
               </a:defRPr>
             </a:pPr>
             <a:r>
-              <a:t>Replica 0 → SubGroup</a:t>
-            </a:r>
-          </a:p>
-        </p:txBody>
-      </p:sp>
-      <p:sp>
-        <p:nvSpPr>
-          <p:cNvPr id="16" name="Rounded Rectangle 15"/>
+              <a:t>Integration work</a:t>
+            </a:r>
+          </a:p>
+        </p:txBody>
+      </p:sp>
+      <p:sp>
+        <p:nvSpPr>
+          <p:cNvPr id="14" name="TextBox 13"/>
+          <p:cNvSpPr txBox="1"/>
+          <p:nvPr/>
+        </p:nvSpPr>
+        <p:spPr>
+          <a:xfrm>
+            <a:off x="4581144" y="3383280"/>
+            <a:ext cx="2971800" cy="1280160"/>
+          </a:xfrm>
+          <a:prstGeom prst="rect">
+            <a:avLst/>
+          </a:prstGeom>
+          <a:noFill/>
+        </p:spPr>
+        <p:txBody>
+          <a:bodyPr wrap="square" lIns="18288" rIns="18288" tIns="18288" bIns="0">
+            <a:spAutoFit/>
+          </a:bodyPr>
+          <a:lstStyle/>
+          <a:p>
+            <a:pPr>
+              <a:spcAft>
+                <a:spcPts val="500"/>
+              </a:spcAft>
+              <a:defRPr sz="1900" b="0">
+                <a:solidFill>
+                  <a:srgbClr val="647282"/>
+                </a:solidFill>
+                <a:latin typeface="Liberation Sans"/>
+              </a:defRPr>
+            </a:pPr>
+            <a:r>
+              <a:t>KubeRay / Grove topology</a:t>
+            </a:r>
+          </a:p>
+          <a:p>
+            <a:pPr>
+              <a:spcAft>
+                <a:spcPts val="500"/>
+              </a:spcAft>
+              <a:defRPr sz="1900" b="0">
+                <a:solidFill>
+                  <a:srgbClr val="647282"/>
+                </a:solidFill>
+                <a:latin typeface="Liberation Sans"/>
+              </a:defRPr>
+            </a:pPr>
+            <a:r>
+              <a:t>Deeper Kubeflow / LWS mappings</a:t>
+            </a:r>
+          </a:p>
+        </p:txBody>
+      </p:sp>
+      <p:sp>
+        <p:nvSpPr>
+          <p:cNvPr id="15" name="Rectangle 14"/>
           <p:cNvSpPr/>
           <p:nvPr/>
         </p:nvSpPr>
         <p:spPr>
           <a:xfrm>
-            <a:off x="5522976" y="3044952"/>
-            <a:ext cx="777240" cy="393192"/>
-          </a:xfrm>
-          <a:prstGeom prst="roundRect">
-            <a:avLst>
-              <a:gd name="adj" fmla="val 8000"/>
-            </a:avLst>
+            <a:off x="8238744" y="1874519"/>
+            <a:ext cx="3337560" cy="3200400"/>
+          </a:xfrm>
+          <a:prstGeom prst="rect">
+            <a:avLst/>
           </a:prstGeom>
           <a:solidFill>
-            <a:srgbClr val="F0F5FB"/>
+            <a:srgbClr val="F2EDF8"/>
           </a:solidFill>
-          <a:ln w="12700">
-            <a:solidFill>
-              <a:srgbClr val="8EA8CB"/>
-            </a:solidFill>
+          <a:ln>
+            <a:noFill/>
           </a:ln>
           <a:effectLst/>
         </p:spPr>
@@ -8639,11 +9108,40 @@
           </a:fontRef>
         </p:style>
         <p:txBody>
-          <a:bodyPr rtlCol="0" anchor="ctr" wrap="square" lIns="109728" rIns="109728"/>
-          <a:lstStyle/>
-          <a:p>
-            <a:pPr algn="ctr">
-              <a:defRPr sz="1200">
+          <a:bodyPr rtlCol="0" anchor="ctr"/>
+          <a:lstStyle/>
+          <a:p>
+            <a:pPr algn="ctr"/>
+          </a:p>
+        </p:txBody>
+      </p:sp>
+      <p:sp>
+        <p:nvSpPr>
+          <p:cNvPr id="16" name="TextBox 15"/>
+          <p:cNvSpPr txBox="1"/>
+          <p:nvPr/>
+        </p:nvSpPr>
+        <p:spPr>
+          <a:xfrm>
+            <a:off x="8403336" y="2148840"/>
+            <a:ext cx="2971800" cy="804672"/>
+          </a:xfrm>
+          <a:prstGeom prst="rect">
+            <a:avLst/>
+          </a:prstGeom>
+          <a:noFill/>
+        </p:spPr>
+        <p:txBody>
+          <a:bodyPr wrap="square" lIns="18288" rIns="18288" tIns="18288" bIns="0">
+            <a:spAutoFit/>
+          </a:bodyPr>
+          <a:lstStyle/>
+          <a:p>
+            <a:pPr>
+              <a:spcAft>
+                <a:spcPts val="500"/>
+              </a:spcAft>
+              <a:defRPr sz="2300" b="1">
                 <a:solidFill>
                   <a:srgbClr val="202D3C"/>
                 </a:solidFill>
@@ -8651,492 +9149,101 @@
               </a:defRPr>
             </a:pPr>
             <a:r>
-              <a:t>Pod 1</a:t>
-            </a:r>
-          </a:p>
-        </p:txBody>
-      </p:sp>
-      <p:sp>
-        <p:nvSpPr>
-          <p:cNvPr id="17" name="Rounded Rectangle 16"/>
-          <p:cNvSpPr/>
-          <p:nvPr/>
-        </p:nvSpPr>
-        <p:spPr>
-          <a:xfrm>
-            <a:off x="6428232" y="3044952"/>
-            <a:ext cx="777240" cy="393192"/>
-          </a:xfrm>
-          <a:prstGeom prst="roundRect">
-            <a:avLst>
-              <a:gd name="adj" fmla="val 8000"/>
-            </a:avLst>
-          </a:prstGeom>
-          <a:solidFill>
-            <a:srgbClr val="F0F5FB"/>
-          </a:solidFill>
-          <a:ln w="12700">
-            <a:solidFill>
-              <a:srgbClr val="8EA8CB"/>
-            </a:solidFill>
-          </a:ln>
-          <a:effectLst/>
-        </p:spPr>
-        <p:style>
-          <a:lnRef idx="1">
-            <a:schemeClr val="accent1"/>
-          </a:lnRef>
-          <a:fillRef idx="3">
-            <a:schemeClr val="accent1"/>
-          </a:fillRef>
-          <a:effectRef idx="0">
-            <a:schemeClr val="accent1"/>
-          </a:effectRef>
-          <a:fontRef idx="minor">
-            <a:schemeClr val="lt1"/>
-          </a:fontRef>
-        </p:style>
-        <p:txBody>
-          <a:bodyPr rtlCol="0" anchor="ctr" wrap="square" lIns="109728" rIns="109728"/>
-          <a:lstStyle/>
-          <a:p>
-            <a:pPr algn="ctr">
-              <a:defRPr sz="1200">
-                <a:solidFill>
-                  <a:srgbClr val="202D3C"/>
-                </a:solidFill>
-                <a:latin typeface="Liberation Sans"/>
-              </a:defRPr>
-            </a:pPr>
-            <a:r>
-              <a:t>Pod 2</a:t>
-            </a:r>
-          </a:p>
-        </p:txBody>
-      </p:sp>
-      <p:sp>
-        <p:nvSpPr>
-          <p:cNvPr id="18" name="Rounded Rectangle 17"/>
-          <p:cNvSpPr/>
-          <p:nvPr/>
-        </p:nvSpPr>
-        <p:spPr>
-          <a:xfrm>
-            <a:off x="8805672" y="2606040"/>
-            <a:ext cx="2011680" cy="1005840"/>
-          </a:xfrm>
-          <a:prstGeom prst="roundRect">
-            <a:avLst>
-              <a:gd name="adj" fmla="val 8000"/>
-            </a:avLst>
-          </a:prstGeom>
-          <a:solidFill>
-            <a:srgbClr val="FFFFFF"/>
-          </a:solidFill>
-          <a:ln w="12700">
-            <a:solidFill>
-              <a:srgbClr val="8EA8CB"/>
-            </a:solidFill>
-          </a:ln>
-          <a:effectLst/>
-        </p:spPr>
-        <p:style>
-          <a:lnRef idx="1">
-            <a:schemeClr val="accent1"/>
-          </a:lnRef>
-          <a:fillRef idx="3">
-            <a:schemeClr val="accent1"/>
-          </a:fillRef>
-          <a:effectRef idx="0">
-            <a:schemeClr val="accent1"/>
-          </a:effectRef>
-          <a:fontRef idx="minor">
-            <a:schemeClr val="lt1"/>
-          </a:fontRef>
-        </p:style>
-        <p:txBody>
-          <a:bodyPr rtlCol="0" anchor="ctr"/>
-          <a:lstStyle/>
-          <a:p>
-            <a:pPr algn="ctr"/>
-          </a:p>
-        </p:txBody>
-      </p:sp>
-      <p:sp>
-        <p:nvSpPr>
-          <p:cNvPr id="19" name="TextBox 18"/>
-          <p:cNvSpPr txBox="1"/>
-          <p:nvPr/>
-        </p:nvSpPr>
-        <p:spPr>
-          <a:xfrm>
-            <a:off x="8897112" y="2679192"/>
-            <a:ext cx="1828800" cy="246888"/>
-          </a:xfrm>
-          <a:prstGeom prst="rect">
-            <a:avLst/>
-          </a:prstGeom>
-          <a:noFill/>
-        </p:spPr>
-        <p:txBody>
-          <a:bodyPr wrap="square" lIns="18288" rIns="18288" tIns="18288" bIns="0">
-            <a:spAutoFit/>
-          </a:bodyPr>
-          <a:lstStyle/>
-          <a:p>
-            <a:pPr>
-              <a:spcAft>
-                <a:spcPts val="500"/>
-              </a:spcAft>
-              <a:defRPr sz="1200" b="1">
-                <a:solidFill>
-                  <a:srgbClr val="202D3C"/>
-                </a:solidFill>
-                <a:latin typeface="Liberation Sans"/>
-              </a:defRPr>
-            </a:pPr>
-            <a:r>
-              <a:t>Replica 1 → SubGroup</a:t>
-            </a:r>
-          </a:p>
-        </p:txBody>
-      </p:sp>
-      <p:sp>
-        <p:nvSpPr>
-          <p:cNvPr id="20" name="Rounded Rectangle 19"/>
-          <p:cNvSpPr/>
-          <p:nvPr/>
-        </p:nvSpPr>
-        <p:spPr>
-          <a:xfrm>
-            <a:off x="8933688" y="3044952"/>
-            <a:ext cx="777240" cy="393192"/>
-          </a:xfrm>
-          <a:prstGeom prst="roundRect">
-            <a:avLst>
-              <a:gd name="adj" fmla="val 8000"/>
-            </a:avLst>
-          </a:prstGeom>
-          <a:solidFill>
-            <a:srgbClr val="F0F5FB"/>
-          </a:solidFill>
-          <a:ln w="12700">
-            <a:solidFill>
-              <a:srgbClr val="8EA8CB"/>
-            </a:solidFill>
-          </a:ln>
-          <a:effectLst/>
-        </p:spPr>
-        <p:style>
-          <a:lnRef idx="1">
-            <a:schemeClr val="accent1"/>
-          </a:lnRef>
-          <a:fillRef idx="3">
-            <a:schemeClr val="accent1"/>
-          </a:fillRef>
-          <a:effectRef idx="0">
-            <a:schemeClr val="accent1"/>
-          </a:effectRef>
-          <a:fontRef idx="minor">
-            <a:schemeClr val="lt1"/>
-          </a:fontRef>
-        </p:style>
-        <p:txBody>
-          <a:bodyPr rtlCol="0" anchor="ctr" wrap="square" lIns="109728" rIns="109728"/>
-          <a:lstStyle/>
-          <a:p>
-            <a:pPr algn="ctr">
-              <a:defRPr sz="1200">
-                <a:solidFill>
-                  <a:srgbClr val="202D3C"/>
-                </a:solidFill>
-                <a:latin typeface="Liberation Sans"/>
-              </a:defRPr>
-            </a:pPr>
-            <a:r>
-              <a:t>Pod 1</a:t>
-            </a:r>
-          </a:p>
-        </p:txBody>
-      </p:sp>
-      <p:sp>
-        <p:nvSpPr>
-          <p:cNvPr id="21" name="Rounded Rectangle 20"/>
-          <p:cNvSpPr/>
-          <p:nvPr/>
-        </p:nvSpPr>
-        <p:spPr>
-          <a:xfrm>
-            <a:off x="9838944" y="3044952"/>
-            <a:ext cx="777240" cy="393192"/>
-          </a:xfrm>
-          <a:prstGeom prst="roundRect">
-            <a:avLst>
-              <a:gd name="adj" fmla="val 8000"/>
-            </a:avLst>
-          </a:prstGeom>
-          <a:solidFill>
-            <a:srgbClr val="F0F5FB"/>
-          </a:solidFill>
-          <a:ln w="12700">
-            <a:solidFill>
-              <a:srgbClr val="8EA8CB"/>
-            </a:solidFill>
-          </a:ln>
-          <a:effectLst/>
-        </p:spPr>
-        <p:style>
-          <a:lnRef idx="1">
-            <a:schemeClr val="accent1"/>
-          </a:lnRef>
-          <a:fillRef idx="3">
-            <a:schemeClr val="accent1"/>
-          </a:fillRef>
-          <a:effectRef idx="0">
-            <a:schemeClr val="accent1"/>
-          </a:effectRef>
-          <a:fontRef idx="minor">
-            <a:schemeClr val="lt1"/>
-          </a:fontRef>
-        </p:style>
-        <p:txBody>
-          <a:bodyPr rtlCol="0" anchor="ctr" wrap="square" lIns="109728" rIns="109728"/>
-          <a:lstStyle/>
-          <a:p>
-            <a:pPr algn="ctr">
-              <a:defRPr sz="1200">
-                <a:solidFill>
-                  <a:srgbClr val="202D3C"/>
-                </a:solidFill>
-                <a:latin typeface="Liberation Sans"/>
-              </a:defRPr>
-            </a:pPr>
-            <a:r>
-              <a:t>Pod 2</a:t>
-            </a:r>
-          </a:p>
-        </p:txBody>
-      </p:sp>
-      <p:sp>
-        <p:nvSpPr>
-          <p:cNvPr id="22" name="Rounded Rectangle 21"/>
-          <p:cNvSpPr/>
-          <p:nvPr/>
-        </p:nvSpPr>
-        <p:spPr>
-          <a:xfrm>
-            <a:off x="5394960" y="4050791"/>
-            <a:ext cx="5422392" cy="640080"/>
-          </a:xfrm>
-          <a:prstGeom prst="roundRect">
-            <a:avLst>
-              <a:gd name="adj" fmla="val 8000"/>
-            </a:avLst>
-          </a:prstGeom>
-          <a:solidFill>
-            <a:srgbClr val="FFFFFF"/>
-          </a:solidFill>
-          <a:ln w="12700">
-            <a:solidFill>
-              <a:srgbClr val="8EA8CB"/>
-            </a:solidFill>
-          </a:ln>
-          <a:effectLst/>
-        </p:spPr>
-        <p:style>
-          <a:lnRef idx="1">
-            <a:schemeClr val="accent1"/>
-          </a:lnRef>
-          <a:fillRef idx="3">
-            <a:schemeClr val="accent1"/>
-          </a:fillRef>
-          <a:effectRef idx="0">
-            <a:schemeClr val="accent1"/>
-          </a:effectRef>
-          <a:fontRef idx="minor">
-            <a:schemeClr val="lt1"/>
-          </a:fontRef>
-        </p:style>
-        <p:txBody>
-          <a:bodyPr rtlCol="0" anchor="ctr" wrap="square" lIns="109728" rIns="109728"/>
-          <a:lstStyle/>
-          <a:p>
-            <a:pPr algn="ctr">
-              <a:defRPr sz="2200">
-                <a:solidFill>
-                  <a:srgbClr val="202D3C"/>
-                </a:solidFill>
-                <a:latin typeface="Liberation Sans"/>
-              </a:defRPr>
-            </a:pPr>
-            <a:r>
-              <a:t>2 complete replicas × 2 hosts</a:t>
-            </a:r>
-          </a:p>
-        </p:txBody>
-      </p:sp>
-      <p:sp>
-        <p:nvSpPr>
-          <p:cNvPr id="23" name="Rectangle 22"/>
-          <p:cNvSpPr/>
-          <p:nvPr/>
-        </p:nvSpPr>
-        <p:spPr>
-          <a:xfrm>
-            <a:off x="5394960" y="5001768"/>
-            <a:ext cx="2212848" cy="292608"/>
-          </a:xfrm>
-          <a:prstGeom prst="rect">
-            <a:avLst/>
-          </a:prstGeom>
-          <a:solidFill>
-            <a:srgbClr val="EDF5F1"/>
-          </a:solidFill>
-          <a:ln>
-            <a:noFill/>
-          </a:ln>
-          <a:effectLst/>
-        </p:spPr>
-        <p:style>
-          <a:lnRef idx="1">
-            <a:schemeClr val="accent1"/>
-          </a:lnRef>
-          <a:fillRef idx="3">
-            <a:schemeClr val="accent1"/>
-          </a:fillRef>
-          <a:effectRef idx="0">
-            <a:schemeClr val="accent1"/>
-          </a:effectRef>
-          <a:fontRef idx="minor">
-            <a:schemeClr val="lt1"/>
-          </a:fontRef>
-        </p:style>
-        <p:txBody>
-          <a:bodyPr rtlCol="0" anchor="ctr"/>
-          <a:lstStyle/>
-          <a:p>
-            <a:pPr algn="ctr"/>
-          </a:p>
-        </p:txBody>
-      </p:sp>
-      <p:sp>
-        <p:nvSpPr>
-          <p:cNvPr id="24" name="TextBox 23"/>
-          <p:cNvSpPr txBox="1"/>
-          <p:nvPr/>
-        </p:nvSpPr>
-        <p:spPr>
-          <a:xfrm>
-            <a:off x="5458968" y="5029200"/>
-            <a:ext cx="2121408" cy="219456"/>
-          </a:xfrm>
-          <a:prstGeom prst="rect">
-            <a:avLst/>
-          </a:prstGeom>
-          <a:noFill/>
-        </p:spPr>
-        <p:txBody>
-          <a:bodyPr wrap="square" lIns="18288" rIns="18288" tIns="18288" bIns="0">
-            <a:spAutoFit/>
-          </a:bodyPr>
-          <a:lstStyle/>
-          <a:p>
-            <a:pPr>
-              <a:spcAft>
-                <a:spcPts val="500"/>
-              </a:spcAft>
-              <a:defRPr sz="1000" b="1">
-                <a:solidFill>
-                  <a:srgbClr val="386C5A"/>
-                </a:solidFill>
-                <a:latin typeface="Liberation Sans"/>
-              </a:defRPr>
-            </a:pPr>
-            <a:r>
-              <a:t>GANG: MERGED</a:t>
-            </a:r>
-          </a:p>
-        </p:txBody>
-      </p:sp>
-      <p:sp>
-        <p:nvSpPr>
-          <p:cNvPr id="25" name="Rectangle 24"/>
-          <p:cNvSpPr/>
-          <p:nvPr/>
-        </p:nvSpPr>
-        <p:spPr>
-          <a:xfrm>
-            <a:off x="7790688" y="5001768"/>
-            <a:ext cx="2916936" cy="292608"/>
-          </a:xfrm>
-          <a:prstGeom prst="rect">
-            <a:avLst/>
-          </a:prstGeom>
-          <a:solidFill>
-            <a:srgbClr val="FFF4D8"/>
-          </a:solidFill>
-          <a:ln>
-            <a:noFill/>
-          </a:ln>
-          <a:effectLst/>
-        </p:spPr>
-        <p:style>
-          <a:lnRef idx="1">
-            <a:schemeClr val="accent1"/>
-          </a:lnRef>
-          <a:fillRef idx="3">
-            <a:schemeClr val="accent1"/>
-          </a:fillRef>
-          <a:effectRef idx="0">
-            <a:schemeClr val="accent1"/>
-          </a:effectRef>
-          <a:fontRef idx="minor">
-            <a:schemeClr val="lt1"/>
-          </a:fontRef>
-        </p:style>
-        <p:txBody>
-          <a:bodyPr rtlCol="0" anchor="ctr"/>
-          <a:lstStyle/>
-          <a:p>
-            <a:pPr algn="ctr"/>
-          </a:p>
-        </p:txBody>
-      </p:sp>
-      <p:sp>
-        <p:nvSpPr>
-          <p:cNvPr id="26" name="TextBox 25"/>
-          <p:cNvSpPr txBox="1"/>
-          <p:nvPr/>
-        </p:nvSpPr>
-        <p:spPr>
-          <a:xfrm>
-            <a:off x="7854696" y="5029200"/>
-            <a:ext cx="2825496" cy="219456"/>
-          </a:xfrm>
-          <a:prstGeom prst="rect">
-            <a:avLst/>
-          </a:prstGeom>
-          <a:noFill/>
-        </p:spPr>
-        <p:txBody>
-          <a:bodyPr wrap="square" lIns="18288" rIns="18288" tIns="18288" bIns="0">
-            <a:spAutoFit/>
-          </a:bodyPr>
-          <a:lstStyle/>
-          <a:p>
-            <a:pPr>
-              <a:spcAft>
-                <a:spcPts val="500"/>
-              </a:spcAft>
-              <a:defRPr sz="1000" b="1">
-                <a:solidFill>
-                  <a:srgbClr val="8B621C"/>
-                </a:solidFill>
-                <a:latin typeface="Liberation Sans"/>
-              </a:defRPr>
-            </a:pPr>
-            <a:r>
-              <a:t>TOPOLOGY: IN PROGRESS</a:t>
+              <a:t>Proposed semantics</a:t>
+            </a:r>
+          </a:p>
+        </p:txBody>
+      </p:sp>
+      <p:sp>
+        <p:nvSpPr>
+          <p:cNvPr id="17" name="TextBox 16"/>
+          <p:cNvSpPr txBox="1"/>
+          <p:nvPr/>
+        </p:nvSpPr>
+        <p:spPr>
+          <a:xfrm>
+            <a:off x="8403336" y="3383280"/>
+            <a:ext cx="2971800" cy="1280160"/>
+          </a:xfrm>
+          <a:prstGeom prst="rect">
+            <a:avLst/>
+          </a:prstGeom>
+          <a:noFill/>
+        </p:spPr>
+        <p:txBody>
+          <a:bodyPr wrap="square" lIns="18288" rIns="18288" tIns="18288" bIns="0">
+            <a:spAutoFit/>
+          </a:bodyPr>
+          <a:lstStyle/>
+          <a:p>
+            <a:pPr>
+              <a:spcAft>
+                <a:spcPts val="500"/>
+              </a:spcAft>
+              <a:defRPr sz="1900" b="0">
+                <a:solidFill>
+                  <a:srgbClr val="647282"/>
+                </a:solidFill>
+                <a:latin typeface="Liberation Sans"/>
+              </a:defRPr>
+            </a:pPr>
+            <a:r>
+              <a:t>SubGroup affinity / anti-affinity</a:t>
+            </a:r>
+          </a:p>
+          <a:p>
+            <a:pPr>
+              <a:spcAft>
+                <a:spcPts val="500"/>
+              </a:spcAft>
+              <a:defRPr sz="1900" b="0">
+                <a:solidFill>
+                  <a:srgbClr val="647282"/>
+                </a:solidFill>
+                <a:latin typeface="Liberation Sans"/>
+              </a:defRPr>
+            </a:pPr>
+            <a:r>
+              <a:t>Within the same PodGroup</a:t>
+            </a:r>
+          </a:p>
+        </p:txBody>
+      </p:sp>
+      <p:sp>
+        <p:nvSpPr>
+          <p:cNvPr id="18" name="TextBox 17"/>
+          <p:cNvSpPr txBox="1"/>
+          <p:nvPr/>
+        </p:nvSpPr>
+        <p:spPr>
+          <a:xfrm>
+            <a:off x="640080" y="5394960"/>
+            <a:ext cx="10881360" cy="320040"/>
+          </a:xfrm>
+          <a:prstGeom prst="rect">
+            <a:avLst/>
+          </a:prstGeom>
+          <a:noFill/>
+        </p:spPr>
+        <p:txBody>
+          <a:bodyPr wrap="square" lIns="18288" rIns="18288" tIns="18288" bIns="0">
+            <a:spAutoFit/>
+          </a:bodyPr>
+          <a:lstStyle/>
+          <a:p>
+            <a:pPr>
+              <a:spcAft>
+                <a:spcPts val="500"/>
+              </a:spcAft>
+              <a:defRPr sz="1800" b="1">
+                <a:solidFill>
+                  <a:srgbClr val="356696"/>
+                </a:solidFill>
+                <a:latin typeface="Liberation Sans"/>
+              </a:defRPr>
+            </a:pPr>
+            <a:r>
+              <a:t>As integrations grow, we need repeatable ways to evaluate scheduling behavior.</a:t>
             </a:r>
           </a:p>
         </p:txBody>
@@ -9245,7 +9352,7 @@
               </a:defRPr>
             </a:pPr>
             <a:r>
-              <a:t>03 / ECOSYSTEM PROGRESS</a:t>
+              <a:t>04 / BENCHMARK FRAMEWORK AND PROGRESS</a:t>
             </a:r>
           </a:p>
         </p:txBody>
@@ -9284,7 +9391,7 @@
               </a:defRPr>
             </a:pPr>
             <a:r>
-              <a:t>HyperNode Beyond a Single Scheduler</a:t>
+              <a:t>A Repeatable Scheduling Benchmark Framework</a:t>
             </a:r>
           </a:p>
         </p:txBody>
@@ -9367,7 +9474,7 @@
               </a:defRPr>
             </a:pPr>
             <a:r>
-              <a:t>复用：China 19。独立 controller 更新为已交付；外部 scheduler adapter 单独标状态。</a:t>
+              <a:t>基于仓库 benchmark/。框架能力与具体测试结果分开；KWOK 不模拟真实 GPU 计算和网络性能。</a:t>
             </a:r>
           </a:p>
         </p:txBody>
@@ -9406,7 +9513,7 @@
               </a:defRPr>
             </a:pPr>
             <a:r>
-              <a:t>VOLCANO  /  KUBECON NA 2026  /  WORKING DRAFT  •  1:00</a:t>
+              <a:t>VOLCANO  /  KUBECON NA 2026  /  WORKING DRAFT  •  1:30</a:t>
             </a:r>
           </a:p>
         </p:txBody>
@@ -9459,7 +9566,7 @@
         <p:spPr>
           <a:xfrm>
             <a:off x="576072" y="1783080"/>
-            <a:ext cx="3931920" cy="731520"/>
+            <a:ext cx="3931920" cy="384048"/>
           </a:xfrm>
           <a:prstGeom prst="rect">
             <a:avLst/>
@@ -9484,23 +9591,7 @@
               </a:defRPr>
             </a:pPr>
             <a:r>
-              <a:t>Standalone discovery and</a:t>
-            </a:r>
-          </a:p>
-          <a:p>
-            <a:pPr>
-              <a:spcAft>
-                <a:spcPts val="500"/>
-              </a:spcAft>
-              <a:defRPr sz="2000" b="1">
-                <a:solidFill>
-                  <a:srgbClr val="202D3C"/>
-                </a:solidFill>
-                <a:latin typeface="Liberation Sans"/>
-              </a:defRPr>
-            </a:pPr>
-            <a:r>
-              <a:t>controller</a:t>
+              <a:t>Choose an environment</a:t>
             </a:r>
           </a:p>
         </p:txBody>
@@ -9513,7 +9604,7 @@
         </p:nvSpPr>
         <p:spPr>
           <a:xfrm>
-            <a:off x="576072" y="2569464"/>
+            <a:off x="576072" y="2221992"/>
             <a:ext cx="3931920" cy="704088"/>
           </a:xfrm>
           <a:prstGeom prst="rect">
@@ -9539,7 +9630,7 @@
               </a:defRPr>
             </a:pPr>
             <a:r>
-              <a:t>Topology can be maintained as a reusable component.</a:t>
+              <a:t>Kind + KWOK, or an existing Kubernetes cluster.</a:t>
             </a:r>
           </a:p>
         </p:txBody>
@@ -9578,7 +9669,7 @@
               </a:defRPr>
             </a:pPr>
             <a:r>
-              <a:t>A shared topology API</a:t>
+              <a:t>Choose a workload profile</a:t>
             </a:r>
           </a:p>
         </p:txBody>
@@ -9617,7 +9708,7 @@
               </a:defRPr>
             </a:pPr>
             <a:r>
-              <a:t>Consumers read the HyperNode model.</a:t>
+              <a:t>Gang jobs, bare Pods, and topology configurations.</a:t>
             </a:r>
           </a:p>
         </p:txBody>
@@ -9656,7 +9747,7 @@
               </a:defRPr>
             </a:pPr>
             <a:r>
-              <a:t>Adapters remain separate work</a:t>
+              <a:t>Collect observations</a:t>
             </a:r>
           </a:p>
         </p:txBody>
@@ -9695,7 +9786,7 @@
               </a:defRPr>
             </a:pPr>
             <a:r>
-              <a:t>API availability does not imply every scheduler is integrated.</a:t>
+              <a:t>Audit events, scheduler metrics, dashboards, and reports.</a:t>
             </a:r>
           </a:p>
         </p:txBody>
@@ -9778,7 +9869,7 @@
               </a:defRPr>
             </a:pPr>
             <a:r>
-              <a:t>EDITABLE DIAGRAM DRAFT</a:t>
+              <a:t>EXISTING FRAMEWORK — EDITABLE OVERVIEW</a:t>
             </a:r>
           </a:p>
         </p:txBody>
@@ -9791,8 +9882,8 @@
         </p:nvSpPr>
         <p:spPr>
           <a:xfrm>
-            <a:off x="5760720" y="2304288"/>
-            <a:ext cx="4892040" cy="640080"/>
+            <a:off x="5257800" y="2240280"/>
+            <a:ext cx="5943600" cy="640080"/>
           </a:xfrm>
           <a:prstGeom prst="roundRect">
             <a:avLst>
@@ -9828,7 +9919,7 @@
           <a:lstStyle/>
           <a:p>
             <a:pPr algn="ctr">
-              <a:defRPr sz="1700">
+              <a:defRPr sz="1800">
                 <a:solidFill>
                   <a:srgbClr val="202D3C"/>
                 </a:solidFill>
@@ -9836,7 +9927,7 @@
               </a:defRPr>
             </a:pPr>
             <a:r>
-              <a:t>Discovery / standalone controller</a:t>
+              <a:t>Environment + scheduler configuration</a:t>
             </a:r>
           </a:p>
         </p:txBody>
@@ -9849,8 +9940,8 @@
         </p:nvCxnSpPr>
         <p:spPr>
           <a:xfrm>
-            <a:off x="8202168" y="2944368"/>
-            <a:ext cx="0" cy="502920"/>
+            <a:off x="8229600" y="2880360"/>
+            <a:ext cx="0" cy="457200"/>
           </a:xfrm>
           <a:prstGeom prst="line">
             <a:avLst/>
@@ -9884,8 +9975,8 @@
         </p:nvSpPr>
         <p:spPr>
           <a:xfrm>
-            <a:off x="5760720" y="3447288"/>
-            <a:ext cx="4892040" cy="640080"/>
+            <a:off x="5257800" y="3337560"/>
+            <a:ext cx="5943600" cy="640080"/>
           </a:xfrm>
           <a:prstGeom prst="roundRect">
             <a:avLst>
@@ -9921,7 +10012,7 @@
           <a:lstStyle/>
           <a:p>
             <a:pPr algn="ctr">
-              <a:defRPr sz="1700">
+              <a:defRPr sz="1800">
                 <a:solidFill>
                   <a:srgbClr val="202D3C"/>
                 </a:solidFill>
@@ -9929,7 +10020,7 @@
               </a:defRPr>
             </a:pPr>
             <a:r>
-              <a:t>HyperNode API</a:t>
+              <a:t>Gang / Pod workload profiles</a:t>
             </a:r>
           </a:p>
         </p:txBody>
@@ -9941,9 +10032,9 @@
           <p:nvPr/>
         </p:nvCxnSpPr>
         <p:spPr>
-          <a:xfrm flipH="1">
-            <a:off x="6601968" y="4087368"/>
-            <a:ext cx="1600200" cy="512064"/>
+          <a:xfrm>
+            <a:off x="8229600" y="3977639"/>
+            <a:ext cx="0" cy="457201"/>
           </a:xfrm>
           <a:prstGeom prst="line">
             <a:avLst/>
@@ -9969,51 +10060,16 @@
           </a:fontRef>
         </p:style>
       </p:cxnSp>
-      <p:cxnSp>
-        <p:nvCxnSpPr>
-          <p:cNvPr id="21" name="Connector 20"/>
-          <p:cNvCxnSpPr/>
-          <p:nvPr/>
-        </p:nvCxnSpPr>
-        <p:spPr>
-          <a:xfrm>
-            <a:off x="8202168" y="4087368"/>
-            <a:ext cx="1691640" cy="512064"/>
-          </a:xfrm>
-          <a:prstGeom prst="line">
-            <a:avLst/>
-          </a:prstGeom>
-          <a:ln w="19050">
-            <a:solidFill>
-              <a:srgbClr val="8EA8CB"/>
-            </a:solidFill>
-          </a:ln>
-        </p:spPr>
-        <p:style>
-          <a:lnRef idx="2">
-            <a:schemeClr val="accent1"/>
-          </a:lnRef>
-          <a:fillRef idx="0">
-            <a:schemeClr val="accent1"/>
-          </a:fillRef>
-          <a:effectRef idx="0">
-            <a:schemeClr val="accent1"/>
-          </a:effectRef>
-          <a:fontRef idx="minor">
-            <a:schemeClr val="tx1"/>
-          </a:fontRef>
-        </p:style>
-      </p:cxnSp>
-      <p:sp>
-        <p:nvSpPr>
-          <p:cNvPr id="22" name="Rounded Rectangle 21"/>
+      <p:sp>
+        <p:nvSpPr>
+          <p:cNvPr id="21" name="Rounded Rectangle 20"/>
           <p:cNvSpPr/>
           <p:nvPr/>
         </p:nvSpPr>
         <p:spPr>
           <a:xfrm>
-            <a:off x="5212080" y="4599432"/>
-            <a:ext cx="2761488" cy="548640"/>
+            <a:off x="5257800" y="4434840"/>
+            <a:ext cx="5943600" cy="640080"/>
           </a:xfrm>
           <a:prstGeom prst="roundRect">
             <a:avLst>
@@ -10049,7 +10105,7 @@
           <a:lstStyle/>
           <a:p>
             <a:pPr algn="ctr">
-              <a:defRPr sz="1700">
+              <a:defRPr sz="1800">
                 <a:solidFill>
                   <a:srgbClr val="202D3C"/>
                 </a:solidFill>
@@ -10057,104 +10113,7 @@
               </a:defRPr>
             </a:pPr>
             <a:r>
-              <a:t>Volcano</a:t>
-            </a:r>
-          </a:p>
-        </p:txBody>
-      </p:sp>
-      <p:sp>
-        <p:nvSpPr>
-          <p:cNvPr id="23" name="Rounded Rectangle 22"/>
-          <p:cNvSpPr/>
-          <p:nvPr/>
-        </p:nvSpPr>
-        <p:spPr>
-          <a:xfrm>
-            <a:off x="8522208" y="4599432"/>
-            <a:ext cx="2761488" cy="548640"/>
-          </a:xfrm>
-          <a:prstGeom prst="roundRect">
-            <a:avLst>
-              <a:gd name="adj" fmla="val 8000"/>
-            </a:avLst>
-          </a:prstGeom>
-          <a:solidFill>
-            <a:srgbClr val="FFFFFF"/>
-          </a:solidFill>
-          <a:ln w="12700">
-            <a:solidFill>
-              <a:srgbClr val="8EA8CB"/>
-            </a:solidFill>
-          </a:ln>
-          <a:effectLst/>
-        </p:spPr>
-        <p:style>
-          <a:lnRef idx="1">
-            <a:schemeClr val="accent1"/>
-          </a:lnRef>
-          <a:fillRef idx="3">
-            <a:schemeClr val="accent1"/>
-          </a:fillRef>
-          <a:effectRef idx="0">
-            <a:schemeClr val="accent1"/>
-          </a:effectRef>
-          <a:fontRef idx="minor">
-            <a:schemeClr val="lt1"/>
-          </a:fontRef>
-        </p:style>
-        <p:txBody>
-          <a:bodyPr rtlCol="0" anchor="ctr" wrap="square" lIns="109728" rIns="109728"/>
-          <a:lstStyle/>
-          <a:p>
-            <a:pPr algn="ctr">
-              <a:defRPr sz="1700">
-                <a:solidFill>
-                  <a:srgbClr val="202D3C"/>
-                </a:solidFill>
-                <a:latin typeface="Liberation Sans"/>
-              </a:defRPr>
-            </a:pPr>
-            <a:r>
-              <a:t>Other consumers*</a:t>
-            </a:r>
-          </a:p>
-        </p:txBody>
-      </p:sp>
-      <p:sp>
-        <p:nvSpPr>
-          <p:cNvPr id="24" name="TextBox 23"/>
-          <p:cNvSpPr txBox="1"/>
-          <p:nvPr/>
-        </p:nvSpPr>
-        <p:spPr>
-          <a:xfrm>
-            <a:off x="5486400" y="5285232"/>
-            <a:ext cx="5623560" cy="210312"/>
-          </a:xfrm>
-          <a:prstGeom prst="rect">
-            <a:avLst/>
-          </a:prstGeom>
-          <a:noFill/>
-        </p:spPr>
-        <p:txBody>
-          <a:bodyPr wrap="square" lIns="18288" rIns="18288" tIns="18288" bIns="0">
-            <a:spAutoFit/>
-          </a:bodyPr>
-          <a:lstStyle/>
-          <a:p>
-            <a:pPr>
-              <a:spcAft>
-                <a:spcPts val="500"/>
-              </a:spcAft>
-              <a:defRPr sz="1100" b="0">
-                <a:solidFill>
-                  <a:srgbClr val="647282"/>
-                </a:solidFill>
-                <a:latin typeface="Liberation Mono"/>
-              </a:defRPr>
-            </a:pPr>
-            <a:r>
-              <a:t>*Scheduler adapters: planned / separate integrations</a:t>
+              <a:t>Audit + Prometheus / Grafana + reports</a:t>
             </a:r>
           </a:p>
         </p:txBody>
@@ -10263,7 +10222,7 @@
               </a:defRPr>
             </a:pPr>
             <a:r>
-              <a:t>04 / WHAT COMES NEXT</a:t>
+              <a:t>04 / BENCHMARK FRAMEWORK AND PROGRESS</a:t>
             </a:r>
           </a:p>
         </p:txBody>
@@ -10302,7 +10261,7 @@
               </a:defRPr>
             </a:pPr>
             <a:r>
-              <a:t>Next: Relationships Between SubGroups</a:t>
+              <a:t>Progress So Far—and What We Are Still Testing</a:t>
             </a:r>
           </a:p>
         </p:txBody>
@@ -10385,7 +10344,7 @@
               </a:defRPr>
             </a:pPr>
             <a:r>
-              <a:t>未来方向：同一 PodGroup 内的 SubGroup 关系。以下只说明需求，不代表已发布字段。</a:t>
+              <a:t>进展页：左侧是已核查的框架能力；右侧是待讲者确认的测试重点，不写成已完成结果。</a:t>
             </a:r>
           </a:p>
         </p:txBody>
@@ -10424,7 +10383,7 @@
               </a:defRPr>
             </a:pPr>
             <a:r>
-              <a:t>VOLCANO  /  KUBECON NA 2026  /  WORKING DRAFT  •  2:00</a:t>
+              <a:t>VOLCANO  /  KUBECON NA 2026  /  WORKING DRAFT  •  1:30</a:t>
             </a:r>
           </a:p>
         </p:txBody>
@@ -10476,185 +10435,8 @@
         </p:nvSpPr>
         <p:spPr>
           <a:xfrm>
-            <a:off x="594360" y="1719072"/>
-            <a:ext cx="1508760" cy="292608"/>
-          </a:xfrm>
-          <a:prstGeom prst="rect">
-            <a:avLst/>
-          </a:prstGeom>
-          <a:solidFill>
-            <a:srgbClr val="F2EDF8"/>
-          </a:solidFill>
-          <a:ln>
-            <a:noFill/>
-          </a:ln>
-          <a:effectLst/>
-        </p:spPr>
-        <p:style>
-          <a:lnRef idx="1">
-            <a:schemeClr val="accent1"/>
-          </a:lnRef>
-          <a:fillRef idx="3">
-            <a:schemeClr val="accent1"/>
-          </a:fillRef>
-          <a:effectRef idx="0">
-            <a:schemeClr val="accent1"/>
-          </a:effectRef>
-          <a:fontRef idx="minor">
-            <a:schemeClr val="lt1"/>
-          </a:fontRef>
-        </p:style>
-        <p:txBody>
-          <a:bodyPr rtlCol="0" anchor="ctr"/>
-          <a:lstStyle/>
-          <a:p>
-            <a:pPr algn="ctr"/>
-          </a:p>
-        </p:txBody>
-      </p:sp>
-      <p:sp>
-        <p:nvSpPr>
-          <p:cNvPr id="10" name="TextBox 9"/>
-          <p:cNvSpPr txBox="1"/>
-          <p:nvPr/>
-        </p:nvSpPr>
-        <p:spPr>
-          <a:xfrm>
-            <a:off x="658368" y="1746504"/>
-            <a:ext cx="1417319" cy="219456"/>
-          </a:xfrm>
-          <a:prstGeom prst="rect">
-            <a:avLst/>
-          </a:prstGeom>
-          <a:noFill/>
-        </p:spPr>
-        <p:txBody>
-          <a:bodyPr wrap="square" lIns="18288" rIns="18288" tIns="18288" bIns="0">
-            <a:spAutoFit/>
-          </a:bodyPr>
-          <a:lstStyle/>
-          <a:p>
-            <a:pPr>
-              <a:spcAft>
-                <a:spcPts val="500"/>
-              </a:spcAft>
-              <a:defRPr sz="1000" b="1">
-                <a:solidFill>
-                  <a:srgbClr val="765399"/>
-                </a:solidFill>
-                <a:latin typeface="Liberation Sans"/>
-              </a:defRPr>
-            </a:pPr>
-            <a:r>
-              <a:t>PROPOSED</a:t>
-            </a:r>
-          </a:p>
-        </p:txBody>
-      </p:sp>
-      <p:sp>
-        <p:nvSpPr>
-          <p:cNvPr id="11" name="TextBox 10"/>
-          <p:cNvSpPr txBox="1"/>
-          <p:nvPr/>
-        </p:nvSpPr>
-        <p:spPr>
-          <a:xfrm>
-            <a:off x="594360" y="2304288"/>
-            <a:ext cx="3840480" cy="969264"/>
-          </a:xfrm>
-          <a:prstGeom prst="rect">
-            <a:avLst/>
-          </a:prstGeom>
-          <a:noFill/>
-        </p:spPr>
-        <p:txBody>
-          <a:bodyPr wrap="square" lIns="18288" rIns="18288" tIns="18288" bIns="0">
-            <a:spAutoFit/>
-          </a:bodyPr>
-          <a:lstStyle/>
-          <a:p>
-            <a:pPr>
-              <a:spcAft>
-                <a:spcPts val="500"/>
-              </a:spcAft>
-              <a:defRPr sz="2600" b="1">
-                <a:solidFill>
-                  <a:srgbClr val="202D3C"/>
-                </a:solidFill>
-                <a:latin typeface="Liberation Sans"/>
-              </a:defRPr>
-            </a:pPr>
-            <a:r>
-              <a:t>Beyond a boundary</a:t>
-            </a:r>
-          </a:p>
-          <a:p>
-            <a:pPr>
-              <a:spcAft>
-                <a:spcPts val="500"/>
-              </a:spcAft>
-              <a:defRPr sz="2600" b="1">
-                <a:solidFill>
-                  <a:srgbClr val="202D3C"/>
-                </a:solidFill>
-                <a:latin typeface="Liberation Sans"/>
-              </a:defRPr>
-            </a:pPr>
-            <a:r>
-              <a:t>for each group.</a:t>
-            </a:r>
-          </a:p>
-        </p:txBody>
-      </p:sp>
-      <p:sp>
-        <p:nvSpPr>
-          <p:cNvPr id="12" name="TextBox 11"/>
-          <p:cNvSpPr txBox="1"/>
-          <p:nvPr/>
-        </p:nvSpPr>
-        <p:spPr>
-          <a:xfrm>
-            <a:off x="594360" y="3547872"/>
-            <a:ext cx="3840480" cy="1554480"/>
-          </a:xfrm>
-          <a:prstGeom prst="rect">
-            <a:avLst/>
-          </a:prstGeom>
-          <a:noFill/>
-        </p:spPr>
-        <p:txBody>
-          <a:bodyPr wrap="square" lIns="18288" rIns="18288" tIns="18288" bIns="0">
-            <a:spAutoFit/>
-          </a:bodyPr>
-          <a:lstStyle/>
-          <a:p>
-            <a:pPr>
-              <a:spcAft>
-                <a:spcPts val="500"/>
-              </a:spcAft>
-              <a:defRPr sz="2100" b="0">
-                <a:solidFill>
-                  <a:srgbClr val="647282"/>
-                </a:solidFill>
-                <a:latin typeface="Liberation Sans"/>
-              </a:defRPr>
-            </a:pPr>
-            <a:r>
-              <a:t>Express which SubGroups should be near each other, and which should be spread across domains.</a:t>
-            </a:r>
-          </a:p>
-        </p:txBody>
-      </p:sp>
-      <p:sp>
-        <p:nvSpPr>
-          <p:cNvPr id="13" name="Rectangle 12"/>
-          <p:cNvSpPr/>
-          <p:nvPr/>
-        </p:nvSpPr>
-        <p:spPr>
-          <a:xfrm>
-            <a:off x="4846320" y="1691640"/>
-            <a:ext cx="6812280" cy="3858768"/>
+            <a:off x="594360" y="1810512"/>
+            <a:ext cx="5349240" cy="3730752"/>
           </a:xfrm>
           <a:prstGeom prst="rect">
             <a:avLst/>
@@ -10691,144 +10473,23 @@
       </p:sp>
       <p:sp>
         <p:nvSpPr>
-          <p:cNvPr id="14" name="TextBox 13"/>
-          <p:cNvSpPr txBox="1"/>
-          <p:nvPr/>
-        </p:nvSpPr>
-        <p:spPr>
-          <a:xfrm>
-            <a:off x="5010912" y="1819656"/>
-            <a:ext cx="6483096" cy="246888"/>
-          </a:xfrm>
-          <a:prstGeom prst="rect">
-            <a:avLst/>
-          </a:prstGeom>
-          <a:noFill/>
-        </p:spPr>
-        <p:txBody>
-          <a:bodyPr wrap="square" lIns="18288" rIns="18288" tIns="18288" bIns="0">
-            <a:spAutoFit/>
-          </a:bodyPr>
-          <a:lstStyle/>
-          <a:p>
-            <a:pPr>
-              <a:spcAft>
-                <a:spcPts val="500"/>
-              </a:spcAft>
-              <a:defRPr sz="1000" b="0">
-                <a:solidFill>
-                  <a:srgbClr val="647282"/>
-                </a:solidFill>
-                <a:latin typeface="Liberation Mono"/>
-              </a:defRPr>
-            </a:pPr>
-            <a:r>
-              <a:t>SAME PODGROUP — TWO SEPARATE SCENARIOS</a:t>
-            </a:r>
-          </a:p>
-        </p:txBody>
-      </p:sp>
-      <p:sp>
-        <p:nvSpPr>
-          <p:cNvPr id="15" name="TextBox 14"/>
-          <p:cNvSpPr txBox="1"/>
-          <p:nvPr/>
-        </p:nvSpPr>
-        <p:spPr>
-          <a:xfrm>
-            <a:off x="5175504" y="2267712"/>
-            <a:ext cx="6080760" cy="301752"/>
-          </a:xfrm>
-          <a:prstGeom prst="rect">
-            <a:avLst/>
-          </a:prstGeom>
-          <a:noFill/>
-        </p:spPr>
-        <p:txBody>
-          <a:bodyPr wrap="square" lIns="18288" rIns="18288" tIns="18288" bIns="0">
-            <a:spAutoFit/>
-          </a:bodyPr>
-          <a:lstStyle/>
-          <a:p>
-            <a:pPr>
-              <a:spcAft>
-                <a:spcPts val="500"/>
-              </a:spcAft>
-              <a:defRPr sz="1400" b="1">
-                <a:solidFill>
-                  <a:srgbClr val="765399"/>
-                </a:solidFill>
-                <a:latin typeface="Liberation Sans"/>
-              </a:defRPr>
-            </a:pPr>
-            <a:r>
-              <a:t>AFFINITY: share a target domain</a:t>
-            </a:r>
-          </a:p>
-        </p:txBody>
-      </p:sp>
-      <p:sp>
-        <p:nvSpPr>
-          <p:cNvPr id="16" name="TextBox 15"/>
-          <p:cNvSpPr txBox="1"/>
-          <p:nvPr/>
-        </p:nvSpPr>
-        <p:spPr>
-          <a:xfrm>
-            <a:off x="5175504" y="3886200"/>
-            <a:ext cx="6080760" cy="301752"/>
-          </a:xfrm>
-          <a:prstGeom prst="rect">
-            <a:avLst/>
-          </a:prstGeom>
-          <a:noFill/>
-        </p:spPr>
-        <p:txBody>
-          <a:bodyPr wrap="square" lIns="18288" rIns="18288" tIns="18288" bIns="0">
-            <a:spAutoFit/>
-          </a:bodyPr>
-          <a:lstStyle/>
-          <a:p>
-            <a:pPr>
-              <a:spcAft>
-                <a:spcPts val="500"/>
-              </a:spcAft>
-              <a:defRPr sz="1400" b="1">
-                <a:solidFill>
-                  <a:srgbClr val="765399"/>
-                </a:solidFill>
-                <a:latin typeface="Liberation Sans"/>
-              </a:defRPr>
-            </a:pPr>
-            <a:r>
-              <a:t>ANTI-AFFINITY: use different domains</a:t>
-            </a:r>
-          </a:p>
-        </p:txBody>
-      </p:sp>
-      <p:sp>
-        <p:nvSpPr>
-          <p:cNvPr id="17" name="Rounded Rectangle 16"/>
+          <p:cNvPr id="10" name="Rectangle 9"/>
           <p:cNvSpPr/>
           <p:nvPr/>
         </p:nvSpPr>
         <p:spPr>
           <a:xfrm>
-            <a:off x="5257800" y="2743200"/>
-            <a:ext cx="5852160" cy="804672"/>
-          </a:xfrm>
-          <a:prstGeom prst="roundRect">
-            <a:avLst>
-              <a:gd name="adj" fmla="val 8000"/>
-            </a:avLst>
+            <a:off x="6236208" y="1810512"/>
+            <a:ext cx="5349240" cy="3730752"/>
+          </a:xfrm>
+          <a:prstGeom prst="rect">
+            <a:avLst/>
           </a:prstGeom>
           <a:solidFill>
-            <a:srgbClr val="F2EDF8"/>
+            <a:srgbClr val="FFF4D8"/>
           </a:solidFill>
-          <a:ln w="12700">
-            <a:solidFill>
-              <a:srgbClr val="8EA8CB"/>
-            </a:solidFill>
+          <a:ln>
+            <a:noFill/>
           </a:ln>
           <a:effectLst/>
         </p:spPr>
@@ -10856,27 +10517,23 @@
       </p:sp>
       <p:sp>
         <p:nvSpPr>
-          <p:cNvPr id="18" name="Rounded Rectangle 17"/>
+          <p:cNvPr id="11" name="Rectangle 10"/>
           <p:cNvSpPr/>
           <p:nvPr/>
         </p:nvSpPr>
         <p:spPr>
           <a:xfrm>
-            <a:off x="5486400" y="2907792"/>
-            <a:ext cx="2286000" cy="438912"/>
-          </a:xfrm>
-          <a:prstGeom prst="roundRect">
-            <a:avLst>
-              <a:gd name="adj" fmla="val 8000"/>
-            </a:avLst>
+            <a:off x="804672" y="2011680"/>
+            <a:ext cx="2103120" cy="292608"/>
+          </a:xfrm>
+          <a:prstGeom prst="rect">
+            <a:avLst/>
           </a:prstGeom>
           <a:solidFill>
-            <a:srgbClr val="FFFFFF"/>
+            <a:srgbClr val="EDF5F1"/>
           </a:solidFill>
-          <a:ln w="12700">
-            <a:solidFill>
-              <a:srgbClr val="8EA8CB"/>
-            </a:solidFill>
+          <a:ln>
+            <a:noFill/>
           </a:ln>
           <a:effectLst/>
         </p:spPr>
@@ -10895,46 +10552,71 @@
           </a:fontRef>
         </p:style>
         <p:txBody>
-          <a:bodyPr rtlCol="0" anchor="ctr" wrap="square" lIns="109728" rIns="109728"/>
-          <a:lstStyle/>
-          <a:p>
-            <a:pPr algn="ctr">
-              <a:defRPr sz="1400">
-                <a:solidFill>
-                  <a:srgbClr val="202D3C"/>
-                </a:solidFill>
-                <a:latin typeface="Liberation Sans"/>
-              </a:defRPr>
-            </a:pPr>
-            <a:r>
-              <a:t>SubGroup A</a:t>
-            </a:r>
-          </a:p>
-        </p:txBody>
-      </p:sp>
-      <p:sp>
-        <p:nvSpPr>
-          <p:cNvPr id="19" name="Rounded Rectangle 18"/>
+          <a:bodyPr rtlCol="0" anchor="ctr"/>
+          <a:lstStyle/>
+          <a:p>
+            <a:pPr algn="ctr"/>
+          </a:p>
+        </p:txBody>
+      </p:sp>
+      <p:sp>
+        <p:nvSpPr>
+          <p:cNvPr id="12" name="TextBox 11"/>
+          <p:cNvSpPr txBox="1"/>
+          <p:nvPr/>
+        </p:nvSpPr>
+        <p:spPr>
+          <a:xfrm>
+            <a:off x="868680" y="2039112"/>
+            <a:ext cx="2011679" cy="219456"/>
+          </a:xfrm>
+          <a:prstGeom prst="rect">
+            <a:avLst/>
+          </a:prstGeom>
+          <a:noFill/>
+        </p:spPr>
+        <p:txBody>
+          <a:bodyPr wrap="square" lIns="18288" rIns="18288" tIns="18288" bIns="0">
+            <a:spAutoFit/>
+          </a:bodyPr>
+          <a:lstStyle/>
+          <a:p>
+            <a:pPr>
+              <a:spcAft>
+                <a:spcPts val="500"/>
+              </a:spcAft>
+              <a:defRPr sz="1000" b="1">
+                <a:solidFill>
+                  <a:srgbClr val="386C5A"/>
+                </a:solidFill>
+                <a:latin typeface="Liberation Sans"/>
+              </a:defRPr>
+            </a:pPr>
+            <a:r>
+              <a:t>IN THE FRAMEWORK</a:t>
+            </a:r>
+          </a:p>
+        </p:txBody>
+      </p:sp>
+      <p:sp>
+        <p:nvSpPr>
+          <p:cNvPr id="13" name="Rectangle 12"/>
           <p:cNvSpPr/>
           <p:nvPr/>
         </p:nvSpPr>
         <p:spPr>
           <a:xfrm>
-            <a:off x="8595360" y="2907792"/>
-            <a:ext cx="2286000" cy="438912"/>
-          </a:xfrm>
-          <a:prstGeom prst="roundRect">
-            <a:avLst>
-              <a:gd name="adj" fmla="val 8000"/>
-            </a:avLst>
+            <a:off x="6446520" y="2011680"/>
+            <a:ext cx="2816352" cy="292608"/>
+          </a:xfrm>
+          <a:prstGeom prst="rect">
+            <a:avLst/>
           </a:prstGeom>
           <a:solidFill>
-            <a:srgbClr val="FFFFFF"/>
+            <a:srgbClr val="FFF4D8"/>
           </a:solidFill>
-          <a:ln w="12700">
-            <a:solidFill>
-              <a:srgbClr val="8EA8CB"/>
-            </a:solidFill>
+          <a:ln>
+            <a:noFill/>
           </a:ln>
           <a:effectLst/>
         </p:spPr>
@@ -10953,11 +10635,79 @@
           </a:fontRef>
         </p:style>
         <p:txBody>
-          <a:bodyPr rtlCol="0" anchor="ctr" wrap="square" lIns="109728" rIns="109728"/>
-          <a:lstStyle/>
-          <a:p>
-            <a:pPr algn="ctr">
-              <a:defRPr sz="1400">
+          <a:bodyPr rtlCol="0" anchor="ctr"/>
+          <a:lstStyle/>
+          <a:p>
+            <a:pPr algn="ctr"/>
+          </a:p>
+        </p:txBody>
+      </p:sp>
+      <p:sp>
+        <p:nvSpPr>
+          <p:cNvPr id="14" name="TextBox 13"/>
+          <p:cNvSpPr txBox="1"/>
+          <p:nvPr/>
+        </p:nvSpPr>
+        <p:spPr>
+          <a:xfrm>
+            <a:off x="6510528" y="2039112"/>
+            <a:ext cx="2724912" cy="219456"/>
+          </a:xfrm>
+          <a:prstGeom prst="rect">
+            <a:avLst/>
+          </a:prstGeom>
+          <a:noFill/>
+        </p:spPr>
+        <p:txBody>
+          <a:bodyPr wrap="square" lIns="18288" rIns="18288" tIns="18288" bIns="0">
+            <a:spAutoFit/>
+          </a:bodyPr>
+          <a:lstStyle/>
+          <a:p>
+            <a:pPr>
+              <a:spcAft>
+                <a:spcPts val="500"/>
+              </a:spcAft>
+              <a:defRPr sz="1000" b="1">
+                <a:solidFill>
+                  <a:srgbClr val="8B621C"/>
+                </a:solidFill>
+                <a:latin typeface="Liberation Sans"/>
+              </a:defRPr>
+            </a:pPr>
+            <a:r>
+              <a:t>VALIDATION IN PROGRESS</a:t>
+            </a:r>
+          </a:p>
+        </p:txBody>
+      </p:sp>
+      <p:sp>
+        <p:nvSpPr>
+          <p:cNvPr id="15" name="TextBox 14"/>
+          <p:cNvSpPr txBox="1"/>
+          <p:nvPr/>
+        </p:nvSpPr>
+        <p:spPr>
+          <a:xfrm>
+            <a:off x="822960" y="2670048"/>
+            <a:ext cx="4864608" cy="356616"/>
+          </a:xfrm>
+          <a:prstGeom prst="rect">
+            <a:avLst/>
+          </a:prstGeom>
+          <a:noFill/>
+        </p:spPr>
+        <p:txBody>
+          <a:bodyPr wrap="square" lIns="18288" rIns="18288" tIns="18288" bIns="0">
+            <a:spAutoFit/>
+          </a:bodyPr>
+          <a:lstStyle/>
+          <a:p>
+            <a:pPr>
+              <a:spcAft>
+                <a:spcPts val="500"/>
+              </a:spcAft>
+              <a:defRPr sz="1900" b="1">
                 <a:solidFill>
                   <a:srgbClr val="202D3C"/>
                 </a:solidFill>
@@ -10965,105 +10715,77 @@
               </a:defRPr>
             </a:pPr>
             <a:r>
-              <a:t>SubGroup B</a:t>
-            </a:r>
-          </a:p>
-        </p:txBody>
-      </p:sp>
-      <p:sp>
-        <p:nvSpPr>
-          <p:cNvPr id="20" name="Rounded Rectangle 19"/>
-          <p:cNvSpPr/>
-          <p:nvPr/>
-        </p:nvSpPr>
-        <p:spPr>
-          <a:xfrm>
-            <a:off x="5257800" y="4389120"/>
-            <a:ext cx="2697480" cy="804672"/>
-          </a:xfrm>
-          <a:prstGeom prst="roundRect">
-            <a:avLst>
-              <a:gd name="adj" fmla="val 8000"/>
-            </a:avLst>
-          </a:prstGeom>
-          <a:solidFill>
-            <a:srgbClr val="F2EDF8"/>
-          </a:solidFill>
-          <a:ln w="12700">
-            <a:solidFill>
-              <a:srgbClr val="8EA8CB"/>
-            </a:solidFill>
-          </a:ln>
-          <a:effectLst/>
-        </p:spPr>
-        <p:style>
-          <a:lnRef idx="1">
-            <a:schemeClr val="accent1"/>
-          </a:lnRef>
-          <a:fillRef idx="3">
-            <a:schemeClr val="accent1"/>
-          </a:fillRef>
-          <a:effectRef idx="0">
-            <a:schemeClr val="accent1"/>
-          </a:effectRef>
-          <a:fontRef idx="minor">
-            <a:schemeClr val="lt1"/>
-          </a:fontRef>
-        </p:style>
-        <p:txBody>
-          <a:bodyPr rtlCol="0" anchor="ctr"/>
-          <a:lstStyle/>
-          <a:p>
-            <a:pPr algn="ctr"/>
-          </a:p>
-        </p:txBody>
-      </p:sp>
-      <p:sp>
-        <p:nvSpPr>
-          <p:cNvPr id="21" name="Rounded Rectangle 20"/>
-          <p:cNvSpPr/>
-          <p:nvPr/>
-        </p:nvSpPr>
-        <p:spPr>
-          <a:xfrm>
-            <a:off x="5440680" y="4553712"/>
-            <a:ext cx="2331720" cy="438912"/>
-          </a:xfrm>
-          <a:prstGeom prst="roundRect">
-            <a:avLst>
-              <a:gd name="adj" fmla="val 8000"/>
-            </a:avLst>
-          </a:prstGeom>
-          <a:solidFill>
-            <a:srgbClr val="FFFFFF"/>
-          </a:solidFill>
-          <a:ln w="12700">
-            <a:solidFill>
-              <a:srgbClr val="8EA8CB"/>
-            </a:solidFill>
-          </a:ln>
-          <a:effectLst/>
-        </p:spPr>
-        <p:style>
-          <a:lnRef idx="1">
-            <a:schemeClr val="accent1"/>
-          </a:lnRef>
-          <a:fillRef idx="3">
-            <a:schemeClr val="accent1"/>
-          </a:fillRef>
-          <a:effectRef idx="0">
-            <a:schemeClr val="accent1"/>
-          </a:effectRef>
-          <a:fontRef idx="minor">
-            <a:schemeClr val="lt1"/>
-          </a:fontRef>
-        </p:style>
-        <p:txBody>
-          <a:bodyPr rtlCol="0" anchor="ctr" wrap="square" lIns="109728" rIns="109728"/>
-          <a:lstStyle/>
-          <a:p>
-            <a:pPr algn="ctr">
-              <a:defRPr sz="1400">
+              <a:t>Configurable test scenarios</a:t>
+            </a:r>
+          </a:p>
+        </p:txBody>
+      </p:sp>
+      <p:sp>
+        <p:nvSpPr>
+          <p:cNvPr id="16" name="TextBox 15"/>
+          <p:cNvSpPr txBox="1"/>
+          <p:nvPr/>
+        </p:nvSpPr>
+        <p:spPr>
+          <a:xfrm>
+            <a:off x="822960" y="3090672"/>
+            <a:ext cx="4864608" cy="438912"/>
+          </a:xfrm>
+          <a:prstGeom prst="rect">
+            <a:avLst/>
+          </a:prstGeom>
+          <a:noFill/>
+        </p:spPr>
+        <p:txBody>
+          <a:bodyPr wrap="square" lIns="18288" rIns="18288" tIns="18288" bIns="0">
+            <a:spAutoFit/>
+          </a:bodyPr>
+          <a:lstStyle/>
+          <a:p>
+            <a:pPr>
+              <a:spcAft>
+                <a:spcPts val="500"/>
+              </a:spcAft>
+              <a:defRPr sz="1600" b="0">
+                <a:solidFill>
+                  <a:srgbClr val="647282"/>
+                </a:solidFill>
+                <a:latin typeface="Liberation Sans"/>
+              </a:defRPr>
+            </a:pPr>
+            <a:r>
+              <a:t>Gang / Pod profiles and topology setup</a:t>
+            </a:r>
+          </a:p>
+        </p:txBody>
+      </p:sp>
+      <p:sp>
+        <p:nvSpPr>
+          <p:cNvPr id="17" name="TextBox 16"/>
+          <p:cNvSpPr txBox="1"/>
+          <p:nvPr/>
+        </p:nvSpPr>
+        <p:spPr>
+          <a:xfrm>
+            <a:off x="822960" y="3593592"/>
+            <a:ext cx="4864608" cy="356616"/>
+          </a:xfrm>
+          <a:prstGeom prst="rect">
+            <a:avLst/>
+          </a:prstGeom>
+          <a:noFill/>
+        </p:spPr>
+        <p:txBody>
+          <a:bodyPr wrap="square" lIns="18288" rIns="18288" tIns="18288" bIns="0">
+            <a:spAutoFit/>
+          </a:bodyPr>
+          <a:lstStyle/>
+          <a:p>
+            <a:pPr>
+              <a:spcAft>
+                <a:spcPts val="500"/>
+              </a:spcAft>
+              <a:defRPr sz="1900" b="1">
                 <a:solidFill>
                   <a:srgbClr val="202D3C"/>
                 </a:solidFill>
@@ -11071,105 +10793,77 @@
               </a:defRPr>
             </a:pPr>
             <a:r>
-              <a:t>SubGroup A</a:t>
-            </a:r>
-          </a:p>
-        </p:txBody>
-      </p:sp>
-      <p:sp>
-        <p:nvSpPr>
-          <p:cNvPr id="22" name="Rounded Rectangle 21"/>
-          <p:cNvSpPr/>
-          <p:nvPr/>
-        </p:nvSpPr>
-        <p:spPr>
-          <a:xfrm>
-            <a:off x="8412480" y="4389120"/>
-            <a:ext cx="2697480" cy="804672"/>
-          </a:xfrm>
-          <a:prstGeom prst="roundRect">
-            <a:avLst>
-              <a:gd name="adj" fmla="val 8000"/>
-            </a:avLst>
-          </a:prstGeom>
-          <a:solidFill>
-            <a:srgbClr val="F2EDF8"/>
-          </a:solidFill>
-          <a:ln w="12700">
-            <a:solidFill>
-              <a:srgbClr val="8EA8CB"/>
-            </a:solidFill>
-          </a:ln>
-          <a:effectLst/>
-        </p:spPr>
-        <p:style>
-          <a:lnRef idx="1">
-            <a:schemeClr val="accent1"/>
-          </a:lnRef>
-          <a:fillRef idx="3">
-            <a:schemeClr val="accent1"/>
-          </a:fillRef>
-          <a:effectRef idx="0">
-            <a:schemeClr val="accent1"/>
-          </a:effectRef>
-          <a:fontRef idx="minor">
-            <a:schemeClr val="lt1"/>
-          </a:fontRef>
-        </p:style>
-        <p:txBody>
-          <a:bodyPr rtlCol="0" anchor="ctr"/>
-          <a:lstStyle/>
-          <a:p>
-            <a:pPr algn="ctr"/>
-          </a:p>
-        </p:txBody>
-      </p:sp>
-      <p:sp>
-        <p:nvSpPr>
-          <p:cNvPr id="23" name="Rounded Rectangle 22"/>
-          <p:cNvSpPr/>
-          <p:nvPr/>
-        </p:nvSpPr>
-        <p:spPr>
-          <a:xfrm>
-            <a:off x="8595359" y="4553712"/>
-            <a:ext cx="2331720" cy="438912"/>
-          </a:xfrm>
-          <a:prstGeom prst="roundRect">
-            <a:avLst>
-              <a:gd name="adj" fmla="val 8000"/>
-            </a:avLst>
-          </a:prstGeom>
-          <a:solidFill>
-            <a:srgbClr val="FFFFFF"/>
-          </a:solidFill>
-          <a:ln w="12700">
-            <a:solidFill>
-              <a:srgbClr val="8EA8CB"/>
-            </a:solidFill>
-          </a:ln>
-          <a:effectLst/>
-        </p:spPr>
-        <p:style>
-          <a:lnRef idx="1">
-            <a:schemeClr val="accent1"/>
-          </a:lnRef>
-          <a:fillRef idx="3">
-            <a:schemeClr val="accent1"/>
-          </a:fillRef>
-          <a:effectRef idx="0">
-            <a:schemeClr val="accent1"/>
-          </a:effectRef>
-          <a:fontRef idx="minor">
-            <a:schemeClr val="lt1"/>
-          </a:fontRef>
-        </p:style>
-        <p:txBody>
-          <a:bodyPr rtlCol="0" anchor="ctr" wrap="square" lIns="109728" rIns="109728"/>
-          <a:lstStyle/>
-          <a:p>
-            <a:pPr algn="ctr">
-              <a:defRPr sz="1400">
+              <a:t>Latency and throughput collection</a:t>
+            </a:r>
+          </a:p>
+        </p:txBody>
+      </p:sp>
+      <p:sp>
+        <p:nvSpPr>
+          <p:cNvPr id="18" name="TextBox 17"/>
+          <p:cNvSpPr txBox="1"/>
+          <p:nvPr/>
+        </p:nvSpPr>
+        <p:spPr>
+          <a:xfrm>
+            <a:off x="822960" y="4014216"/>
+            <a:ext cx="4864608" cy="438912"/>
+          </a:xfrm>
+          <a:prstGeom prst="rect">
+            <a:avLst/>
+          </a:prstGeom>
+          <a:noFill/>
+        </p:spPr>
+        <p:txBody>
+          <a:bodyPr wrap="square" lIns="18288" rIns="18288" tIns="18288" bIns="0">
+            <a:spAutoFit/>
+          </a:bodyPr>
+          <a:lstStyle/>
+          <a:p>
+            <a:pPr>
+              <a:spcAft>
+                <a:spcPts val="500"/>
+              </a:spcAft>
+              <a:defRPr sz="1600" b="0">
+                <a:solidFill>
+                  <a:srgbClr val="647282"/>
+                </a:solidFill>
+                <a:latin typeface="Liberation Sans"/>
+              </a:defRPr>
+            </a:pPr>
+            <a:r>
+              <a:t>Audit-based observations and scheduler metrics</a:t>
+            </a:r>
+          </a:p>
+        </p:txBody>
+      </p:sp>
+      <p:sp>
+        <p:nvSpPr>
+          <p:cNvPr id="19" name="TextBox 18"/>
+          <p:cNvSpPr txBox="1"/>
+          <p:nvPr/>
+        </p:nvSpPr>
+        <p:spPr>
+          <a:xfrm>
+            <a:off x="822960" y="4517136"/>
+            <a:ext cx="4864608" cy="356616"/>
+          </a:xfrm>
+          <a:prstGeom prst="rect">
+            <a:avLst/>
+          </a:prstGeom>
+          <a:noFill/>
+        </p:spPr>
+        <p:txBody>
+          <a:bodyPr wrap="square" lIns="18288" rIns="18288" tIns="18288" bIns="0">
+            <a:spAutoFit/>
+          </a:bodyPr>
+          <a:lstStyle/>
+          <a:p>
+            <a:pPr>
+              <a:spcAft>
+                <a:spcPts val="500"/>
+              </a:spcAft>
+              <a:defRPr sz="1900" b="1">
                 <a:solidFill>
                   <a:srgbClr val="202D3C"/>
                 </a:solidFill>
@@ -11177,7 +10871,280 @@
               </a:defRPr>
             </a:pPr>
             <a:r>
-              <a:t>SubGroup B</a:t>
+              <a:t>Repeatable setup and reporting</a:t>
+            </a:r>
+          </a:p>
+        </p:txBody>
+      </p:sp>
+      <p:sp>
+        <p:nvSpPr>
+          <p:cNvPr id="20" name="TextBox 19"/>
+          <p:cNvSpPr txBox="1"/>
+          <p:nvPr/>
+        </p:nvSpPr>
+        <p:spPr>
+          <a:xfrm>
+            <a:off x="822960" y="4937760"/>
+            <a:ext cx="4864608" cy="438912"/>
+          </a:xfrm>
+          <a:prstGeom prst="rect">
+            <a:avLst/>
+          </a:prstGeom>
+          <a:noFill/>
+        </p:spPr>
+        <p:txBody>
+          <a:bodyPr wrap="square" lIns="18288" rIns="18288" tIns="18288" bIns="0">
+            <a:spAutoFit/>
+          </a:bodyPr>
+          <a:lstStyle/>
+          <a:p>
+            <a:pPr>
+              <a:spcAft>
+                <a:spcPts val="500"/>
+              </a:spcAft>
+              <a:defRPr sz="1600" b="0">
+                <a:solidFill>
+                  <a:srgbClr val="647282"/>
+                </a:solidFill>
+                <a:latin typeface="Liberation Sans"/>
+              </a:defRPr>
+            </a:pPr>
+            <a:r>
+              <a:t>Scripts, dashboards, and saved reports</a:t>
+            </a:r>
+          </a:p>
+        </p:txBody>
+      </p:sp>
+      <p:sp>
+        <p:nvSpPr>
+          <p:cNvPr id="21" name="TextBox 20"/>
+          <p:cNvSpPr txBox="1"/>
+          <p:nvPr/>
+        </p:nvSpPr>
+        <p:spPr>
+          <a:xfrm>
+            <a:off x="6464808" y="2670048"/>
+            <a:ext cx="4864608" cy="356616"/>
+          </a:xfrm>
+          <a:prstGeom prst="rect">
+            <a:avLst/>
+          </a:prstGeom>
+          <a:noFill/>
+        </p:spPr>
+        <p:txBody>
+          <a:bodyPr wrap="square" lIns="18288" rIns="18288" tIns="18288" bIns="0">
+            <a:spAutoFit/>
+          </a:bodyPr>
+          <a:lstStyle/>
+          <a:p>
+            <a:pPr>
+              <a:spcAft>
+                <a:spcPts val="500"/>
+              </a:spcAft>
+              <a:defRPr sz="1900" b="1">
+                <a:solidFill>
+                  <a:srgbClr val="202D3C"/>
+                </a:solidFill>
+                <a:latin typeface="Liberation Sans"/>
+              </a:defRPr>
+            </a:pPr>
+            <a:r>
+              <a:t>Representative workload shapes</a:t>
+            </a:r>
+          </a:p>
+        </p:txBody>
+      </p:sp>
+      <p:sp>
+        <p:nvSpPr>
+          <p:cNvPr id="22" name="TextBox 21"/>
+          <p:cNvSpPr txBox="1"/>
+          <p:nvPr/>
+        </p:nvSpPr>
+        <p:spPr>
+          <a:xfrm>
+            <a:off x="6464808" y="3090672"/>
+            <a:ext cx="4864608" cy="438912"/>
+          </a:xfrm>
+          <a:prstGeom prst="rect">
+            <a:avLst/>
+          </a:prstGeom>
+          <a:noFill/>
+        </p:spPr>
+        <p:txBody>
+          <a:bodyPr wrap="square" lIns="18288" rIns="18288" tIns="18288" bIns="0">
+            <a:spAutoFit/>
+          </a:bodyPr>
+          <a:lstStyle/>
+          <a:p>
+            <a:pPr>
+              <a:spcAft>
+                <a:spcPts val="500"/>
+              </a:spcAft>
+              <a:defRPr sz="1600" b="0">
+                <a:solidFill>
+                  <a:srgbClr val="647282"/>
+                </a:solidFill>
+                <a:latin typeface="Liberation Sans"/>
+              </a:defRPr>
+            </a:pPr>
+            <a:r>
+              <a:t>Scale, job sizes, and topology constraints</a:t>
+            </a:r>
+          </a:p>
+        </p:txBody>
+      </p:sp>
+      <p:sp>
+        <p:nvSpPr>
+          <p:cNvPr id="23" name="TextBox 22"/>
+          <p:cNvSpPr txBox="1"/>
+          <p:nvPr/>
+        </p:nvSpPr>
+        <p:spPr>
+          <a:xfrm>
+            <a:off x="6464808" y="3593592"/>
+            <a:ext cx="4864608" cy="356616"/>
+          </a:xfrm>
+          <a:prstGeom prst="rect">
+            <a:avLst/>
+          </a:prstGeom>
+          <a:noFill/>
+        </p:spPr>
+        <p:txBody>
+          <a:bodyPr wrap="square" lIns="18288" rIns="18288" tIns="18288" bIns="0">
+            <a:spAutoFit/>
+          </a:bodyPr>
+          <a:lstStyle/>
+          <a:p>
+            <a:pPr>
+              <a:spcAft>
+                <a:spcPts val="500"/>
+              </a:spcAft>
+              <a:defRPr sz="1900" b="1">
+                <a:solidFill>
+                  <a:srgbClr val="202D3C"/>
+                </a:solidFill>
+                <a:latin typeface="Liberation Sans"/>
+              </a:defRPr>
+            </a:pPr>
+            <a:r>
+              <a:t>Optimization comparisons</a:t>
+            </a:r>
+          </a:p>
+        </p:txBody>
+      </p:sp>
+      <p:sp>
+        <p:nvSpPr>
+          <p:cNvPr id="24" name="TextBox 23"/>
+          <p:cNvSpPr txBox="1"/>
+          <p:nvPr/>
+        </p:nvSpPr>
+        <p:spPr>
+          <a:xfrm>
+            <a:off x="6464808" y="4014216"/>
+            <a:ext cx="4864608" cy="438912"/>
+          </a:xfrm>
+          <a:prstGeom prst="rect">
+            <a:avLst/>
+          </a:prstGeom>
+          <a:noFill/>
+        </p:spPr>
+        <p:txBody>
+          <a:bodyPr wrap="square" lIns="18288" rIns="18288" tIns="18288" bIns="0">
+            <a:spAutoFit/>
+          </a:bodyPr>
+          <a:lstStyle/>
+          <a:p>
+            <a:pPr>
+              <a:spcAft>
+                <a:spcPts val="500"/>
+              </a:spcAft>
+              <a:defRPr sz="1600" b="0">
+                <a:solidFill>
+                  <a:srgbClr val="647282"/>
+                </a:solidFill>
+                <a:latin typeface="Liberation Sans"/>
+              </a:defRPr>
+            </a:pPr>
+            <a:r>
+              <a:t>Matched configurations and repeated runs</a:t>
+            </a:r>
+          </a:p>
+        </p:txBody>
+      </p:sp>
+      <p:sp>
+        <p:nvSpPr>
+          <p:cNvPr id="25" name="TextBox 24"/>
+          <p:cNvSpPr txBox="1"/>
+          <p:nvPr/>
+        </p:nvSpPr>
+        <p:spPr>
+          <a:xfrm>
+            <a:off x="6464808" y="4517136"/>
+            <a:ext cx="4864608" cy="356616"/>
+          </a:xfrm>
+          <a:prstGeom prst="rect">
+            <a:avLst/>
+          </a:prstGeom>
+          <a:noFill/>
+        </p:spPr>
+        <p:txBody>
+          <a:bodyPr wrap="square" lIns="18288" rIns="18288" tIns="18288" bIns="0">
+            <a:spAutoFit/>
+          </a:bodyPr>
+          <a:lstStyle/>
+          <a:p>
+            <a:pPr>
+              <a:spcAft>
+                <a:spcPts val="500"/>
+              </a:spcAft>
+              <a:defRPr sz="1900" b="1">
+                <a:solidFill>
+                  <a:srgbClr val="202D3C"/>
+                </a:solidFill>
+                <a:latin typeface="Liberation Sans"/>
+              </a:defRPr>
+            </a:pPr>
+            <a:r>
+              <a:t>Measurement boundaries</a:t>
+            </a:r>
+          </a:p>
+        </p:txBody>
+      </p:sp>
+      <p:sp>
+        <p:nvSpPr>
+          <p:cNvPr id="26" name="TextBox 25"/>
+          <p:cNvSpPr txBox="1"/>
+          <p:nvPr/>
+        </p:nvSpPr>
+        <p:spPr>
+          <a:xfrm>
+            <a:off x="6464808" y="4937760"/>
+            <a:ext cx="4864608" cy="438912"/>
+          </a:xfrm>
+          <a:prstGeom prst="rect">
+            <a:avLst/>
+          </a:prstGeom>
+          <a:noFill/>
+        </p:spPr>
+        <p:txBody>
+          <a:bodyPr wrap="square" lIns="18288" rIns="18288" tIns="18288" bIns="0">
+            <a:spAutoFit/>
+          </a:bodyPr>
+          <a:lstStyle/>
+          <a:p>
+            <a:pPr>
+              <a:spcAft>
+                <a:spcPts val="500"/>
+              </a:spcAft>
+              <a:defRPr sz="1600" b="0">
+                <a:solidFill>
+                  <a:srgbClr val="647282"/>
+                </a:solidFill>
+                <a:latin typeface="Liberation Sans"/>
+              </a:defRPr>
+            </a:pPr>
+            <a:r>
+              <a:t>Separate creation, scheduling, and app readiness</a:t>
             </a:r>
           </a:p>
         </p:txBody>
@@ -11286,7 +11253,7 @@
               </a:defRPr>
             </a:pPr>
             <a:r>
-              <a:t>04 / WHAT COMES NEXT</a:t>
+              <a:t>04 / BENCHMARK FRAMEWORK AND PROGRESS</a:t>
             </a:r>
           </a:p>
         </p:txBody>
@@ -11325,7 +11292,7 @@
               </a:defRPr>
             </a:pPr>
             <a:r>
-              <a:t>From Placement Primitives to Ecosystem Adoption</a:t>
+              <a:t>Benchmark Snapshot: Results Under Validation</a:t>
             </a:r>
           </a:p>
         </p:txBody>
@@ -11408,7 +11375,7 @@
               </a:defRPr>
             </a:pPr>
             <a:r>
-              <a:t>路线建议：与实际投入对齐；不承诺这页所有事项都在 v1.17 一次交付。</a:t>
+              <a:t>待填：选择一项正在复测的结果，补环境、版本、负载与重复次数。当前没有放入测量数据。</a:t>
             </a:r>
           </a:p>
         </p:txBody>
@@ -11499,8 +11466,208 @@
         </p:nvSpPr>
         <p:spPr>
           <a:xfrm>
-            <a:off x="594360" y="1847088"/>
-            <a:ext cx="3337560" cy="3044952"/>
+            <a:off x="594360" y="1737360"/>
+            <a:ext cx="2286000" cy="292608"/>
+          </a:xfrm>
+          <a:prstGeom prst="rect">
+            <a:avLst/>
+          </a:prstGeom>
+          <a:solidFill>
+            <a:srgbClr val="FFF4D8"/>
+          </a:solidFill>
+          <a:ln>
+            <a:noFill/>
+          </a:ln>
+          <a:effectLst/>
+        </p:spPr>
+        <p:style>
+          <a:lnRef idx="1">
+            <a:schemeClr val="accent1"/>
+          </a:lnRef>
+          <a:fillRef idx="3">
+            <a:schemeClr val="accent1"/>
+          </a:fillRef>
+          <a:effectRef idx="0">
+            <a:schemeClr val="accent1"/>
+          </a:effectRef>
+          <a:fontRef idx="minor">
+            <a:schemeClr val="lt1"/>
+          </a:fontRef>
+        </p:style>
+        <p:txBody>
+          <a:bodyPr rtlCol="0" anchor="ctr"/>
+          <a:lstStyle/>
+          <a:p>
+            <a:pPr algn="ctr"/>
+          </a:p>
+        </p:txBody>
+      </p:sp>
+      <p:sp>
+        <p:nvSpPr>
+          <p:cNvPr id="10" name="TextBox 9"/>
+          <p:cNvSpPr txBox="1"/>
+          <p:nvPr/>
+        </p:nvSpPr>
+        <p:spPr>
+          <a:xfrm>
+            <a:off x="658368" y="1764792"/>
+            <a:ext cx="2194560" cy="219456"/>
+          </a:xfrm>
+          <a:prstGeom prst="rect">
+            <a:avLst/>
+          </a:prstGeom>
+          <a:noFill/>
+        </p:spPr>
+        <p:txBody>
+          <a:bodyPr wrap="square" lIns="18288" rIns="18288" tIns="18288" bIns="0">
+            <a:spAutoFit/>
+          </a:bodyPr>
+          <a:lstStyle/>
+          <a:p>
+            <a:pPr>
+              <a:spcAft>
+                <a:spcPts val="500"/>
+              </a:spcAft>
+              <a:defRPr sz="1000" b="1">
+                <a:solidFill>
+                  <a:srgbClr val="8B621C"/>
+                </a:solidFill>
+                <a:latin typeface="Liberation Sans"/>
+              </a:defRPr>
+            </a:pPr>
+            <a:r>
+              <a:t>WORK IN PROGRESS</a:t>
+            </a:r>
+          </a:p>
+        </p:txBody>
+      </p:sp>
+      <p:sp>
+        <p:nvSpPr>
+          <p:cNvPr id="11" name="TextBox 10"/>
+          <p:cNvSpPr txBox="1"/>
+          <p:nvPr/>
+        </p:nvSpPr>
+        <p:spPr>
+          <a:xfrm>
+            <a:off x="594360" y="2377440"/>
+            <a:ext cx="3794760" cy="448056"/>
+          </a:xfrm>
+          <a:prstGeom prst="rect">
+            <a:avLst/>
+          </a:prstGeom>
+          <a:noFill/>
+        </p:spPr>
+        <p:txBody>
+          <a:bodyPr wrap="square" lIns="18288" rIns="18288" tIns="18288" bIns="0">
+            <a:spAutoFit/>
+          </a:bodyPr>
+          <a:lstStyle/>
+          <a:p>
+            <a:pPr>
+              <a:spcAft>
+                <a:spcPts val="500"/>
+              </a:spcAft>
+              <a:defRPr sz="2300" b="1">
+                <a:solidFill>
+                  <a:srgbClr val="202D3C"/>
+                </a:solidFill>
+                <a:latin typeface="Liberation Sans"/>
+              </a:defRPr>
+            </a:pPr>
+            <a:r>
+              <a:t>One scenario. One question.</a:t>
+            </a:r>
+          </a:p>
+        </p:txBody>
+      </p:sp>
+      <p:sp>
+        <p:nvSpPr>
+          <p:cNvPr id="12" name="TextBox 11"/>
+          <p:cNvSpPr txBox="1"/>
+          <p:nvPr/>
+        </p:nvSpPr>
+        <p:spPr>
+          <a:xfrm>
+            <a:off x="594360" y="3154680"/>
+            <a:ext cx="3794760" cy="1316736"/>
+          </a:xfrm>
+          <a:prstGeom prst="rect">
+            <a:avLst/>
+          </a:prstGeom>
+          <a:noFill/>
+        </p:spPr>
+        <p:txBody>
+          <a:bodyPr wrap="square" lIns="18288" rIns="18288" tIns="18288" bIns="0">
+            <a:spAutoFit/>
+          </a:bodyPr>
+          <a:lstStyle/>
+          <a:p>
+            <a:pPr>
+              <a:spcAft>
+                <a:spcPts val="500"/>
+              </a:spcAft>
+              <a:defRPr sz="2100" b="0">
+                <a:solidFill>
+                  <a:srgbClr val="647282"/>
+                </a:solidFill>
+                <a:latin typeface="Liberation Sans"/>
+              </a:defRPr>
+            </a:pPr>
+            <a:r>
+              <a:t>Show what changed, what was measured, and what remains under test.</a:t>
+            </a:r>
+          </a:p>
+        </p:txBody>
+      </p:sp>
+      <p:sp>
+        <p:nvSpPr>
+          <p:cNvPr id="13" name="TextBox 12"/>
+          <p:cNvSpPr txBox="1"/>
+          <p:nvPr/>
+        </p:nvSpPr>
+        <p:spPr>
+          <a:xfrm>
+            <a:off x="594360" y="4754880"/>
+            <a:ext cx="3794760" cy="566928"/>
+          </a:xfrm>
+          <a:prstGeom prst="rect">
+            <a:avLst/>
+          </a:prstGeom>
+          <a:noFill/>
+        </p:spPr>
+        <p:txBody>
+          <a:bodyPr wrap="square" lIns="18288" rIns="18288" tIns="18288" bIns="0">
+            <a:spAutoFit/>
+          </a:bodyPr>
+          <a:lstStyle/>
+          <a:p>
+            <a:pPr>
+              <a:spcAft>
+                <a:spcPts val="500"/>
+              </a:spcAft>
+              <a:defRPr sz="1800" b="1">
+                <a:solidFill>
+                  <a:srgbClr val="356696"/>
+                </a:solidFill>
+                <a:latin typeface="Liberation Sans"/>
+              </a:defRPr>
+            </a:pPr>
+            <a:r>
+              <a:t>Freeze the claim after validation.</a:t>
+            </a:r>
+          </a:p>
+        </p:txBody>
+      </p:sp>
+      <p:sp>
+        <p:nvSpPr>
+          <p:cNvPr id="14" name="Rectangle 13"/>
+          <p:cNvSpPr/>
+          <p:nvPr/>
+        </p:nvSpPr>
+        <p:spPr>
+          <a:xfrm>
+            <a:off x="4846320" y="1691640"/>
+            <a:ext cx="6812280" cy="3858768"/>
           </a:xfrm>
           <a:prstGeom prst="rect">
             <a:avLst/>
@@ -11537,156 +11704,66 @@
       </p:sp>
       <p:sp>
         <p:nvSpPr>
-          <p:cNvPr id="10" name="TextBox 9"/>
-          <p:cNvSpPr txBox="1"/>
-          <p:nvPr/>
-        </p:nvSpPr>
-        <p:spPr>
-          <a:xfrm>
-            <a:off x="758952" y="2020824"/>
-            <a:ext cx="2971800" cy="402336"/>
-          </a:xfrm>
-          <a:prstGeom prst="rect">
-            <a:avLst/>
-          </a:prstGeom>
-          <a:noFill/>
-        </p:spPr>
-        <p:txBody>
-          <a:bodyPr wrap="square" lIns="18288" rIns="18288" tIns="18288" bIns="0">
-            <a:spAutoFit/>
-          </a:bodyPr>
-          <a:lstStyle/>
-          <a:p>
-            <a:pPr>
-              <a:spcAft>
-                <a:spcPts val="500"/>
-              </a:spcAft>
-              <a:defRPr sz="2300" b="1">
-                <a:solidFill>
-                  <a:srgbClr val="356696"/>
-                </a:solidFill>
-                <a:latin typeface="Liberation Sans"/>
-              </a:defRPr>
-            </a:pPr>
-            <a:r>
-              <a:t>01</a:t>
-            </a:r>
-          </a:p>
-        </p:txBody>
-      </p:sp>
-      <p:sp>
-        <p:nvSpPr>
-          <p:cNvPr id="11" name="TextBox 10"/>
-          <p:cNvSpPr txBox="1"/>
-          <p:nvPr/>
-        </p:nvSpPr>
-        <p:spPr>
-          <a:xfrm>
-            <a:off x="758952" y="2697480"/>
-            <a:ext cx="2971800" cy="740664"/>
-          </a:xfrm>
-          <a:prstGeom prst="rect">
-            <a:avLst/>
-          </a:prstGeom>
-          <a:noFill/>
-        </p:spPr>
-        <p:txBody>
-          <a:bodyPr wrap="square" lIns="18288" rIns="18288" tIns="18288" bIns="0">
-            <a:spAutoFit/>
-          </a:bodyPr>
-          <a:lstStyle/>
-          <a:p>
-            <a:pPr>
-              <a:spcAft>
-                <a:spcPts val="500"/>
-              </a:spcAft>
-              <a:defRPr sz="2200" b="1">
-                <a:solidFill>
-                  <a:srgbClr val="202D3C"/>
-                </a:solidFill>
-                <a:latin typeface="Liberation Sans"/>
-              </a:defRPr>
-            </a:pPr>
-            <a:r>
-              <a:t>Define relationships</a:t>
-            </a:r>
-          </a:p>
-        </p:txBody>
-      </p:sp>
-      <p:sp>
-        <p:nvSpPr>
-          <p:cNvPr id="12" name="TextBox 11"/>
-          <p:cNvSpPr txBox="1"/>
-          <p:nvPr/>
-        </p:nvSpPr>
-        <p:spPr>
-          <a:xfrm>
-            <a:off x="758952" y="3730752"/>
-            <a:ext cx="2971800" cy="914400"/>
-          </a:xfrm>
-          <a:prstGeom prst="rect">
-            <a:avLst/>
-          </a:prstGeom>
-          <a:noFill/>
-        </p:spPr>
-        <p:txBody>
-          <a:bodyPr wrap="square" lIns="18288" rIns="18288" tIns="18288" bIns="0">
-            <a:spAutoFit/>
-          </a:bodyPr>
-          <a:lstStyle/>
-          <a:p>
-            <a:pPr>
-              <a:spcAft>
-                <a:spcPts val="500"/>
-              </a:spcAft>
-              <a:defRPr sz="1700" b="0">
+          <p:cNvPr id="15" name="TextBox 14"/>
+          <p:cNvSpPr txBox="1"/>
+          <p:nvPr/>
+        </p:nvSpPr>
+        <p:spPr>
+          <a:xfrm>
+            <a:off x="5010912" y="1819656"/>
+            <a:ext cx="6483096" cy="246888"/>
+          </a:xfrm>
+          <a:prstGeom prst="rect">
+            <a:avLst/>
+          </a:prstGeom>
+          <a:noFill/>
+        </p:spPr>
+        <p:txBody>
+          <a:bodyPr wrap="square" lIns="18288" rIns="18288" tIns="18288" bIns="0">
+            <a:spAutoFit/>
+          </a:bodyPr>
+          <a:lstStyle/>
+          <a:p>
+            <a:pPr>
+              <a:spcAft>
+                <a:spcPts val="500"/>
+              </a:spcAft>
+              <a:defRPr sz="1000" b="0">
                 <a:solidFill>
                   <a:srgbClr val="647282"/>
                 </a:solidFill>
-                <a:latin typeface="Liberation Sans"/>
-              </a:defRPr>
-            </a:pPr>
-            <a:r>
-              <a:t>SubGroup affinity / anti-affinity</a:t>
-            </a:r>
-          </a:p>
-          <a:p>
-            <a:pPr>
-              <a:spcAft>
-                <a:spcPts val="500"/>
-              </a:spcAft>
-              <a:defRPr sz="1700" b="0">
-                <a:solidFill>
-                  <a:srgbClr val="647282"/>
-                </a:solidFill>
-                <a:latin typeface="Liberation Sans"/>
-              </a:defRPr>
-            </a:pPr>
-            <a:r>
-              <a:t>Clear matching and failure semantics</a:t>
-            </a:r>
-          </a:p>
-        </p:txBody>
-      </p:sp>
-      <p:sp>
-        <p:nvSpPr>
-          <p:cNvPr id="13" name="Rectangle 12"/>
+                <a:latin typeface="Liberation Mono"/>
+              </a:defRPr>
+            </a:pPr>
+            <a:r>
+              <a:t>RESULT PLACEHOLDER — NO MEASURED DATA YET</a:t>
+            </a:r>
+          </a:p>
+        </p:txBody>
+      </p:sp>
+      <p:sp>
+        <p:nvSpPr>
+          <p:cNvPr id="16" name="Rounded Rectangle 15"/>
           <p:cNvSpPr/>
           <p:nvPr/>
         </p:nvSpPr>
         <p:spPr>
           <a:xfrm>
-            <a:off x="4416552" y="1847088"/>
-            <a:ext cx="3337560" cy="3044952"/>
-          </a:xfrm>
-          <a:prstGeom prst="rect">
-            <a:avLst/>
+            <a:off x="5276088" y="2414016"/>
+            <a:ext cx="5916168" cy="1188720"/>
+          </a:xfrm>
+          <a:prstGeom prst="roundRect">
+            <a:avLst>
+              <a:gd name="adj" fmla="val 8000"/>
+            </a:avLst>
           </a:prstGeom>
           <a:solidFill>
-            <a:srgbClr val="F0F5FB"/>
+            <a:srgbClr val="FFFFFF"/>
           </a:solidFill>
-          <a:ln>
-            <a:noFill/>
+          <a:ln w="12700">
+            <a:solidFill>
+              <a:srgbClr val="8EA8CB"/>
+            </a:solidFill>
           </a:ln>
           <a:effectLst/>
         </p:spPr>
@@ -11705,79 +11782,11 @@
           </a:fontRef>
         </p:style>
         <p:txBody>
-          <a:bodyPr rtlCol="0" anchor="ctr"/>
-          <a:lstStyle/>
-          <a:p>
-            <a:pPr algn="ctr"/>
-          </a:p>
-        </p:txBody>
-      </p:sp>
-      <p:sp>
-        <p:nvSpPr>
-          <p:cNvPr id="14" name="TextBox 13"/>
-          <p:cNvSpPr txBox="1"/>
-          <p:nvPr/>
-        </p:nvSpPr>
-        <p:spPr>
-          <a:xfrm>
-            <a:off x="4581144" y="2020824"/>
-            <a:ext cx="2971800" cy="402336"/>
-          </a:xfrm>
-          <a:prstGeom prst="rect">
-            <a:avLst/>
-          </a:prstGeom>
-          <a:noFill/>
-        </p:spPr>
-        <p:txBody>
-          <a:bodyPr wrap="square" lIns="18288" rIns="18288" tIns="18288" bIns="0">
-            <a:spAutoFit/>
-          </a:bodyPr>
-          <a:lstStyle/>
-          <a:p>
-            <a:pPr>
-              <a:spcAft>
-                <a:spcPts val="500"/>
-              </a:spcAft>
-              <a:defRPr sz="2300" b="1">
-                <a:solidFill>
-                  <a:srgbClr val="356696"/>
-                </a:solidFill>
-                <a:latin typeface="Liberation Sans"/>
-              </a:defRPr>
-            </a:pPr>
-            <a:r>
-              <a:t>02</a:t>
-            </a:r>
-          </a:p>
-        </p:txBody>
-      </p:sp>
-      <p:sp>
-        <p:nvSpPr>
-          <p:cNvPr id="15" name="TextBox 14"/>
-          <p:cNvSpPr txBox="1"/>
-          <p:nvPr/>
-        </p:nvSpPr>
-        <p:spPr>
-          <a:xfrm>
-            <a:off x="4581144" y="2697480"/>
-            <a:ext cx="2971800" cy="740664"/>
-          </a:xfrm>
-          <a:prstGeom prst="rect">
-            <a:avLst/>
-          </a:prstGeom>
-          <a:noFill/>
-        </p:spPr>
-        <p:txBody>
-          <a:bodyPr wrap="square" lIns="18288" rIns="18288" tIns="18288" bIns="0">
-            <a:spAutoFit/>
-          </a:bodyPr>
-          <a:lstStyle/>
-          <a:p>
-            <a:pPr>
-              <a:spcAft>
-                <a:spcPts val="500"/>
-              </a:spcAft>
-              <a:defRPr sz="2200" b="1">
+          <a:bodyPr rtlCol="0" anchor="ctr" wrap="square" lIns="109728" rIns="109728"/>
+          <a:lstStyle/>
+          <a:p>
+            <a:pPr algn="ctr">
+              <a:defRPr sz="2200">
                 <a:solidFill>
                   <a:srgbClr val="202D3C"/>
                 </a:solidFill>
@@ -11785,145 +11794,85 @@
               </a:defRPr>
             </a:pPr>
             <a:r>
-              <a:t>Preserve workload intent</a:t>
-            </a:r>
-          </a:p>
-        </p:txBody>
-      </p:sp>
-      <p:sp>
-        <p:nvSpPr>
-          <p:cNvPr id="16" name="TextBox 15"/>
-          <p:cNvSpPr txBox="1"/>
-          <p:nvPr/>
-        </p:nvSpPr>
-        <p:spPr>
-          <a:xfrm>
-            <a:off x="4581144" y="3730752"/>
-            <a:ext cx="2971800" cy="914400"/>
-          </a:xfrm>
-          <a:prstGeom prst="rect">
-            <a:avLst/>
-          </a:prstGeom>
-          <a:noFill/>
-        </p:spPr>
-        <p:txBody>
-          <a:bodyPr wrap="square" lIns="18288" rIns="18288" tIns="18288" bIns="0">
-            <a:spAutoFit/>
-          </a:bodyPr>
-          <a:lstStyle/>
-          <a:p>
-            <a:pPr>
-              <a:spcAft>
-                <a:spcPts val="500"/>
-              </a:spcAft>
-              <a:defRPr sz="1700" b="0">
+              <a:t>Insert one verified chart or a real dashboard capture</a:t>
+            </a:r>
+          </a:p>
+        </p:txBody>
+      </p:sp>
+      <p:sp>
+        <p:nvSpPr>
+          <p:cNvPr id="17" name="TextBox 16"/>
+          <p:cNvSpPr txBox="1"/>
+          <p:nvPr/>
+        </p:nvSpPr>
+        <p:spPr>
+          <a:xfrm>
+            <a:off x="5376672" y="3877056"/>
+            <a:ext cx="5650992" cy="320040"/>
+          </a:xfrm>
+          <a:prstGeom prst="rect">
+            <a:avLst/>
+          </a:prstGeom>
+          <a:noFill/>
+        </p:spPr>
+        <p:txBody>
+          <a:bodyPr wrap="square" lIns="18288" rIns="18288" tIns="18288" bIns="0">
+            <a:spAutoFit/>
+          </a:bodyPr>
+          <a:lstStyle/>
+          <a:p>
+            <a:pPr>
+              <a:spcAft>
+                <a:spcPts val="500"/>
+              </a:spcAft>
+              <a:defRPr sz="1400" b="0">
                 <a:solidFill>
                   <a:srgbClr val="647282"/>
                 </a:solidFill>
-                <a:latin typeface="Liberation Sans"/>
-              </a:defRPr>
-            </a:pPr>
-            <a:r>
-              <a:t>Deepen KubeRay / Grove mappings</a:t>
-            </a:r>
-          </a:p>
-          <a:p>
-            <a:pPr>
-              <a:spcAft>
-                <a:spcPts val="500"/>
-              </a:spcAft>
-              <a:defRPr sz="1700" b="0">
+                <a:latin typeface="Liberation Mono"/>
+              </a:defRPr>
+            </a:pPr>
+            <a:r>
+              <a:t>Build / cluster / nodes / workload: TBD</a:t>
+            </a:r>
+          </a:p>
+        </p:txBody>
+      </p:sp>
+      <p:sp>
+        <p:nvSpPr>
+          <p:cNvPr id="18" name="TextBox 17"/>
+          <p:cNvSpPr txBox="1"/>
+          <p:nvPr/>
+        </p:nvSpPr>
+        <p:spPr>
+          <a:xfrm>
+            <a:off x="5376672" y="4370832"/>
+            <a:ext cx="5650992" cy="320040"/>
+          </a:xfrm>
+          <a:prstGeom prst="rect">
+            <a:avLst/>
+          </a:prstGeom>
+          <a:noFill/>
+        </p:spPr>
+        <p:txBody>
+          <a:bodyPr wrap="square" lIns="18288" rIns="18288" tIns="18288" bIns="0">
+            <a:spAutoFit/>
+          </a:bodyPr>
+          <a:lstStyle/>
+          <a:p>
+            <a:pPr>
+              <a:spcAft>
+                <a:spcPts val="500"/>
+              </a:spcAft>
+              <a:defRPr sz="1400" b="0">
                 <a:solidFill>
                   <a:srgbClr val="647282"/>
                 </a:solidFill>
-                <a:latin typeface="Liberation Sans"/>
-              </a:defRPr>
-            </a:pPr>
-            <a:r>
-              <a:t>Extend Kubeflow / LWS integration</a:t>
-            </a:r>
-          </a:p>
-        </p:txBody>
-      </p:sp>
-      <p:sp>
-        <p:nvSpPr>
-          <p:cNvPr id="17" name="Rectangle 16"/>
-          <p:cNvSpPr/>
-          <p:nvPr/>
-        </p:nvSpPr>
-        <p:spPr>
-          <a:xfrm>
-            <a:off x="8238744" y="1847088"/>
-            <a:ext cx="3337560" cy="3044952"/>
-          </a:xfrm>
-          <a:prstGeom prst="rect">
-            <a:avLst/>
-          </a:prstGeom>
-          <a:solidFill>
-            <a:srgbClr val="F0F5FB"/>
-          </a:solidFill>
-          <a:ln>
-            <a:noFill/>
-          </a:ln>
-          <a:effectLst/>
-        </p:spPr>
-        <p:style>
-          <a:lnRef idx="1">
-            <a:schemeClr val="accent1"/>
-          </a:lnRef>
-          <a:fillRef idx="3">
-            <a:schemeClr val="accent1"/>
-          </a:fillRef>
-          <a:effectRef idx="0">
-            <a:schemeClr val="accent1"/>
-          </a:effectRef>
-          <a:fontRef idx="minor">
-            <a:schemeClr val="lt1"/>
-          </a:fontRef>
-        </p:style>
-        <p:txBody>
-          <a:bodyPr rtlCol="0" anchor="ctr"/>
-          <a:lstStyle/>
-          <a:p>
-            <a:pPr algn="ctr"/>
-          </a:p>
-        </p:txBody>
-      </p:sp>
-      <p:sp>
-        <p:nvSpPr>
-          <p:cNvPr id="18" name="TextBox 17"/>
-          <p:cNvSpPr txBox="1"/>
-          <p:nvPr/>
-        </p:nvSpPr>
-        <p:spPr>
-          <a:xfrm>
-            <a:off x="8403336" y="2020824"/>
-            <a:ext cx="2971800" cy="402336"/>
-          </a:xfrm>
-          <a:prstGeom prst="rect">
-            <a:avLst/>
-          </a:prstGeom>
-          <a:noFill/>
-        </p:spPr>
-        <p:txBody>
-          <a:bodyPr wrap="square" lIns="18288" rIns="18288" tIns="18288" bIns="0">
-            <a:spAutoFit/>
-          </a:bodyPr>
-          <a:lstStyle/>
-          <a:p>
-            <a:pPr>
-              <a:spcAft>
-                <a:spcPts val="500"/>
-              </a:spcAft>
-              <a:defRPr sz="2300" b="1">
-                <a:solidFill>
-                  <a:srgbClr val="356696"/>
-                </a:solidFill>
-                <a:latin typeface="Liberation Sans"/>
-              </a:defRPr>
-            </a:pPr>
-            <a:r>
-              <a:t>03</a:t>
+                <a:latin typeface="Liberation Mono"/>
+              </a:defRPr>
+            </a:pPr>
+            <a:r>
+              <a:t>Metric / window / repetitions: TBD</a:t>
             </a:r>
           </a:p>
         </p:txBody>
@@ -11936,127 +11885,33 @@
         </p:nvSpPr>
         <p:spPr>
           <a:xfrm>
-            <a:off x="8403336" y="2697480"/>
-            <a:ext cx="2971800" cy="740664"/>
-          </a:xfrm>
-          <a:prstGeom prst="rect">
-            <a:avLst/>
-          </a:prstGeom>
-          <a:noFill/>
-        </p:spPr>
-        <p:txBody>
-          <a:bodyPr wrap="square" lIns="18288" rIns="18288" tIns="18288" bIns="0">
-            <a:spAutoFit/>
-          </a:bodyPr>
-          <a:lstStyle/>
-          <a:p>
-            <a:pPr>
-              <a:spcAft>
-                <a:spcPts val="500"/>
-              </a:spcAft>
-              <a:defRPr sz="2200" b="1">
-                <a:solidFill>
-                  <a:srgbClr val="202D3C"/>
-                </a:solidFill>
-                <a:latin typeface="Liberation Sans"/>
-              </a:defRPr>
-            </a:pPr>
-            <a:r>
-              <a:t>Validate real scenarios</a:t>
-            </a:r>
-          </a:p>
-        </p:txBody>
-      </p:sp>
-      <p:sp>
-        <p:nvSpPr>
-          <p:cNvPr id="20" name="TextBox 19"/>
-          <p:cNvSpPr txBox="1"/>
-          <p:nvPr/>
-        </p:nvSpPr>
-        <p:spPr>
-          <a:xfrm>
-            <a:off x="8403336" y="3730752"/>
-            <a:ext cx="2971800" cy="914400"/>
-          </a:xfrm>
-          <a:prstGeom prst="rect">
-            <a:avLst/>
-          </a:prstGeom>
-          <a:noFill/>
-        </p:spPr>
-        <p:txBody>
-          <a:bodyPr wrap="square" lIns="18288" rIns="18288" tIns="18288" bIns="0">
-            <a:spAutoFit/>
-          </a:bodyPr>
-          <a:lstStyle/>
-          <a:p>
-            <a:pPr>
-              <a:spcAft>
-                <a:spcPts val="500"/>
-              </a:spcAft>
-              <a:defRPr sz="1700" b="0">
+            <a:off x="5376672" y="4864608"/>
+            <a:ext cx="5650992" cy="320040"/>
+          </a:xfrm>
+          <a:prstGeom prst="rect">
+            <a:avLst/>
+          </a:prstGeom>
+          <a:noFill/>
+        </p:spPr>
+        <p:txBody>
+          <a:bodyPr wrap="square" lIns="18288" rIns="18288" tIns="18288" bIns="0">
+            <a:spAutoFit/>
+          </a:bodyPr>
+          <a:lstStyle/>
+          <a:p>
+            <a:pPr>
+              <a:spcAft>
+                <a:spcPts val="500"/>
+              </a:spcAft>
+              <a:defRPr sz="1400" b="0">
                 <a:solidFill>
                   <a:srgbClr val="647282"/>
                 </a:solidFill>
-                <a:latin typeface="Liberation Sans"/>
-              </a:defRPr>
-            </a:pPr>
-            <a:r>
-              <a:t>Runnable examples</a:t>
-            </a:r>
-          </a:p>
-          <a:p>
-            <a:pPr>
-              <a:spcAft>
-                <a:spcPts val="500"/>
-              </a:spcAft>
-              <a:defRPr sz="1700" b="0">
-                <a:solidFill>
-                  <a:srgbClr val="647282"/>
-                </a:solidFill>
-                <a:latin typeface="Liberation Sans"/>
-              </a:defRPr>
-            </a:pPr>
-            <a:r>
-              <a:t>Placement and failure behavior</a:t>
-            </a:r>
-          </a:p>
-        </p:txBody>
-      </p:sp>
-      <p:sp>
-        <p:nvSpPr>
-          <p:cNvPr id="21" name="TextBox 20"/>
-          <p:cNvSpPr txBox="1"/>
-          <p:nvPr/>
-        </p:nvSpPr>
-        <p:spPr>
-          <a:xfrm>
-            <a:off x="658368" y="5230368"/>
-            <a:ext cx="10789920" cy="347472"/>
-          </a:xfrm>
-          <a:prstGeom prst="rect">
-            <a:avLst/>
-          </a:prstGeom>
-          <a:noFill/>
-        </p:spPr>
-        <p:txBody>
-          <a:bodyPr wrap="square" lIns="18288" rIns="18288" tIns="18288" bIns="0">
-            <a:spAutoFit/>
-          </a:bodyPr>
-          <a:lstStyle/>
-          <a:p>
-            <a:pPr>
-              <a:spcAft>
-                <a:spcPts val="500"/>
-              </a:spcAft>
-              <a:defRPr sz="1800" b="0">
-                <a:solidFill>
-                  <a:srgbClr val="647282"/>
-                </a:solidFill>
-                <a:latin typeface="Liberation Sans"/>
-              </a:defRPr>
-            </a:pPr>
-            <a:r>
-              <a:t>Further out: topology adapters and device / network locality.</a:t>
+                <a:latin typeface="Liberation Mono"/>
+              </a:defRPr>
+            </a:pPr>
+            <a:r>
+              <a:t>Observation / limits / next test: TBD</a:t>
             </a:r>
           </a:p>
         </p:txBody>
@@ -12165,7 +12020,7 @@
               </a:defRPr>
             </a:pPr>
             <a:r>
-              <a:t>04 / WHAT COMES NEXT</a:t>
+              <a:t>04 / BENCHMARK FRAMEWORK AND PROGRESS</a:t>
             </a:r>
           </a:p>
         </p:txBody>
@@ -12204,7 +12059,7 @@
               </a:defRPr>
             </a:pPr>
             <a:r>
-              <a:t>One Framework, Workload-Aware Placement</a:t>
+              <a:t>Framework, Workloads, Ecosystem, Evidence</a:t>
             </a:r>
           </a:p>
         </p:txBody>
@@ -12287,7 +12142,7 @@
               </a:defRPr>
             </a:pPr>
             <a:r>
-              <a:t>可用 20–30 秒提及 Global / 混部已有能力；正文收回到当前推进方向与社区参与。</a:t>
+              <a:t>收尾：测试和优化仍在继续，邀请贡献真实 workload 与 benchmark profile；不把 WIP 写成完成。</a:t>
             </a:r>
           </a:p>
         </p:txBody>
@@ -12378,7 +12233,7 @@
         </p:nvSpPr>
         <p:spPr>
           <a:xfrm>
-            <a:off x="621792" y="1837943"/>
+            <a:off x="621792" y="1746504"/>
             <a:ext cx="530352" cy="292608"/>
           </a:xfrm>
           <a:prstGeom prst="rect">
@@ -12422,7 +12277,7 @@
         </p:nvSpPr>
         <p:spPr>
           <a:xfrm>
-            <a:off x="685800" y="1865375"/>
+            <a:off x="685800" y="1773936"/>
             <a:ext cx="438912" cy="219456"/>
           </a:xfrm>
           <a:prstGeom prst="rect">
@@ -12461,25 +12316,25 @@
         </p:nvSpPr>
         <p:spPr>
           <a:xfrm>
-            <a:off x="1417320" y="1783080"/>
-            <a:ext cx="9875520" cy="411480"/>
-          </a:xfrm>
-          <a:prstGeom prst="rect">
-            <a:avLst/>
-          </a:prstGeom>
-          <a:noFill/>
-        </p:spPr>
-        <p:txBody>
-          <a:bodyPr wrap="square" lIns="18288" rIns="18288" tIns="18288" bIns="0">
-            <a:spAutoFit/>
-          </a:bodyPr>
-          <a:lstStyle/>
-          <a:p>
-            <a:pPr>
-              <a:spcAft>
-                <a:spcPts val="500"/>
-              </a:spcAft>
-              <a:defRPr sz="2500" b="1">
+            <a:off x="1417320" y="1691640"/>
+            <a:ext cx="9875520" cy="384048"/>
+          </a:xfrm>
+          <a:prstGeom prst="rect">
+            <a:avLst/>
+          </a:prstGeom>
+          <a:noFill/>
+        </p:spPr>
+        <p:txBody>
+          <a:bodyPr wrap="square" lIns="18288" rIns="18288" tIns="18288" bIns="0">
+            <a:spAutoFit/>
+          </a:bodyPr>
+          <a:lstStyle/>
+          <a:p>
+            <a:pPr>
+              <a:spcAft>
+                <a:spcPts val="500"/>
+              </a:spcAft>
+              <a:defRPr sz="2300" b="1">
                 <a:solidFill>
                   <a:srgbClr val="202D3C"/>
                 </a:solidFill>
@@ -12500,25 +12355,25 @@
         </p:nvSpPr>
         <p:spPr>
           <a:xfrm>
-            <a:off x="1417320" y="2295144"/>
-            <a:ext cx="9875520" cy="393192"/>
-          </a:xfrm>
-          <a:prstGeom prst="rect">
-            <a:avLst/>
-          </a:prstGeom>
-          <a:noFill/>
-        </p:spPr>
-        <p:txBody>
-          <a:bodyPr wrap="square" lIns="18288" rIns="18288" tIns="18288" bIns="0">
-            <a:spAutoFit/>
-          </a:bodyPr>
-          <a:lstStyle/>
-          <a:p>
-            <a:pPr>
-              <a:spcAft>
-                <a:spcPts val="500"/>
-              </a:spcAft>
-              <a:defRPr sz="1900" b="0">
+            <a:off x="1417320" y="2130552"/>
+            <a:ext cx="9875520" cy="329184"/>
+          </a:xfrm>
+          <a:prstGeom prst="rect">
+            <a:avLst/>
+          </a:prstGeom>
+          <a:noFill/>
+        </p:spPr>
+        <p:txBody>
+          <a:bodyPr wrap="square" lIns="18288" rIns="18288" tIns="18288" bIns="0">
+            <a:spAutoFit/>
+          </a:bodyPr>
+          <a:lstStyle/>
+          <a:p>
+            <a:pPr>
+              <a:spcAft>
+                <a:spcPts val="500"/>
+              </a:spcAft>
+              <a:defRPr sz="1700" b="0">
                 <a:solidFill>
                   <a:srgbClr val="647282"/>
                 </a:solidFill>
@@ -12526,7 +12381,7 @@
               </a:defRPr>
             </a:pPr>
             <a:r>
-              <a:t>NodeShard and scheduler coordination</a:t>
+              <a:t>Dual paths and NodeShard coordination</a:t>
             </a:r>
           </a:p>
         </p:txBody>
@@ -12539,7 +12394,7 @@
         </p:nvSpPr>
         <p:spPr>
           <a:xfrm>
-            <a:off x="621792" y="3008376"/>
+            <a:off x="621792" y="2697480"/>
             <a:ext cx="530352" cy="292608"/>
           </a:xfrm>
           <a:prstGeom prst="rect">
@@ -12583,7 +12438,7 @@
         </p:nvSpPr>
         <p:spPr>
           <a:xfrm>
-            <a:off x="685800" y="3035808"/>
+            <a:off x="685800" y="2724912"/>
             <a:ext cx="438912" cy="219456"/>
           </a:xfrm>
           <a:prstGeom prst="rect">
@@ -12622,25 +12477,25 @@
         </p:nvSpPr>
         <p:spPr>
           <a:xfrm>
-            <a:off x="1417320" y="2953512"/>
-            <a:ext cx="9875520" cy="411480"/>
-          </a:xfrm>
-          <a:prstGeom prst="rect">
-            <a:avLst/>
-          </a:prstGeom>
-          <a:noFill/>
-        </p:spPr>
-        <p:txBody>
-          <a:bodyPr wrap="square" lIns="18288" rIns="18288" tIns="18288" bIns="0">
-            <a:spAutoFit/>
-          </a:bodyPr>
-          <a:lstStyle/>
-          <a:p>
-            <a:pPr>
-              <a:spcAft>
-                <a:spcPts val="500"/>
-              </a:spcAft>
-              <a:defRPr sz="2500" b="1">
+            <a:off x="1417320" y="2642616"/>
+            <a:ext cx="9875520" cy="384048"/>
+          </a:xfrm>
+          <a:prstGeom prst="rect">
+            <a:avLst/>
+          </a:prstGeom>
+          <a:noFill/>
+        </p:spPr>
+        <p:txBody>
+          <a:bodyPr wrap="square" lIns="18288" rIns="18288" tIns="18288" bIns="0">
+            <a:spAutoFit/>
+          </a:bodyPr>
+          <a:lstStyle/>
+          <a:p>
+            <a:pPr>
+              <a:spcAft>
+                <a:spcPts val="500"/>
+              </a:spcAft>
+              <a:defRPr sz="2300" b="1">
                 <a:solidFill>
                   <a:srgbClr val="202D3C"/>
                 </a:solidFill>
@@ -12661,25 +12516,25 @@
         </p:nvSpPr>
         <p:spPr>
           <a:xfrm>
-            <a:off x="1417320" y="3465576"/>
-            <a:ext cx="9875520" cy="393192"/>
-          </a:xfrm>
-          <a:prstGeom prst="rect">
-            <a:avLst/>
-          </a:prstGeom>
-          <a:noFill/>
-        </p:spPr>
-        <p:txBody>
-          <a:bodyPr wrap="square" lIns="18288" rIns="18288" tIns="18288" bIns="0">
-            <a:spAutoFit/>
-          </a:bodyPr>
-          <a:lstStyle/>
-          <a:p>
-            <a:pPr>
-              <a:spcAft>
-                <a:spcPts val="500"/>
-              </a:spcAft>
-              <a:defRPr sz="1900" b="0">
+            <a:off x="1417320" y="3081528"/>
+            <a:ext cx="9875520" cy="329184"/>
+          </a:xfrm>
+          <a:prstGeom prst="rect">
+            <a:avLst/>
+          </a:prstGeom>
+          <a:noFill/>
+        </p:spPr>
+        <p:txBody>
+          <a:bodyPr wrap="square" lIns="18288" rIns="18288" tIns="18288" bIns="0">
+            <a:spAutoFit/>
+          </a:bodyPr>
+          <a:lstStyle/>
+          <a:p>
+            <a:pPr>
+              <a:spcAft>
+                <a:spcPts val="500"/>
+              </a:spcAft>
+              <a:defRPr sz="1700" b="0">
                 <a:solidFill>
                   <a:srgbClr val="647282"/>
                 </a:solidFill>
@@ -12687,7 +12542,7 @@
               </a:defRPr>
             </a:pPr>
             <a:r>
-              <a:t>Complete groups, topology, and placement relationships</a:t>
+              <a:t>Multi-level gang and network topology</a:t>
             </a:r>
           </a:p>
         </p:txBody>
@@ -12700,7 +12555,7 @@
         </p:nvSpPr>
         <p:spPr>
           <a:xfrm>
-            <a:off x="621792" y="4178807"/>
+            <a:off x="621792" y="3648456"/>
             <a:ext cx="530352" cy="292608"/>
           </a:xfrm>
           <a:prstGeom prst="rect">
@@ -12744,7 +12599,7 @@
         </p:nvSpPr>
         <p:spPr>
           <a:xfrm>
-            <a:off x="685800" y="4206240"/>
+            <a:off x="685800" y="3675888"/>
             <a:ext cx="438912" cy="219456"/>
           </a:xfrm>
           <a:prstGeom prst="rect">
@@ -12783,25 +12638,25 @@
         </p:nvSpPr>
         <p:spPr>
           <a:xfrm>
-            <a:off x="1417320" y="4123944"/>
-            <a:ext cx="9875520" cy="411480"/>
-          </a:xfrm>
-          <a:prstGeom prst="rect">
-            <a:avLst/>
-          </a:prstGeom>
-          <a:noFill/>
-        </p:spPr>
-        <p:txBody>
-          <a:bodyPr wrap="square" lIns="18288" rIns="18288" tIns="18288" bIns="0">
-            <a:spAutoFit/>
-          </a:bodyPr>
-          <a:lstStyle/>
-          <a:p>
-            <a:pPr>
-              <a:spcAft>
-                <a:spcPts val="500"/>
-              </a:spcAft>
-              <a:defRPr sz="2500" b="1">
+            <a:off x="1417320" y="3593592"/>
+            <a:ext cx="9875520" cy="384048"/>
+          </a:xfrm>
+          <a:prstGeom prst="rect">
+            <a:avLst/>
+          </a:prstGeom>
+          <a:noFill/>
+        </p:spPr>
+        <p:txBody>
+          <a:bodyPr wrap="square" lIns="18288" rIns="18288" tIns="18288" bIns="0">
+            <a:spAutoFit/>
+          </a:bodyPr>
+          <a:lstStyle/>
+          <a:p>
+            <a:pPr>
+              <a:spcAft>
+                <a:spcPts val="500"/>
+              </a:spcAft>
+              <a:defRPr sz="2300" b="1">
                 <a:solidFill>
                   <a:srgbClr val="202D3C"/>
                 </a:solidFill>
@@ -12809,7 +12664,7 @@
               </a:defRPr>
             </a:pPr>
             <a:r>
-              <a:t>Bring the semantics into controllers</a:t>
+              <a:t>Extend ecosystem integrations</a:t>
             </a:r>
           </a:p>
         </p:txBody>
@@ -12822,25 +12677,25 @@
         </p:nvSpPr>
         <p:spPr>
           <a:xfrm>
-            <a:off x="1417320" y="4636008"/>
-            <a:ext cx="9875520" cy="393192"/>
-          </a:xfrm>
-          <a:prstGeom prst="rect">
-            <a:avLst/>
-          </a:prstGeom>
-          <a:noFill/>
-        </p:spPr>
-        <p:txBody>
-          <a:bodyPr wrap="square" lIns="18288" rIns="18288" tIns="18288" bIns="0">
-            <a:spAutoFit/>
-          </a:bodyPr>
-          <a:lstStyle/>
-          <a:p>
-            <a:pPr>
-              <a:spcAft>
-                <a:spcPts val="500"/>
-              </a:spcAft>
-              <a:defRPr sz="1900" b="0">
+            <a:off x="1417320" y="4032504"/>
+            <a:ext cx="9875520" cy="329184"/>
+          </a:xfrm>
+          <a:prstGeom prst="rect">
+            <a:avLst/>
+          </a:prstGeom>
+          <a:noFill/>
+        </p:spPr>
+        <p:txBody>
+          <a:bodyPr wrap="square" lIns="18288" rIns="18288" tIns="18288" bIns="0">
+            <a:spAutoFit/>
+          </a:bodyPr>
+          <a:lstStyle/>
+          <a:p>
+            <a:pPr>
+              <a:spcAft>
+                <a:spcPts val="500"/>
+              </a:spcAft>
+              <a:defRPr sz="1700" b="0">
                 <a:solidFill>
                   <a:srgbClr val="647282"/>
                 </a:solidFill>
@@ -12848,21 +12703,182 @@
               </a:defRPr>
             </a:pPr>
             <a:r>
-              <a:t>Share use cases and help build integrations</a:t>
-            </a:r>
-          </a:p>
-        </p:txBody>
-      </p:sp>
-      <p:sp>
-        <p:nvSpPr>
-          <p:cNvPr id="21" name="TextBox 20"/>
-          <p:cNvSpPr txBox="1"/>
-          <p:nvPr/>
-        </p:nvSpPr>
-        <p:spPr>
-          <a:xfrm>
-            <a:off x="640080" y="5486400"/>
-            <a:ext cx="10789920" cy="274320"/>
+              <a:t>Existing adoption and deeper controller mappings</a:t>
+            </a:r>
+          </a:p>
+        </p:txBody>
+      </p:sp>
+      <p:sp>
+        <p:nvSpPr>
+          <p:cNvPr id="21" name="Rectangle 20"/>
+          <p:cNvSpPr/>
+          <p:nvPr/>
+        </p:nvSpPr>
+        <p:spPr>
+          <a:xfrm>
+            <a:off x="621792" y="4599431"/>
+            <a:ext cx="530352" cy="292608"/>
+          </a:xfrm>
+          <a:prstGeom prst="rect">
+            <a:avLst/>
+          </a:prstGeom>
+          <a:solidFill>
+            <a:srgbClr val="F0F5FB"/>
+          </a:solidFill>
+          <a:ln>
+            <a:noFill/>
+          </a:ln>
+          <a:effectLst/>
+        </p:spPr>
+        <p:style>
+          <a:lnRef idx="1">
+            <a:schemeClr val="accent1"/>
+          </a:lnRef>
+          <a:fillRef idx="3">
+            <a:schemeClr val="accent1"/>
+          </a:fillRef>
+          <a:effectRef idx="0">
+            <a:schemeClr val="accent1"/>
+          </a:effectRef>
+          <a:fontRef idx="minor">
+            <a:schemeClr val="lt1"/>
+          </a:fontRef>
+        </p:style>
+        <p:txBody>
+          <a:bodyPr rtlCol="0" anchor="ctr"/>
+          <a:lstStyle/>
+          <a:p>
+            <a:pPr algn="ctr"/>
+          </a:p>
+        </p:txBody>
+      </p:sp>
+      <p:sp>
+        <p:nvSpPr>
+          <p:cNvPr id="22" name="TextBox 21"/>
+          <p:cNvSpPr txBox="1"/>
+          <p:nvPr/>
+        </p:nvSpPr>
+        <p:spPr>
+          <a:xfrm>
+            <a:off x="685800" y="4626864"/>
+            <a:ext cx="438912" cy="219456"/>
+          </a:xfrm>
+          <a:prstGeom prst="rect">
+            <a:avLst/>
+          </a:prstGeom>
+          <a:noFill/>
+        </p:spPr>
+        <p:txBody>
+          <a:bodyPr wrap="square" lIns="18288" rIns="18288" tIns="18288" bIns="0">
+            <a:spAutoFit/>
+          </a:bodyPr>
+          <a:lstStyle/>
+          <a:p>
+            <a:pPr>
+              <a:spcAft>
+                <a:spcPts val="500"/>
+              </a:spcAft>
+              <a:defRPr sz="1000" b="1">
+                <a:solidFill>
+                  <a:srgbClr val="356696"/>
+                </a:solidFill>
+                <a:latin typeface="Liberation Sans"/>
+              </a:defRPr>
+            </a:pPr>
+            <a:r>
+              <a:t>04</a:t>
+            </a:r>
+          </a:p>
+        </p:txBody>
+      </p:sp>
+      <p:sp>
+        <p:nvSpPr>
+          <p:cNvPr id="23" name="TextBox 22"/>
+          <p:cNvSpPr txBox="1"/>
+          <p:nvPr/>
+        </p:nvSpPr>
+        <p:spPr>
+          <a:xfrm>
+            <a:off x="1417320" y="4544568"/>
+            <a:ext cx="9875520" cy="384048"/>
+          </a:xfrm>
+          <a:prstGeom prst="rect">
+            <a:avLst/>
+          </a:prstGeom>
+          <a:noFill/>
+        </p:spPr>
+        <p:txBody>
+          <a:bodyPr wrap="square" lIns="18288" rIns="18288" tIns="18288" bIns="0">
+            <a:spAutoFit/>
+          </a:bodyPr>
+          <a:lstStyle/>
+          <a:p>
+            <a:pPr>
+              <a:spcAft>
+                <a:spcPts val="500"/>
+              </a:spcAft>
+              <a:defRPr sz="2300" b="1">
+                <a:solidFill>
+                  <a:srgbClr val="202D3C"/>
+                </a:solidFill>
+                <a:latin typeface="Liberation Sans"/>
+              </a:defRPr>
+            </a:pPr>
+            <a:r>
+              <a:t>Measure and improve</a:t>
+            </a:r>
+          </a:p>
+        </p:txBody>
+      </p:sp>
+      <p:sp>
+        <p:nvSpPr>
+          <p:cNvPr id="24" name="TextBox 23"/>
+          <p:cNvSpPr txBox="1"/>
+          <p:nvPr/>
+        </p:nvSpPr>
+        <p:spPr>
+          <a:xfrm>
+            <a:off x="1417320" y="4983479"/>
+            <a:ext cx="9875520" cy="329184"/>
+          </a:xfrm>
+          <a:prstGeom prst="rect">
+            <a:avLst/>
+          </a:prstGeom>
+          <a:noFill/>
+        </p:spPr>
+        <p:txBody>
+          <a:bodyPr wrap="square" lIns="18288" rIns="18288" tIns="18288" bIns="0">
+            <a:spAutoFit/>
+          </a:bodyPr>
+          <a:lstStyle/>
+          <a:p>
+            <a:pPr>
+              <a:spcAft>
+                <a:spcPts val="500"/>
+              </a:spcAft>
+              <a:defRPr sz="1700" b="0">
+                <a:solidFill>
+                  <a:srgbClr val="647282"/>
+                </a:solidFill>
+                <a:latin typeface="Liberation Sans"/>
+              </a:defRPr>
+            </a:pPr>
+            <a:r>
+              <a:t>Repeatable benchmarks and ongoing validation</a:t>
+            </a:r>
+          </a:p>
+        </p:txBody>
+      </p:sp>
+      <p:sp>
+        <p:nvSpPr>
+          <p:cNvPr id="25" name="TextBox 24"/>
+          <p:cNvSpPr txBox="1"/>
+          <p:nvPr/>
+        </p:nvSpPr>
+        <p:spPr>
+          <a:xfrm>
+            <a:off x="640080" y="5559552"/>
+            <a:ext cx="10789920" cy="246888"/>
           </a:xfrm>
           <a:prstGeom prst="rect">
             <a:avLst/>
@@ -12887,7 +12903,7 @@
               </a:defRPr>
             </a:pPr>
             <a:r>
-              <a:t>github.com/volcano-sh/volcano  ·  v1.17 roadmap: issue #6166</a:t>
+              <a:t>Contribute workload profiles, reproducible observations, and integration feedback.</a:t>
             </a:r>
           </a:p>
         </p:txBody>
@@ -13118,7 +13134,7 @@
               </a:defRPr>
             </a:pPr>
             <a:r>
-              <a:t>备份材料：NodeShard 模式、关键 API、plugin 开关、生态版本与来源；正式版移除此提示。</a:t>
+              <a:t>备份材料：NodeShard 模式、关键 API、生态版本与 benchmark 方法；正式版移除此提示。</a:t>
             </a:r>
           </a:p>
         </p:txBody>
